--- a/docs/week05/UC8_Week05_Milestone1_Presentation.pptx
+++ b/docs/week05/UC8_Week05_Milestone1_Presentation.pptx
@@ -3153,8 +3153,8 @@
         </p:nvSpPr>
         <p:spPr>
           <a:xfrm>
-            <a:off x="914400" y="822960"/>
-            <a:ext cx="1097280" cy="73152"/>
+            <a:off x="914400" y="777240"/>
+            <a:ext cx="1371600" cy="82296"/>
           </a:xfrm>
           <a:prstGeom prst="rect">
             <a:avLst/>
@@ -3196,8 +3196,8 @@
         </p:nvSpPr>
         <p:spPr>
           <a:xfrm>
-            <a:off x="914400" y="1051560"/>
-            <a:ext cx="10362895" cy="2011680"/>
+            <a:off x="914400" y="960120"/>
+            <a:ext cx="10362895" cy="2103120"/>
           </a:xfrm>
           <a:prstGeom prst="rect">
             <a:avLst/>
@@ -3211,7 +3211,7 @@
           <a:lstStyle/>
           <a:p>
             <a:pPr>
-              <a:defRPr sz="2800" b="1">
+              <a:defRPr sz="2900" b="1">
                 <a:solidFill>
                   <a:srgbClr val="F1F5F9"/>
                 </a:solidFill>
@@ -3223,7 +3223,7 @@
           </a:p>
           <a:p>
             <a:pPr>
-              <a:defRPr sz="2800" b="1">
+              <a:defRPr sz="2900" b="1">
                 <a:solidFill>
                   <a:srgbClr val="0284C7"/>
                 </a:solidFill>
@@ -3235,14 +3235,14 @@
           </a:p>
           <a:p>
             <a:pPr>
-              <a:defRPr sz="1600">
+              <a:defRPr sz="1700">
                 <a:solidFill>
                   <a:srgbClr val="94A3B8"/>
                 </a:solidFill>
               </a:defRPr>
             </a:pPr>
             <a:r>
-              <a:t>Milestone 1 Defense &amp; Performance Verification (UR10e Workcell)</a:t>
+              <a:t>Milestone 1 Official Defense &amp; Technical Evaluation (Week 05)</a:t>
             </a:r>
           </a:p>
         </p:txBody>
@@ -3260,7 +3260,7 @@
           </a:xfrm>
           <a:prstGeom prst="roundRect">
             <a:avLst>
-              <a:gd name="adj" fmla="val 3000"/>
+              <a:gd name="adj" fmla="val 2500"/>
             </a:avLst>
           </a:prstGeom>
           <a:solidFill>
@@ -3318,9 +3318,9 @@
           <a:p>
             <a:pPr>
               <a:spcAft>
-                <a:spcPts val="800"/>
+                <a:spcPts val="1000"/>
               </a:spcAft>
-              <a:defRPr sz="1200" b="1">
+              <a:defRPr sz="1300" b="1">
                 <a:solidFill>
                   <a:srgbClr val="0284C7"/>
                 </a:solidFill>
@@ -3333,11 +3333,11 @@
           <a:p>
             <a:pPr>
               <a:spcAft>
-                <a:spcPts val="400"/>
+                <a:spcPts val="500"/>
               </a:spcAft>
             </a:pPr>
             <a:r>
-              <a:rPr b="1" sz="1000">
+              <a:rPr b="1" sz="1100">
                 <a:solidFill>
                   <a:srgbClr val="F1F5F9"/>
                 </a:solidFill>
@@ -3345,7 +3345,7 @@
               <a:t>• Course:         </a:t>
             </a:r>
             <a:r>
-              <a:rPr sz="1000">
+              <a:rPr sz="1100">
                 <a:solidFill>
                   <a:srgbClr val="CBD5E1"/>
                 </a:solidFill>
@@ -3356,11 +3356,11 @@
           <a:p>
             <a:pPr>
               <a:spcAft>
-                <a:spcPts val="400"/>
+                <a:spcPts val="500"/>
               </a:spcAft>
             </a:pPr>
             <a:r>
-              <a:rPr b="1" sz="1000">
+              <a:rPr b="1" sz="1100">
                 <a:solidFill>
                   <a:srgbClr val="F1F5F9"/>
                 </a:solidFill>
@@ -3368,22 +3368,22 @@
               <a:t>• System:         </a:t>
             </a:r>
             <a:r>
-              <a:rPr sz="1000">
+              <a:rPr sz="1100">
                 <a:solidFill>
                   <a:srgbClr val="CBD5E1"/>
                 </a:solidFill>
               </a:rPr>
-              <a:t>UR10e, 3.6m Conveyor, 2-Finger Claw, MoveIt &amp; Unity</a:t>
+              <a:t>UR10e (6-DOF) + 3.6m Conveyor + 2-Finger Claw + 3 Bins</a:t>
             </a:r>
           </a:p>
           <a:p>
             <a:pPr>
               <a:spcAft>
-                <a:spcPts val="400"/>
+                <a:spcPts val="500"/>
               </a:spcAft>
             </a:pPr>
             <a:r>
-              <a:rPr b="1" sz="1000">
+              <a:rPr b="1" sz="1100">
                 <a:solidFill>
                   <a:srgbClr val="F1F5F9"/>
                 </a:solidFill>
@@ -3391,7 +3391,7 @@
               <a:t>• Evaluation:     </a:t>
             </a:r>
             <a:r>
-              <a:rPr sz="1000">
+              <a:rPr sz="1100">
                 <a:solidFill>
                   <a:srgbClr val="CBD5E1"/>
                 </a:solidFill>
@@ -3402,11 +3402,11 @@
           <a:p>
             <a:pPr>
               <a:spcAft>
-                <a:spcPts val="400"/>
+                <a:spcPts val="500"/>
               </a:spcAft>
             </a:pPr>
             <a:r>
-              <a:rPr b="1" sz="1000">
+              <a:rPr b="1" sz="1100">
                 <a:solidFill>
                   <a:srgbClr val="F1F5F9"/>
                 </a:solidFill>
@@ -3414,7 +3414,7 @@
               <a:t>• Next Phase:     </a:t>
             </a:r>
             <a:r>
-              <a:rPr sz="1000">
+              <a:rPr sz="1100">
                 <a:solidFill>
                   <a:srgbClr val="CBD5E1"/>
                 </a:solidFill>
@@ -3425,19 +3425,19 @@
           <a:p>
             <a:pPr>
               <a:spcAft>
-                <a:spcPts val="400"/>
+                <a:spcPts val="500"/>
               </a:spcAft>
             </a:pPr>
             <a:r>
-              <a:rPr b="1" sz="1000">
+              <a:rPr b="1" sz="1100">
                 <a:solidFill>
                   <a:srgbClr val="F1F5F9"/>
                 </a:solidFill>
               </a:rPr>
-              <a:t>• Status:         </a:t>
-            </a:r>
-            <a:r>
-              <a:rPr sz="1000">
+              <a:t>• Empirical Status: </a:t>
+            </a:r>
+            <a:r>
+              <a:rPr sz="1100">
                 <a:solidFill>
                   <a:srgbClr val="CBD5E1"/>
                 </a:solidFill>
@@ -3460,7 +3460,7 @@
           </a:xfrm>
           <a:prstGeom prst="roundRect">
             <a:avLst>
-              <a:gd name="adj" fmla="val 3000"/>
+              <a:gd name="adj" fmla="val 2500"/>
             </a:avLst>
           </a:prstGeom>
           <a:solidFill>
@@ -3518,9 +3518,9 @@
           <a:p>
             <a:pPr>
               <a:spcAft>
-                <a:spcPts val="800"/>
+                <a:spcPts val="1000"/>
               </a:spcAft>
-              <a:defRPr sz="1200" b="1">
+              <a:defRPr sz="1300" b="1">
                 <a:solidFill>
                   <a:srgbClr val="059669"/>
                 </a:solidFill>
@@ -3533,11 +3533,11 @@
           <a:p>
             <a:pPr>
               <a:spcAft>
-                <a:spcPts val="400"/>
+                <a:spcPts val="500"/>
               </a:spcAft>
             </a:pPr>
             <a:r>
-              <a:rPr b="1" sz="1000">
+              <a:rPr b="1" sz="1100">
                 <a:solidFill>
                   <a:srgbClr val="059669"/>
                 </a:solidFill>
@@ -3545,7 +3545,7 @@
               <a:t>✔ UR10e Motion Streaming: </a:t>
             </a:r>
             <a:r>
-              <a:rPr sz="1000">
+              <a:rPr sz="1100">
                 <a:solidFill>
                   <a:srgbClr val="CBD5E1"/>
                 </a:solidFill>
@@ -3556,34 +3556,34 @@
           <a:p>
             <a:pPr>
               <a:spcAft>
-                <a:spcPts val="400"/>
+                <a:spcPts val="500"/>
               </a:spcAft>
             </a:pPr>
             <a:r>
-              <a:rPr b="1" sz="1000">
+              <a:rPr b="1" sz="1100">
                 <a:solidFill>
                   <a:srgbClr val="059669"/>
                 </a:solidFill>
               </a:rPr>
-              <a:t>✔ Procedural 2-Finger Claw: </a:t>
-            </a:r>
-            <a:r>
-              <a:rPr sz="1000">
+              <a:t>✔ Industrial 2-Finger Claw: </a:t>
+            </a:r>
+            <a:r>
+              <a:rPr sz="1100">
                 <a:solidFill>
                   <a:srgbClr val="CBD5E1"/>
                 </a:solidFill>
               </a:rPr>
-              <a:t>Flange mount, status LED, aluminum arms, rubber pads</a:t>
+              <a:t>Procedural flange mount, status LED, aluminum arms</a:t>
             </a:r>
           </a:p>
           <a:p>
             <a:pPr>
               <a:spcAft>
-                <a:spcPts val="400"/>
+                <a:spcPts val="500"/>
               </a:spcAft>
             </a:pPr>
             <a:r>
-              <a:rPr b="1" sz="1000">
+              <a:rPr b="1" sz="1100">
                 <a:solidFill>
                   <a:srgbClr val="059669"/>
                 </a:solidFill>
@@ -3591,7 +3591,7 @@
               <a:t>✔ Autonomous Sequencer: </a:t>
             </a:r>
             <a:r>
-              <a:rPr sz="1000">
+              <a:rPr sz="1100">
                 <a:solidFill>
                   <a:srgbClr val="CBD5E1"/>
                 </a:solidFill>
@@ -3602,11 +3602,11 @@
           <a:p>
             <a:pPr>
               <a:spcAft>
-                <a:spcPts val="400"/>
+                <a:spcPts val="500"/>
               </a:spcAft>
             </a:pPr>
             <a:r>
-              <a:rPr b="1" sz="1000">
+              <a:rPr b="1" sz="1100">
                 <a:solidFill>
                   <a:srgbClr val="059669"/>
                 </a:solidFill>
@@ -3614,22 +3614,22 @@
               <a:t>✔ Zero-Teleport Physics: </a:t>
             </a:r>
             <a:r>
-              <a:rPr sz="1000">
+              <a:rPr sz="1100">
                 <a:solidFill>
                   <a:srgbClr val="CBD5E1"/>
                 </a:solidFill>
               </a:rPr>
-              <a:t>Pure friction coasting stop halting cubes with ±3mm precision</a:t>
+              <a:t>Pure friction coasting stop halting cubes (±3mm precision)</a:t>
             </a:r>
           </a:p>
           <a:p>
             <a:pPr>
               <a:spcAft>
-                <a:spcPts val="400"/>
+                <a:spcPts val="500"/>
               </a:spcAft>
             </a:pPr>
             <a:r>
-              <a:rPr b="1" sz="1000">
+              <a:rPr b="1" sz="1100">
                 <a:solidFill>
                   <a:srgbClr val="059669"/>
                 </a:solidFill>
@@ -3637,7 +3637,7 @@
               <a:t>✔ Quality Assurance: </a:t>
             </a:r>
             <a:r>
-              <a:rPr sz="1000">
+              <a:rPr sz="1100">
                 <a:solidFill>
                   <a:srgbClr val="CBD5E1"/>
                 </a:solidFill>
@@ -3673,8 +3673,8 @@
         </p:nvSpPr>
         <p:spPr>
           <a:xfrm>
-            <a:off x="731520" y="365760"/>
-            <a:ext cx="9144000" cy="274320"/>
+            <a:off x="731520" y="347472"/>
+            <a:ext cx="9144000" cy="292608"/>
           </a:xfrm>
           <a:prstGeom prst="rect">
             <a:avLst/>
@@ -3688,7 +3688,7 @@
           <a:lstStyle/>
           <a:p>
             <a:pPr>
-              <a:defRPr sz="1000" b="1">
+              <a:defRPr sz="1100" b="1">
                 <a:solidFill>
                   <a:srgbClr val="0284C7"/>
                 </a:solidFill>
@@ -3709,7 +3709,7 @@
         <p:spPr>
           <a:xfrm>
             <a:off x="731520" y="621792"/>
-            <a:ext cx="10515600" cy="548640"/>
+            <a:ext cx="10515600" cy="594360"/>
           </a:xfrm>
           <a:prstGeom prst="rect">
             <a:avLst/>
@@ -3723,14 +3723,14 @@
           <a:lstStyle/>
           <a:p>
             <a:pPr>
-              <a:defRPr sz="2000" b="1">
+              <a:defRPr sz="2200" b="1">
                 <a:solidFill>
                   <a:srgbClr val="0F2B48"/>
                 </a:solidFill>
               </a:defRPr>
             </a:pPr>
             <a:r>
-              <a:t>7-Step Closed-Loop Task State Machine</a:t>
+              <a:t>7-Step Closed-Loop Task State Machine Execution</a:t>
             </a:r>
           </a:p>
         </p:txBody>
@@ -3743,8 +3743,8 @@
         </p:nvSpPr>
         <p:spPr>
           <a:xfrm>
-            <a:off x="731520" y="1207008"/>
-            <a:ext cx="10728655" cy="18288"/>
+            <a:off x="731520" y="1243584"/>
+            <a:ext cx="10728655" cy="22860"/>
           </a:xfrm>
           <a:prstGeom prst="rect">
             <a:avLst/>
@@ -3786,7 +3786,7 @@
         </p:nvSpPr>
         <p:spPr>
           <a:xfrm>
-            <a:off x="731520" y="6309360"/>
+            <a:off x="731520" y="6327648"/>
             <a:ext cx="10728655" cy="13716"/>
           </a:xfrm>
           <a:prstGeom prst="rect">
@@ -3829,8 +3829,8 @@
         </p:nvSpPr>
         <p:spPr>
           <a:xfrm>
-            <a:off x="731520" y="6355080"/>
-            <a:ext cx="7315200" cy="320040"/>
+            <a:off x="731520" y="6364224"/>
+            <a:ext cx="7772400" cy="320040"/>
           </a:xfrm>
           <a:prstGeom prst="rect">
             <a:avLst/>
@@ -3844,7 +3844,7 @@
           <a:lstStyle/>
           <a:p>
             <a:pPr>
-              <a:defRPr sz="900">
+              <a:defRPr sz="950">
                 <a:solidFill>
                   <a:srgbClr val="64748B"/>
                 </a:solidFill>
@@ -3864,8 +3864,8 @@
         </p:nvSpPr>
         <p:spPr>
           <a:xfrm>
-            <a:off x="9631375" y="6355080"/>
-            <a:ext cx="1828800" cy="320040"/>
+            <a:off x="9357055" y="6364224"/>
+            <a:ext cx="2103120" cy="320040"/>
           </a:xfrm>
           <a:prstGeom prst="rect">
             <a:avLst/>
@@ -3879,7 +3879,7 @@
           <a:lstStyle/>
           <a:p>
             <a:pPr algn="r">
-              <a:defRPr sz="900" b="1">
+              <a:defRPr sz="950" b="1">
                 <a:solidFill>
                   <a:srgbClr val="0284C7"/>
                 </a:solidFill>
@@ -3900,8 +3900,8 @@
           <p:nvPr/>
         </p:nvGraphicFramePr>
         <p:xfrm>
-          <a:off x="731520" y="1463040"/>
-          <a:ext cx="10728655" cy="4572000"/>
+          <a:off x="731520" y="1444752"/>
+          <a:ext cx="10728655" cy="4663440"/>
         </p:xfrm>
         <a:graphic>
           <a:graphicData uri="http://schemas.openxmlformats.org/drawingml/2006/table">
@@ -3915,14 +3915,14 @@
                 <a:gridCol w="4327855"/>
                 <a:gridCol w="3657600"/>
               </a:tblGrid>
-              <a:tr h="508000">
+              <a:tr h="518160">
                 <a:tc>
                   <a:txBody>
                     <a:bodyPr/>
                     <a:lstStyle/>
                     <a:p>
                       <a:pPr>
-                        <a:defRPr b="1" sz="1000">
+                        <a:defRPr b="1" sz="1100">
                           <a:solidFill>
                             <a:srgbClr val="F1F5F9"/>
                           </a:solidFill>
@@ -3945,7 +3945,7 @@
                     <a:lstStyle/>
                     <a:p>
                       <a:pPr>
-                        <a:defRPr b="1" sz="1000">
+                        <a:defRPr b="1" sz="1100">
                           <a:solidFill>
                             <a:srgbClr val="F1F5F9"/>
                           </a:solidFill>
@@ -3968,7 +3968,7 @@
                     <a:lstStyle/>
                     <a:p>
                       <a:pPr>
-                        <a:defRPr b="1" sz="1000">
+                        <a:defRPr b="1" sz="1100">
                           <a:solidFill>
                             <a:srgbClr val="F1F5F9"/>
                           </a:solidFill>
@@ -3991,7 +3991,7 @@
                     <a:lstStyle/>
                     <a:p>
                       <a:pPr>
-                        <a:defRPr b="1" sz="1000">
+                        <a:defRPr b="1" sz="1100">
                           <a:solidFill>
                             <a:srgbClr val="F1F5F9"/>
                           </a:solidFill>
@@ -4009,14 +4009,14 @@
                   </a:tcPr>
                 </a:tc>
               </a:tr>
-              <a:tr h="508000">
+              <a:tr h="518160">
                 <a:tc>
                   <a:txBody>
                     <a:bodyPr/>
                     <a:lstStyle/>
                     <a:p>
                       <a:pPr>
-                        <a:defRPr sz="950" b="1">
+                        <a:defRPr sz="1050" b="1">
                           <a:solidFill>
                             <a:srgbClr val="1E293B"/>
                           </a:solidFill>
@@ -4039,7 +4039,7 @@
                     <a:lstStyle/>
                     <a:p>
                       <a:pPr>
-                        <a:defRPr sz="950">
+                        <a:defRPr sz="1050">
                           <a:solidFill>
                             <a:srgbClr val="1E293B"/>
                           </a:solidFill>
@@ -4062,7 +4062,7 @@
                     <a:lstStyle/>
                     <a:p>
                       <a:pPr>
-                        <a:defRPr sz="950">
+                        <a:defRPr sz="1050">
                           <a:solidFill>
                             <a:srgbClr val="1E293B"/>
                           </a:solidFill>
@@ -4085,7 +4085,7 @@
                     <a:lstStyle/>
                     <a:p>
                       <a:pPr>
-                        <a:defRPr sz="950">
+                        <a:defRPr sz="1050">
                           <a:solidFill>
                             <a:srgbClr val="1E293B"/>
                           </a:solidFill>
@@ -4103,14 +4103,14 @@
                   </a:tcPr>
                 </a:tc>
               </a:tr>
-              <a:tr h="508000">
+              <a:tr h="518160">
                 <a:tc>
                   <a:txBody>
                     <a:bodyPr/>
                     <a:lstStyle/>
                     <a:p>
                       <a:pPr>
-                        <a:defRPr sz="950" b="1">
+                        <a:defRPr sz="1050" b="1">
                           <a:solidFill>
                             <a:srgbClr val="1E293B"/>
                           </a:solidFill>
@@ -4133,7 +4133,7 @@
                     <a:lstStyle/>
                     <a:p>
                       <a:pPr>
-                        <a:defRPr sz="950">
+                        <a:defRPr sz="1050">
                           <a:solidFill>
                             <a:srgbClr val="1E293B"/>
                           </a:solidFill>
@@ -4156,7 +4156,7 @@
                     <a:lstStyle/>
                     <a:p>
                       <a:pPr>
-                        <a:defRPr sz="950">
+                        <a:defRPr sz="1050">
                           <a:solidFill>
                             <a:srgbClr val="1E293B"/>
                           </a:solidFill>
@@ -4179,7 +4179,7 @@
                     <a:lstStyle/>
                     <a:p>
                       <a:pPr>
-                        <a:defRPr sz="950">
+                        <a:defRPr sz="1050">
                           <a:solidFill>
                             <a:srgbClr val="1E293B"/>
                           </a:solidFill>
@@ -4197,14 +4197,14 @@
                   </a:tcPr>
                 </a:tc>
               </a:tr>
-              <a:tr h="508000">
+              <a:tr h="518160">
                 <a:tc>
                   <a:txBody>
                     <a:bodyPr/>
                     <a:lstStyle/>
                     <a:p>
                       <a:pPr>
-                        <a:defRPr sz="950" b="1">
+                        <a:defRPr sz="1050" b="1">
                           <a:solidFill>
                             <a:srgbClr val="1E293B"/>
                           </a:solidFill>
@@ -4227,7 +4227,7 @@
                     <a:lstStyle/>
                     <a:p>
                       <a:pPr>
-                        <a:defRPr sz="950">
+                        <a:defRPr sz="1050">
                           <a:solidFill>
                             <a:srgbClr val="1E293B"/>
                           </a:solidFill>
@@ -4250,7 +4250,7 @@
                     <a:lstStyle/>
                     <a:p>
                       <a:pPr>
-                        <a:defRPr sz="950">
+                        <a:defRPr sz="1050">
                           <a:solidFill>
                             <a:srgbClr val="1E293B"/>
                           </a:solidFill>
@@ -4273,7 +4273,7 @@
                     <a:lstStyle/>
                     <a:p>
                       <a:pPr>
-                        <a:defRPr sz="950">
+                        <a:defRPr sz="1050">
                           <a:solidFill>
                             <a:srgbClr val="1E293B"/>
                           </a:solidFill>
@@ -4291,14 +4291,14 @@
                   </a:tcPr>
                 </a:tc>
               </a:tr>
-              <a:tr h="508000">
+              <a:tr h="518160">
                 <a:tc>
                   <a:txBody>
                     <a:bodyPr/>
                     <a:lstStyle/>
                     <a:p>
                       <a:pPr>
-                        <a:defRPr sz="950" b="1">
+                        <a:defRPr sz="1050" b="1">
                           <a:solidFill>
                             <a:srgbClr val="1E293B"/>
                           </a:solidFill>
@@ -4321,7 +4321,7 @@
                     <a:lstStyle/>
                     <a:p>
                       <a:pPr>
-                        <a:defRPr sz="950">
+                        <a:defRPr sz="1050">
                           <a:solidFill>
                             <a:srgbClr val="1E293B"/>
                           </a:solidFill>
@@ -4344,7 +4344,7 @@
                     <a:lstStyle/>
                     <a:p>
                       <a:pPr>
-                        <a:defRPr sz="950">
+                        <a:defRPr sz="1050">
                           <a:solidFill>
                             <a:srgbClr val="1E293B"/>
                           </a:solidFill>
@@ -4367,7 +4367,7 @@
                     <a:lstStyle/>
                     <a:p>
                       <a:pPr>
-                        <a:defRPr sz="950">
+                        <a:defRPr sz="1050">
                           <a:solidFill>
                             <a:srgbClr val="1E293B"/>
                           </a:solidFill>
@@ -4385,14 +4385,14 @@
                   </a:tcPr>
                 </a:tc>
               </a:tr>
-              <a:tr h="508000">
+              <a:tr h="518160">
                 <a:tc>
                   <a:txBody>
                     <a:bodyPr/>
                     <a:lstStyle/>
                     <a:p>
                       <a:pPr>
-                        <a:defRPr sz="950" b="1">
+                        <a:defRPr sz="1050" b="1">
                           <a:solidFill>
                             <a:srgbClr val="1E293B"/>
                           </a:solidFill>
@@ -4415,7 +4415,7 @@
                     <a:lstStyle/>
                     <a:p>
                       <a:pPr>
-                        <a:defRPr sz="950">
+                        <a:defRPr sz="1050">
                           <a:solidFill>
                             <a:srgbClr val="1E293B"/>
                           </a:solidFill>
@@ -4438,7 +4438,7 @@
                     <a:lstStyle/>
                     <a:p>
                       <a:pPr>
-                        <a:defRPr sz="950">
+                        <a:defRPr sz="1050">
                           <a:solidFill>
                             <a:srgbClr val="1E293B"/>
                           </a:solidFill>
@@ -4461,7 +4461,7 @@
                     <a:lstStyle/>
                     <a:p>
                       <a:pPr>
-                        <a:defRPr sz="950">
+                        <a:defRPr sz="1050">
                           <a:solidFill>
                             <a:srgbClr val="1E293B"/>
                           </a:solidFill>
@@ -4479,14 +4479,14 @@
                   </a:tcPr>
                 </a:tc>
               </a:tr>
-              <a:tr h="508000">
+              <a:tr h="518160">
                 <a:tc>
                   <a:txBody>
                     <a:bodyPr/>
                     <a:lstStyle/>
                     <a:p>
                       <a:pPr>
-                        <a:defRPr sz="950" b="1">
+                        <a:defRPr sz="1050" b="1">
                           <a:solidFill>
                             <a:srgbClr val="1E293B"/>
                           </a:solidFill>
@@ -4509,7 +4509,7 @@
                     <a:lstStyle/>
                     <a:p>
                       <a:pPr>
-                        <a:defRPr sz="950">
+                        <a:defRPr sz="1050">
                           <a:solidFill>
                             <a:srgbClr val="1E293B"/>
                           </a:solidFill>
@@ -4532,7 +4532,7 @@
                     <a:lstStyle/>
                     <a:p>
                       <a:pPr>
-                        <a:defRPr sz="950">
+                        <a:defRPr sz="1050">
                           <a:solidFill>
                             <a:srgbClr val="1E293B"/>
                           </a:solidFill>
@@ -4555,7 +4555,7 @@
                     <a:lstStyle/>
                     <a:p>
                       <a:pPr>
-                        <a:defRPr sz="950">
+                        <a:defRPr sz="1050">
                           <a:solidFill>
                             <a:srgbClr val="1E293B"/>
                           </a:solidFill>
@@ -4573,14 +4573,14 @@
                   </a:tcPr>
                 </a:tc>
               </a:tr>
-              <a:tr h="508000">
+              <a:tr h="518160">
                 <a:tc>
                   <a:txBody>
                     <a:bodyPr/>
                     <a:lstStyle/>
                     <a:p>
                       <a:pPr>
-                        <a:defRPr sz="950" b="1">
+                        <a:defRPr sz="1050" b="1">
                           <a:solidFill>
                             <a:srgbClr val="1E293B"/>
                           </a:solidFill>
@@ -4603,7 +4603,7 @@
                     <a:lstStyle/>
                     <a:p>
                       <a:pPr>
-                        <a:defRPr sz="950">
+                        <a:defRPr sz="1050">
                           <a:solidFill>
                             <a:srgbClr val="1E293B"/>
                           </a:solidFill>
@@ -4626,7 +4626,7 @@
                     <a:lstStyle/>
                     <a:p>
                       <a:pPr>
-                        <a:defRPr sz="950">
+                        <a:defRPr sz="1050">
                           <a:solidFill>
                             <a:srgbClr val="1E293B"/>
                           </a:solidFill>
@@ -4649,7 +4649,7 @@
                     <a:lstStyle/>
                     <a:p>
                       <a:pPr>
-                        <a:defRPr sz="950">
+                        <a:defRPr sz="1050">
                           <a:solidFill>
                             <a:srgbClr val="1E293B"/>
                           </a:solidFill>
@@ -4667,14 +4667,14 @@
                   </a:tcPr>
                 </a:tc>
               </a:tr>
-              <a:tr h="508000">
+              <a:tr h="518160">
                 <a:tc>
                   <a:txBody>
                     <a:bodyPr/>
                     <a:lstStyle/>
                     <a:p>
                       <a:pPr>
-                        <a:defRPr sz="950" b="1">
+                        <a:defRPr sz="1050" b="1">
                           <a:solidFill>
                             <a:srgbClr val="1E293B"/>
                           </a:solidFill>
@@ -4697,7 +4697,7 @@
                     <a:lstStyle/>
                     <a:p>
                       <a:pPr>
-                        <a:defRPr sz="950">
+                        <a:defRPr sz="1050">
                           <a:solidFill>
                             <a:srgbClr val="1E293B"/>
                           </a:solidFill>
@@ -4720,7 +4720,7 @@
                     <a:lstStyle/>
                     <a:p>
                       <a:pPr>
-                        <a:defRPr sz="950">
+                        <a:defRPr sz="1050">
                           <a:solidFill>
                             <a:srgbClr val="1E293B"/>
                           </a:solidFill>
@@ -4743,7 +4743,7 @@
                     <a:lstStyle/>
                     <a:p>
                       <a:pPr>
-                        <a:defRPr sz="950">
+                        <a:defRPr sz="1050">
                           <a:solidFill>
                             <a:srgbClr val="1E293B"/>
                           </a:solidFill>
@@ -4791,8 +4791,8 @@
         </p:nvSpPr>
         <p:spPr>
           <a:xfrm>
-            <a:off x="731520" y="365760"/>
-            <a:ext cx="9144000" cy="274320"/>
+            <a:off x="731520" y="347472"/>
+            <a:ext cx="9144000" cy="292608"/>
           </a:xfrm>
           <a:prstGeom prst="rect">
             <a:avLst/>
@@ -4806,7 +4806,7 @@
           <a:lstStyle/>
           <a:p>
             <a:pPr>
-              <a:defRPr sz="1000" b="1">
+              <a:defRPr sz="1100" b="1">
                 <a:solidFill>
                   <a:srgbClr val="0284C7"/>
                 </a:solidFill>
@@ -4827,7 +4827,7 @@
         <p:spPr>
           <a:xfrm>
             <a:off x="731520" y="621792"/>
-            <a:ext cx="10515600" cy="548640"/>
+            <a:ext cx="10515600" cy="594360"/>
           </a:xfrm>
           <a:prstGeom prst="rect">
             <a:avLst/>
@@ -4841,7 +4841,7 @@
           <a:lstStyle/>
           <a:p>
             <a:pPr>
-              <a:defRPr sz="2000" b="1">
+              <a:defRPr sz="2200" b="1">
                 <a:solidFill>
                   <a:srgbClr val="0F2B48"/>
                 </a:solidFill>
@@ -4861,8 +4861,8 @@
         </p:nvSpPr>
         <p:spPr>
           <a:xfrm>
-            <a:off x="731520" y="1207008"/>
-            <a:ext cx="10728655" cy="18288"/>
+            <a:off x="731520" y="1243584"/>
+            <a:ext cx="10728655" cy="22860"/>
           </a:xfrm>
           <a:prstGeom prst="rect">
             <a:avLst/>
@@ -4904,7 +4904,7 @@
         </p:nvSpPr>
         <p:spPr>
           <a:xfrm>
-            <a:off x="731520" y="6309360"/>
+            <a:off x="731520" y="6327648"/>
             <a:ext cx="10728655" cy="13716"/>
           </a:xfrm>
           <a:prstGeom prst="rect">
@@ -4947,8 +4947,8 @@
         </p:nvSpPr>
         <p:spPr>
           <a:xfrm>
-            <a:off x="731520" y="6355080"/>
-            <a:ext cx="7315200" cy="320040"/>
+            <a:off x="731520" y="6364224"/>
+            <a:ext cx="7772400" cy="320040"/>
           </a:xfrm>
           <a:prstGeom prst="rect">
             <a:avLst/>
@@ -4962,7 +4962,7 @@
           <a:lstStyle/>
           <a:p>
             <a:pPr>
-              <a:defRPr sz="900">
+              <a:defRPr sz="950">
                 <a:solidFill>
                   <a:srgbClr val="64748B"/>
                 </a:solidFill>
@@ -4982,8 +4982,8 @@
         </p:nvSpPr>
         <p:spPr>
           <a:xfrm>
-            <a:off x="9631375" y="6355080"/>
-            <a:ext cx="1828800" cy="320040"/>
+            <a:off x="9357055" y="6364224"/>
+            <a:ext cx="2103120" cy="320040"/>
           </a:xfrm>
           <a:prstGeom prst="rect">
             <a:avLst/>
@@ -4997,7 +4997,7 @@
           <a:lstStyle/>
           <a:p>
             <a:pPr algn="r">
-              <a:defRPr sz="900" b="1">
+              <a:defRPr sz="950" b="1">
                 <a:solidFill>
                   <a:srgbClr val="0284C7"/>
                 </a:solidFill>
@@ -5018,8 +5018,8 @@
           <p:nvPr/>
         </p:nvGraphicFramePr>
         <p:xfrm>
-          <a:off x="731520" y="1463040"/>
-          <a:ext cx="10728655" cy="4572000"/>
+          <a:off x="731520" y="1444752"/>
+          <a:ext cx="10728655" cy="4663440"/>
         </p:xfrm>
         <a:graphic>
           <a:graphicData uri="http://schemas.openxmlformats.org/drawingml/2006/table">
@@ -5033,14 +5033,14 @@
                 <a:gridCol w="3291840"/>
                 <a:gridCol w="2499055"/>
               </a:tblGrid>
-              <a:tr h="653142">
+              <a:tr h="666205">
                 <a:tc>
                   <a:txBody>
                     <a:bodyPr/>
                     <a:lstStyle/>
                     <a:p>
                       <a:pPr>
-                        <a:defRPr b="1" sz="1000">
+                        <a:defRPr b="1" sz="1100">
                           <a:solidFill>
                             <a:srgbClr val="F1F5F9"/>
                           </a:solidFill>
@@ -5063,7 +5063,7 @@
                     <a:lstStyle/>
                     <a:p>
                       <a:pPr>
-                        <a:defRPr b="1" sz="1000">
+                        <a:defRPr b="1" sz="1100">
                           <a:solidFill>
                             <a:srgbClr val="F1F5F9"/>
                           </a:solidFill>
@@ -5086,14 +5086,14 @@
                     <a:lstStyle/>
                     <a:p>
                       <a:pPr>
-                        <a:defRPr b="1" sz="1000">
+                        <a:defRPr b="1" sz="1100">
                           <a:solidFill>
                             <a:srgbClr val="F1F5F9"/>
                           </a:solidFill>
                         </a:defRPr>
                       </a:pPr>
                       <a:r>
-                        <a:t>Empirical Result</a:t>
+                        <a:t>Empirical Measured Result</a:t>
                       </a:r>
                     </a:p>
                   </a:txBody>
@@ -5109,7 +5109,7 @@
                     <a:lstStyle/>
                     <a:p>
                       <a:pPr>
-                        <a:defRPr b="1" sz="1000">
+                        <a:defRPr b="1" sz="1100">
                           <a:solidFill>
                             <a:srgbClr val="F1F5F9"/>
                           </a:solidFill>
@@ -5127,14 +5127,14 @@
                   </a:tcPr>
                 </a:tc>
               </a:tr>
-              <a:tr h="653142">
+              <a:tr h="666205">
                 <a:tc>
                   <a:txBody>
                     <a:bodyPr/>
                     <a:lstStyle/>
                     <a:p>
                       <a:pPr>
-                        <a:defRPr sz="950" b="1">
+                        <a:defRPr sz="1050" b="1">
                           <a:solidFill>
                             <a:srgbClr val="1E293B"/>
                           </a:solidFill>
@@ -5157,7 +5157,7 @@
                     <a:lstStyle/>
                     <a:p>
                       <a:pPr>
-                        <a:defRPr sz="950">
+                        <a:defRPr sz="1050">
                           <a:solidFill>
                             <a:srgbClr val="1E293B"/>
                           </a:solidFill>
@@ -5180,7 +5180,7 @@
                     <a:lstStyle/>
                     <a:p>
                       <a:pPr>
-                        <a:defRPr sz="950">
+                        <a:defRPr sz="1050">
                           <a:solidFill>
                             <a:srgbClr val="1E293B"/>
                           </a:solidFill>
@@ -5203,7 +5203,7 @@
                     <a:lstStyle/>
                     <a:p>
                       <a:pPr>
-                        <a:defRPr sz="950">
+                        <a:defRPr sz="1050">
                           <a:solidFill>
                             <a:srgbClr val="1E293B"/>
                           </a:solidFill>
@@ -5221,14 +5221,14 @@
                   </a:tcPr>
                 </a:tc>
               </a:tr>
-              <a:tr h="653142">
+              <a:tr h="666205">
                 <a:tc>
                   <a:txBody>
                     <a:bodyPr/>
                     <a:lstStyle/>
                     <a:p>
                       <a:pPr>
-                        <a:defRPr sz="950" b="1">
+                        <a:defRPr sz="1050" b="1">
                           <a:solidFill>
                             <a:srgbClr val="1E293B"/>
                           </a:solidFill>
@@ -5251,7 +5251,7 @@
                     <a:lstStyle/>
                     <a:p>
                       <a:pPr>
-                        <a:defRPr sz="950">
+                        <a:defRPr sz="1050">
                           <a:solidFill>
                             <a:srgbClr val="1E293B"/>
                           </a:solidFill>
@@ -5274,7 +5274,7 @@
                     <a:lstStyle/>
                     <a:p>
                       <a:pPr>
-                        <a:defRPr sz="950">
+                        <a:defRPr sz="1050">
                           <a:solidFill>
                             <a:srgbClr val="1E293B"/>
                           </a:solidFill>
@@ -5297,7 +5297,7 @@
                     <a:lstStyle/>
                     <a:p>
                       <a:pPr>
-                        <a:defRPr sz="950">
+                        <a:defRPr sz="1050">
                           <a:solidFill>
                             <a:srgbClr val="1E293B"/>
                           </a:solidFill>
@@ -5315,14 +5315,14 @@
                   </a:tcPr>
                 </a:tc>
               </a:tr>
-              <a:tr h="653142">
+              <a:tr h="666205">
                 <a:tc>
                   <a:txBody>
                     <a:bodyPr/>
                     <a:lstStyle/>
                     <a:p>
                       <a:pPr>
-                        <a:defRPr sz="950" b="1">
+                        <a:defRPr sz="1050" b="1">
                           <a:solidFill>
                             <a:srgbClr val="1E293B"/>
                           </a:solidFill>
@@ -5345,7 +5345,7 @@
                     <a:lstStyle/>
                     <a:p>
                       <a:pPr>
-                        <a:defRPr sz="950">
+                        <a:defRPr sz="1050">
                           <a:solidFill>
                             <a:srgbClr val="1E293B"/>
                           </a:solidFill>
@@ -5368,7 +5368,7 @@
                     <a:lstStyle/>
                     <a:p>
                       <a:pPr>
-                        <a:defRPr sz="950">
+                        <a:defRPr sz="1050">
                           <a:solidFill>
                             <a:srgbClr val="1E293B"/>
                           </a:solidFill>
@@ -5391,7 +5391,7 @@
                     <a:lstStyle/>
                     <a:p>
                       <a:pPr>
-                        <a:defRPr sz="950">
+                        <a:defRPr sz="1050">
                           <a:solidFill>
                             <a:srgbClr val="1E293B"/>
                           </a:solidFill>
@@ -5409,14 +5409,14 @@
                   </a:tcPr>
                 </a:tc>
               </a:tr>
-              <a:tr h="653142">
+              <a:tr h="666205">
                 <a:tc>
                   <a:txBody>
                     <a:bodyPr/>
                     <a:lstStyle/>
                     <a:p>
                       <a:pPr>
-                        <a:defRPr sz="950" b="1">
+                        <a:defRPr sz="1050" b="1">
                           <a:solidFill>
                             <a:srgbClr val="1E293B"/>
                           </a:solidFill>
@@ -5439,7 +5439,7 @@
                     <a:lstStyle/>
                     <a:p>
                       <a:pPr>
-                        <a:defRPr sz="950">
+                        <a:defRPr sz="1050">
                           <a:solidFill>
                             <a:srgbClr val="1E293B"/>
                           </a:solidFill>
@@ -5462,7 +5462,7 @@
                     <a:lstStyle/>
                     <a:p>
                       <a:pPr>
-                        <a:defRPr sz="950">
+                        <a:defRPr sz="1050">
                           <a:solidFill>
                             <a:srgbClr val="1E293B"/>
                           </a:solidFill>
@@ -5485,7 +5485,7 @@
                     <a:lstStyle/>
                     <a:p>
                       <a:pPr>
-                        <a:defRPr sz="950">
+                        <a:defRPr sz="1050">
                           <a:solidFill>
                             <a:srgbClr val="1E293B"/>
                           </a:solidFill>
@@ -5503,14 +5503,14 @@
                   </a:tcPr>
                 </a:tc>
               </a:tr>
-              <a:tr h="653142">
+              <a:tr h="666205">
                 <a:tc>
                   <a:txBody>
                     <a:bodyPr/>
                     <a:lstStyle/>
                     <a:p>
                       <a:pPr>
-                        <a:defRPr sz="950" b="1">
+                        <a:defRPr sz="1050" b="1">
                           <a:solidFill>
                             <a:srgbClr val="1E293B"/>
                           </a:solidFill>
@@ -5533,7 +5533,7 @@
                     <a:lstStyle/>
                     <a:p>
                       <a:pPr>
-                        <a:defRPr sz="950">
+                        <a:defRPr sz="1050">
                           <a:solidFill>
                             <a:srgbClr val="1E293B"/>
                           </a:solidFill>
@@ -5556,7 +5556,7 @@
                     <a:lstStyle/>
                     <a:p>
                       <a:pPr>
-                        <a:defRPr sz="950">
+                        <a:defRPr sz="1050">
                           <a:solidFill>
                             <a:srgbClr val="1E293B"/>
                           </a:solidFill>
@@ -5579,7 +5579,7 @@
                     <a:lstStyle/>
                     <a:p>
                       <a:pPr>
-                        <a:defRPr sz="950">
+                        <a:defRPr sz="1050">
                           <a:solidFill>
                             <a:srgbClr val="1E293B"/>
                           </a:solidFill>
@@ -5597,14 +5597,14 @@
                   </a:tcPr>
                 </a:tc>
               </a:tr>
-              <a:tr h="653148">
+              <a:tr h="666210">
                 <a:tc>
                   <a:txBody>
                     <a:bodyPr/>
                     <a:lstStyle/>
                     <a:p>
                       <a:pPr>
-                        <a:defRPr sz="950" b="1">
+                        <a:defRPr sz="1050" b="1">
                           <a:solidFill>
                             <a:srgbClr val="1E293B"/>
                           </a:solidFill>
@@ -5627,7 +5627,7 @@
                     <a:lstStyle/>
                     <a:p>
                       <a:pPr>
-                        <a:defRPr sz="950">
+                        <a:defRPr sz="1050">
                           <a:solidFill>
                             <a:srgbClr val="1E293B"/>
                           </a:solidFill>
@@ -5650,7 +5650,7 @@
                     <a:lstStyle/>
                     <a:p>
                       <a:pPr>
-                        <a:defRPr sz="950">
+                        <a:defRPr sz="1050">
                           <a:solidFill>
                             <a:srgbClr val="1E293B"/>
                           </a:solidFill>
@@ -5673,7 +5673,7 @@
                     <a:lstStyle/>
                     <a:p>
                       <a:pPr>
-                        <a:defRPr sz="950">
+                        <a:defRPr sz="1050">
                           <a:solidFill>
                             <a:srgbClr val="1E293B"/>
                           </a:solidFill>
@@ -5721,8 +5721,8 @@
         </p:nvSpPr>
         <p:spPr>
           <a:xfrm>
-            <a:off x="731520" y="365760"/>
-            <a:ext cx="9144000" cy="274320"/>
+            <a:off x="731520" y="347472"/>
+            <a:ext cx="9144000" cy="292608"/>
           </a:xfrm>
           <a:prstGeom prst="rect">
             <a:avLst/>
@@ -5736,7 +5736,7 @@
           <a:lstStyle/>
           <a:p>
             <a:pPr>
-              <a:defRPr sz="1000" b="1">
+              <a:defRPr sz="1100" b="1">
                 <a:solidFill>
                   <a:srgbClr val="0284C7"/>
                 </a:solidFill>
@@ -5757,7 +5757,7 @@
         <p:spPr>
           <a:xfrm>
             <a:off x="731520" y="621792"/>
-            <a:ext cx="10515600" cy="548640"/>
+            <a:ext cx="10515600" cy="594360"/>
           </a:xfrm>
           <a:prstGeom prst="rect">
             <a:avLst/>
@@ -5771,7 +5771,7 @@
           <a:lstStyle/>
           <a:p>
             <a:pPr>
-              <a:defRPr sz="2000" b="1">
+              <a:defRPr sz="2200" b="1">
                 <a:solidFill>
                   <a:srgbClr val="0F2B48"/>
                 </a:solidFill>
@@ -5791,8 +5791,8 @@
         </p:nvSpPr>
         <p:spPr>
           <a:xfrm>
-            <a:off x="731520" y="1207008"/>
-            <a:ext cx="10728655" cy="18288"/>
+            <a:off x="731520" y="1243584"/>
+            <a:ext cx="10728655" cy="22860"/>
           </a:xfrm>
           <a:prstGeom prst="rect">
             <a:avLst/>
@@ -5834,7 +5834,7 @@
         </p:nvSpPr>
         <p:spPr>
           <a:xfrm>
-            <a:off x="731520" y="6309360"/>
+            <a:off x="731520" y="6327648"/>
             <a:ext cx="10728655" cy="13716"/>
           </a:xfrm>
           <a:prstGeom prst="rect">
@@ -5877,8 +5877,8 @@
         </p:nvSpPr>
         <p:spPr>
           <a:xfrm>
-            <a:off x="731520" y="6355080"/>
-            <a:ext cx="7315200" cy="320040"/>
+            <a:off x="731520" y="6364224"/>
+            <a:ext cx="7772400" cy="320040"/>
           </a:xfrm>
           <a:prstGeom prst="rect">
             <a:avLst/>
@@ -5892,7 +5892,7 @@
           <a:lstStyle/>
           <a:p>
             <a:pPr>
-              <a:defRPr sz="900">
+              <a:defRPr sz="950">
                 <a:solidFill>
                   <a:srgbClr val="64748B"/>
                 </a:solidFill>
@@ -5912,8 +5912,8 @@
         </p:nvSpPr>
         <p:spPr>
           <a:xfrm>
-            <a:off x="9631375" y="6355080"/>
-            <a:ext cx="1828800" cy="320040"/>
+            <a:off x="9357055" y="6364224"/>
+            <a:ext cx="2103120" cy="320040"/>
           </a:xfrm>
           <a:prstGeom prst="rect">
             <a:avLst/>
@@ -5927,7 +5927,7 @@
           <a:lstStyle/>
           <a:p>
             <a:pPr algn="r">
-              <a:defRPr sz="900" b="1">
+              <a:defRPr sz="950" b="1">
                 <a:solidFill>
                   <a:srgbClr val="0284C7"/>
                 </a:solidFill>
@@ -5947,12 +5947,12 @@
         </p:nvSpPr>
         <p:spPr>
           <a:xfrm>
-            <a:off x="731520" y="1463040"/>
-            <a:ext cx="3413455" cy="4572000"/>
+            <a:off x="731520" y="1444752"/>
+            <a:ext cx="3413455" cy="4663440"/>
           </a:xfrm>
           <a:prstGeom prst="roundRect">
             <a:avLst>
-              <a:gd name="adj" fmla="val 3000"/>
+              <a:gd name="adj" fmla="val 2500"/>
             </a:avLst>
           </a:prstGeom>
           <a:solidFill>
@@ -5995,7 +5995,7 @@
         <p:spPr>
           <a:xfrm>
             <a:off x="914400" y="1645920"/>
-            <a:ext cx="3047695" cy="4206240"/>
+            <a:ext cx="3047695" cy="4297680"/>
           </a:xfrm>
           <a:prstGeom prst="rect">
             <a:avLst/>
@@ -6010,9 +6010,9 @@
           <a:p>
             <a:pPr>
               <a:spcAft>
-                <a:spcPts val="1000"/>
+                <a:spcPts val="1200"/>
               </a:spcAft>
-              <a:defRPr sz="1200" b="1">
+              <a:defRPr sz="1300" b="1">
                 <a:solidFill>
                   <a:srgbClr val="0F2B48"/>
                 </a:solidFill>
@@ -6025,9 +6025,9 @@
           <a:p>
             <a:pPr>
               <a:spcAft>
-                <a:spcPts val="600"/>
+                <a:spcPts val="800"/>
               </a:spcAft>
-              <a:defRPr sz="950">
+              <a:defRPr sz="1050">
                 <a:solidFill>
                   <a:srgbClr val="1E293B"/>
                 </a:solidFill>
@@ -6040,9 +6040,9 @@
           <a:p>
             <a:pPr>
               <a:spcAft>
-                <a:spcPts val="600"/>
+                <a:spcPts val="800"/>
               </a:spcAft>
-              <a:defRPr sz="950">
+              <a:defRPr sz="1050">
                 <a:solidFill>
                   <a:srgbClr val="1E293B"/>
                 </a:solidFill>
@@ -6055,9 +6055,9 @@
           <a:p>
             <a:pPr>
               <a:spcAft>
-                <a:spcPts val="600"/>
+                <a:spcPts val="800"/>
               </a:spcAft>
-              <a:defRPr sz="950">
+              <a:defRPr sz="1050">
                 <a:solidFill>
                   <a:srgbClr val="1E293B"/>
                 </a:solidFill>
@@ -6077,12 +6077,12 @@
         </p:nvSpPr>
         <p:spPr>
           <a:xfrm>
-            <a:off x="4389120" y="1463040"/>
-            <a:ext cx="3413455" cy="4572000"/>
+            <a:off x="4389120" y="1444752"/>
+            <a:ext cx="3413455" cy="4663440"/>
           </a:xfrm>
           <a:prstGeom prst="roundRect">
             <a:avLst>
-              <a:gd name="adj" fmla="val 3000"/>
+              <a:gd name="adj" fmla="val 2500"/>
             </a:avLst>
           </a:prstGeom>
           <a:solidFill>
@@ -6125,7 +6125,7 @@
         <p:spPr>
           <a:xfrm>
             <a:off x="4572000" y="1645920"/>
-            <a:ext cx="3047695" cy="4206240"/>
+            <a:ext cx="3047695" cy="4297680"/>
           </a:xfrm>
           <a:prstGeom prst="rect">
             <a:avLst/>
@@ -6140,9 +6140,9 @@
           <a:p>
             <a:pPr>
               <a:spcAft>
-                <a:spcPts val="1000"/>
+                <a:spcPts val="1200"/>
               </a:spcAft>
-              <a:defRPr sz="1200" b="1">
+              <a:defRPr sz="1300" b="1">
                 <a:solidFill>
                   <a:srgbClr val="0F2B48"/>
                 </a:solidFill>
@@ -6155,9 +6155,9 @@
           <a:p>
             <a:pPr>
               <a:spcAft>
-                <a:spcPts val="600"/>
+                <a:spcPts val="800"/>
               </a:spcAft>
-              <a:defRPr sz="950">
+              <a:defRPr sz="1050">
                 <a:solidFill>
                   <a:srgbClr val="1E293B"/>
                 </a:solidFill>
@@ -6170,9 +6170,9 @@
           <a:p>
             <a:pPr>
               <a:spcAft>
-                <a:spcPts val="600"/>
+                <a:spcPts val="800"/>
               </a:spcAft>
-              <a:defRPr sz="950">
+              <a:defRPr sz="1050">
                 <a:solidFill>
                   <a:srgbClr val="1E293B"/>
                 </a:solidFill>
@@ -6185,9 +6185,9 @@
           <a:p>
             <a:pPr>
               <a:spcAft>
-                <a:spcPts val="600"/>
+                <a:spcPts val="800"/>
               </a:spcAft>
-              <a:defRPr sz="950">
+              <a:defRPr sz="1050">
                 <a:solidFill>
                   <a:srgbClr val="1E293B"/>
                 </a:solidFill>
@@ -6207,12 +6207,12 @@
         </p:nvSpPr>
         <p:spPr>
           <a:xfrm>
-            <a:off x="8046720" y="1463040"/>
-            <a:ext cx="3413455" cy="4572000"/>
+            <a:off x="8046720" y="1444752"/>
+            <a:ext cx="3413455" cy="4663440"/>
           </a:xfrm>
           <a:prstGeom prst="roundRect">
             <a:avLst>
-              <a:gd name="adj" fmla="val 3000"/>
+              <a:gd name="adj" fmla="val 2500"/>
             </a:avLst>
           </a:prstGeom>
           <a:solidFill>
@@ -6255,7 +6255,7 @@
         <p:spPr>
           <a:xfrm>
             <a:off x="8229600" y="1645920"/>
-            <a:ext cx="3047695" cy="4206240"/>
+            <a:ext cx="3047695" cy="4297680"/>
           </a:xfrm>
           <a:prstGeom prst="rect">
             <a:avLst/>
@@ -6270,9 +6270,9 @@
           <a:p>
             <a:pPr>
               <a:spcAft>
-                <a:spcPts val="1000"/>
+                <a:spcPts val="1200"/>
               </a:spcAft>
-              <a:defRPr sz="1200" b="1">
+              <a:defRPr sz="1300" b="1">
                 <a:solidFill>
                   <a:srgbClr val="0F2B48"/>
                 </a:solidFill>
@@ -6285,9 +6285,9 @@
           <a:p>
             <a:pPr>
               <a:spcAft>
-                <a:spcPts val="600"/>
+                <a:spcPts val="800"/>
               </a:spcAft>
-              <a:defRPr sz="950">
+              <a:defRPr sz="1050">
                 <a:solidFill>
                   <a:srgbClr val="1E293B"/>
                 </a:solidFill>
@@ -6300,9 +6300,9 @@
           <a:p>
             <a:pPr>
               <a:spcAft>
-                <a:spcPts val="600"/>
+                <a:spcPts val="800"/>
               </a:spcAft>
-              <a:defRPr sz="950">
+              <a:defRPr sz="1050">
                 <a:solidFill>
                   <a:srgbClr val="1E293B"/>
                 </a:solidFill>
@@ -6315,9 +6315,9 @@
           <a:p>
             <a:pPr>
               <a:spcAft>
-                <a:spcPts val="600"/>
+                <a:spcPts val="800"/>
               </a:spcAft>
-              <a:defRPr sz="950">
+              <a:defRPr sz="1050">
                 <a:solidFill>
                   <a:srgbClr val="1E293B"/>
                 </a:solidFill>
@@ -6355,8 +6355,8 @@
         </p:nvSpPr>
         <p:spPr>
           <a:xfrm>
-            <a:off x="731520" y="365760"/>
-            <a:ext cx="9144000" cy="274320"/>
+            <a:off x="731520" y="347472"/>
+            <a:ext cx="9144000" cy="292608"/>
           </a:xfrm>
           <a:prstGeom prst="rect">
             <a:avLst/>
@@ -6370,7 +6370,7 @@
           <a:lstStyle/>
           <a:p>
             <a:pPr>
-              <a:defRPr sz="1000" b="1">
+              <a:defRPr sz="1100" b="1">
                 <a:solidFill>
                   <a:srgbClr val="0284C7"/>
                 </a:solidFill>
@@ -6391,7 +6391,7 @@
         <p:spPr>
           <a:xfrm>
             <a:off x="731520" y="621792"/>
-            <a:ext cx="10515600" cy="548640"/>
+            <a:ext cx="10515600" cy="594360"/>
           </a:xfrm>
           <a:prstGeom prst="rect">
             <a:avLst/>
@@ -6405,7 +6405,7 @@
           <a:lstStyle/>
           <a:p>
             <a:pPr>
-              <a:defRPr sz="2000" b="1">
+              <a:defRPr sz="2200" b="1">
                 <a:solidFill>
                   <a:srgbClr val="0F2B48"/>
                 </a:solidFill>
@@ -6425,8 +6425,8 @@
         </p:nvSpPr>
         <p:spPr>
           <a:xfrm>
-            <a:off x="731520" y="1207008"/>
-            <a:ext cx="10728655" cy="18288"/>
+            <a:off x="731520" y="1243584"/>
+            <a:ext cx="10728655" cy="22860"/>
           </a:xfrm>
           <a:prstGeom prst="rect">
             <a:avLst/>
@@ -6468,7 +6468,7 @@
         </p:nvSpPr>
         <p:spPr>
           <a:xfrm>
-            <a:off x="731520" y="6309360"/>
+            <a:off x="731520" y="6327648"/>
             <a:ext cx="10728655" cy="13716"/>
           </a:xfrm>
           <a:prstGeom prst="rect">
@@ -6511,8 +6511,8 @@
         </p:nvSpPr>
         <p:spPr>
           <a:xfrm>
-            <a:off x="731520" y="6355080"/>
-            <a:ext cx="7315200" cy="320040"/>
+            <a:off x="731520" y="6364224"/>
+            <a:ext cx="7772400" cy="320040"/>
           </a:xfrm>
           <a:prstGeom prst="rect">
             <a:avLst/>
@@ -6526,7 +6526,7 @@
           <a:lstStyle/>
           <a:p>
             <a:pPr>
-              <a:defRPr sz="900">
+              <a:defRPr sz="950">
                 <a:solidFill>
                   <a:srgbClr val="64748B"/>
                 </a:solidFill>
@@ -6546,8 +6546,8 @@
         </p:nvSpPr>
         <p:spPr>
           <a:xfrm>
-            <a:off x="9631375" y="6355080"/>
-            <a:ext cx="1828800" cy="320040"/>
+            <a:off x="9357055" y="6364224"/>
+            <a:ext cx="2103120" cy="320040"/>
           </a:xfrm>
           <a:prstGeom prst="rect">
             <a:avLst/>
@@ -6561,7 +6561,7 @@
           <a:lstStyle/>
           <a:p>
             <a:pPr algn="r">
-              <a:defRPr sz="900" b="1">
+              <a:defRPr sz="950" b="1">
                 <a:solidFill>
                   <a:srgbClr val="0284C7"/>
                 </a:solidFill>
@@ -6581,12 +6581,12 @@
         </p:nvSpPr>
         <p:spPr>
           <a:xfrm>
-            <a:off x="731520" y="1463040"/>
-            <a:ext cx="3413455" cy="3657600"/>
+            <a:off x="731520" y="1444752"/>
+            <a:ext cx="3413455" cy="3749039"/>
           </a:xfrm>
           <a:prstGeom prst="roundRect">
             <a:avLst>
-              <a:gd name="adj" fmla="val 3000"/>
+              <a:gd name="adj" fmla="val 2500"/>
             </a:avLst>
           </a:prstGeom>
           <a:solidFill>
@@ -6629,7 +6629,7 @@
         <p:spPr>
           <a:xfrm>
             <a:off x="914400" y="1645920"/>
-            <a:ext cx="3047695" cy="3291840"/>
+            <a:ext cx="3047695" cy="3383280"/>
           </a:xfrm>
           <a:prstGeom prst="rect">
             <a:avLst/>
@@ -6646,7 +6646,7 @@
               <a:spcAft>
                 <a:spcPts val="1200"/>
               </a:spcAft>
-              <a:defRPr sz="1300" b="1">
+              <a:defRPr sz="1400" b="1">
                 <a:solidFill>
                   <a:srgbClr val="0F2B48"/>
                 </a:solidFill>
@@ -6659,9 +6659,9 @@
           <a:p>
             <a:pPr>
               <a:spcAft>
-                <a:spcPts val="600"/>
+                <a:spcPts val="800"/>
               </a:spcAft>
-              <a:defRPr sz="950">
+              <a:defRPr sz="1050">
                 <a:solidFill>
                   <a:srgbClr val="1E293B"/>
                 </a:solidFill>
@@ -6674,9 +6674,9 @@
           <a:p>
             <a:pPr>
               <a:spcAft>
-                <a:spcPts val="600"/>
+                <a:spcPts val="800"/>
               </a:spcAft>
-              <a:defRPr sz="950">
+              <a:defRPr sz="1050">
                 <a:solidFill>
                   <a:srgbClr val="1E293B"/>
                 </a:solidFill>
@@ -6689,9 +6689,9 @@
           <a:p>
             <a:pPr>
               <a:spcAft>
-                <a:spcPts val="600"/>
+                <a:spcPts val="800"/>
               </a:spcAft>
-              <a:defRPr sz="950">
+              <a:defRPr sz="1050">
                 <a:solidFill>
                   <a:srgbClr val="1E293B"/>
                 </a:solidFill>
@@ -6711,12 +6711,12 @@
         </p:nvSpPr>
         <p:spPr>
           <a:xfrm>
-            <a:off x="4389120" y="1463040"/>
-            <a:ext cx="3413455" cy="3657600"/>
+            <a:off x="4389120" y="1444752"/>
+            <a:ext cx="3413455" cy="3749039"/>
           </a:xfrm>
           <a:prstGeom prst="roundRect">
             <a:avLst>
-              <a:gd name="adj" fmla="val 3000"/>
+              <a:gd name="adj" fmla="val 2500"/>
             </a:avLst>
           </a:prstGeom>
           <a:solidFill>
@@ -6759,7 +6759,7 @@
         <p:spPr>
           <a:xfrm>
             <a:off x="4572000" y="1645920"/>
-            <a:ext cx="3047695" cy="3291840"/>
+            <a:ext cx="3047695" cy="3383280"/>
           </a:xfrm>
           <a:prstGeom prst="rect">
             <a:avLst/>
@@ -6776,7 +6776,7 @@
               <a:spcAft>
                 <a:spcPts val="1200"/>
               </a:spcAft>
-              <a:defRPr sz="1300" b="1">
+              <a:defRPr sz="1400" b="1">
                 <a:solidFill>
                   <a:srgbClr val="0284C7"/>
                 </a:solidFill>
@@ -6789,9 +6789,9 @@
           <a:p>
             <a:pPr>
               <a:spcAft>
-                <a:spcPts val="600"/>
+                <a:spcPts val="800"/>
               </a:spcAft>
-              <a:defRPr sz="950">
+              <a:defRPr sz="1050">
                 <a:solidFill>
                   <a:srgbClr val="1E293B"/>
                 </a:solidFill>
@@ -6804,9 +6804,9 @@
           <a:p>
             <a:pPr>
               <a:spcAft>
-                <a:spcPts val="600"/>
+                <a:spcPts val="800"/>
               </a:spcAft>
-              <a:defRPr sz="950">
+              <a:defRPr sz="1050">
                 <a:solidFill>
                   <a:srgbClr val="1E293B"/>
                 </a:solidFill>
@@ -6819,9 +6819,9 @@
           <a:p>
             <a:pPr>
               <a:spcAft>
-                <a:spcPts val="600"/>
+                <a:spcPts val="800"/>
               </a:spcAft>
-              <a:defRPr sz="950">
+              <a:defRPr sz="1050">
                 <a:solidFill>
                   <a:srgbClr val="1E293B"/>
                 </a:solidFill>
@@ -6841,12 +6841,12 @@
         </p:nvSpPr>
         <p:spPr>
           <a:xfrm>
-            <a:off x="8046720" y="1463040"/>
-            <a:ext cx="3413455" cy="3657600"/>
+            <a:off x="8046720" y="1444752"/>
+            <a:ext cx="3413455" cy="3749039"/>
           </a:xfrm>
           <a:prstGeom prst="roundRect">
             <a:avLst>
-              <a:gd name="adj" fmla="val 3000"/>
+              <a:gd name="adj" fmla="val 2500"/>
             </a:avLst>
           </a:prstGeom>
           <a:solidFill>
@@ -6889,7 +6889,7 @@
         <p:spPr>
           <a:xfrm>
             <a:off x="8229600" y="1645920"/>
-            <a:ext cx="3047695" cy="3291840"/>
+            <a:ext cx="3047695" cy="3383280"/>
           </a:xfrm>
           <a:prstGeom prst="rect">
             <a:avLst/>
@@ -6906,7 +6906,7 @@
               <a:spcAft>
                 <a:spcPts val="1200"/>
               </a:spcAft>
-              <a:defRPr sz="1300" b="1">
+              <a:defRPr sz="1400" b="1">
                 <a:solidFill>
                   <a:srgbClr val="059669"/>
                 </a:solidFill>
@@ -6919,9 +6919,9 @@
           <a:p>
             <a:pPr>
               <a:spcAft>
-                <a:spcPts val="600"/>
+                <a:spcPts val="800"/>
               </a:spcAft>
-              <a:defRPr sz="950">
+              <a:defRPr sz="1050">
                 <a:solidFill>
                   <a:srgbClr val="1E293B"/>
                 </a:solidFill>
@@ -6934,9 +6934,9 @@
           <a:p>
             <a:pPr>
               <a:spcAft>
-                <a:spcPts val="600"/>
+                <a:spcPts val="800"/>
               </a:spcAft>
-              <a:defRPr sz="950">
+              <a:defRPr sz="1050">
                 <a:solidFill>
                   <a:srgbClr val="1E293B"/>
                 </a:solidFill>
@@ -6949,9 +6949,9 @@
           <a:p>
             <a:pPr>
               <a:spcAft>
-                <a:spcPts val="600"/>
+                <a:spcPts val="800"/>
               </a:spcAft>
-              <a:defRPr sz="950">
+              <a:defRPr sz="1050">
                 <a:solidFill>
                   <a:srgbClr val="1E293B"/>
                 </a:solidFill>
@@ -6971,12 +6971,12 @@
         </p:nvSpPr>
         <p:spPr>
           <a:xfrm>
-            <a:off x="731520" y="5303520"/>
+            <a:off x="731520" y="5321808"/>
             <a:ext cx="10728655" cy="868680"/>
           </a:xfrm>
           <a:prstGeom prst="roundRect">
             <a:avLst>
-              <a:gd name="adj" fmla="val 3000"/>
+              <a:gd name="adj" fmla="val 2500"/>
             </a:avLst>
           </a:prstGeom>
           <a:solidFill>
@@ -7018,8 +7018,8 @@
         </p:nvSpPr>
         <p:spPr>
           <a:xfrm>
-            <a:off x="914400" y="5376672"/>
-            <a:ext cx="10362895" cy="731520"/>
+            <a:off x="960120" y="5394960"/>
+            <a:ext cx="10241280" cy="731520"/>
           </a:xfrm>
           <a:prstGeom prst="rect">
             <a:avLst/>
@@ -7036,7 +7036,7 @@
               <a:spcAft>
                 <a:spcPts val="300"/>
               </a:spcAft>
-              <a:defRPr sz="1100" b="1">
+              <a:defRPr sz="1200" b="1">
                 <a:solidFill>
                   <a:srgbClr val="0F2B48"/>
                 </a:solidFill>
@@ -7048,7 +7048,7 @@
           </a:p>
           <a:p>
             <a:pPr>
-              <a:defRPr sz="950">
+              <a:defRPr sz="1050">
                 <a:solidFill>
                   <a:srgbClr val="1E293B"/>
                 </a:solidFill>
@@ -7090,8 +7090,8 @@
         </p:nvSpPr>
         <p:spPr>
           <a:xfrm>
-            <a:off x="731520" y="365760"/>
-            <a:ext cx="9144000" cy="274320"/>
+            <a:off x="731520" y="347472"/>
+            <a:ext cx="9144000" cy="292608"/>
           </a:xfrm>
           <a:prstGeom prst="rect">
             <a:avLst/>
@@ -7105,7 +7105,7 @@
           <a:lstStyle/>
           <a:p>
             <a:pPr>
-              <a:defRPr sz="1000" b="1">
+              <a:defRPr sz="1100" b="1">
                 <a:solidFill>
                   <a:srgbClr val="0284C7"/>
                 </a:solidFill>
@@ -7126,7 +7126,7 @@
         <p:spPr>
           <a:xfrm>
             <a:off x="731520" y="621792"/>
-            <a:ext cx="10515600" cy="548640"/>
+            <a:ext cx="10515600" cy="594360"/>
           </a:xfrm>
           <a:prstGeom prst="rect">
             <a:avLst/>
@@ -7140,7 +7140,7 @@
           <a:lstStyle/>
           <a:p>
             <a:pPr>
-              <a:defRPr sz="2000" b="1">
+              <a:defRPr sz="2200" b="1">
                 <a:solidFill>
                   <a:srgbClr val="0F2B48"/>
                 </a:solidFill>
@@ -7160,8 +7160,8 @@
         </p:nvSpPr>
         <p:spPr>
           <a:xfrm>
-            <a:off x="731520" y="1207008"/>
-            <a:ext cx="10728655" cy="18288"/>
+            <a:off x="731520" y="1243584"/>
+            <a:ext cx="10728655" cy="22860"/>
           </a:xfrm>
           <a:prstGeom prst="rect">
             <a:avLst/>
@@ -7203,7 +7203,7 @@
         </p:nvSpPr>
         <p:spPr>
           <a:xfrm>
-            <a:off x="731520" y="6309360"/>
+            <a:off x="731520" y="6327648"/>
             <a:ext cx="10728655" cy="13716"/>
           </a:xfrm>
           <a:prstGeom prst="rect">
@@ -7246,8 +7246,8 @@
         </p:nvSpPr>
         <p:spPr>
           <a:xfrm>
-            <a:off x="731520" y="6355080"/>
-            <a:ext cx="7315200" cy="320040"/>
+            <a:off x="731520" y="6364224"/>
+            <a:ext cx="7772400" cy="320040"/>
           </a:xfrm>
           <a:prstGeom prst="rect">
             <a:avLst/>
@@ -7261,7 +7261,7 @@
           <a:lstStyle/>
           <a:p>
             <a:pPr>
-              <a:defRPr sz="900">
+              <a:defRPr sz="950">
                 <a:solidFill>
                   <a:srgbClr val="64748B"/>
                 </a:solidFill>
@@ -7281,8 +7281,8 @@
         </p:nvSpPr>
         <p:spPr>
           <a:xfrm>
-            <a:off x="9631375" y="6355080"/>
-            <a:ext cx="1828800" cy="320040"/>
+            <a:off x="9357055" y="6364224"/>
+            <a:ext cx="2103120" cy="320040"/>
           </a:xfrm>
           <a:prstGeom prst="rect">
             <a:avLst/>
@@ -7296,7 +7296,7 @@
           <a:lstStyle/>
           <a:p>
             <a:pPr algn="r">
-              <a:defRPr sz="900" b="1">
+              <a:defRPr sz="950" b="1">
                 <a:solidFill>
                   <a:srgbClr val="0284C7"/>
                 </a:solidFill>
@@ -7316,12 +7316,12 @@
         </p:nvSpPr>
         <p:spPr>
           <a:xfrm>
-            <a:off x="731520" y="1463040"/>
-            <a:ext cx="3413455" cy="3657600"/>
+            <a:off x="731520" y="1444752"/>
+            <a:ext cx="3413455" cy="3749039"/>
           </a:xfrm>
           <a:prstGeom prst="roundRect">
             <a:avLst>
-              <a:gd name="adj" fmla="val 3000"/>
+              <a:gd name="adj" fmla="val 2500"/>
             </a:avLst>
           </a:prstGeom>
           <a:solidFill>
@@ -7364,7 +7364,7 @@
         <p:spPr>
           <a:xfrm>
             <a:off x="914400" y="1645920"/>
-            <a:ext cx="3047695" cy="3291840"/>
+            <a:ext cx="3047695" cy="3383280"/>
           </a:xfrm>
           <a:prstGeom prst="rect">
             <a:avLst/>
@@ -7381,7 +7381,7 @@
               <a:spcAft>
                 <a:spcPts val="1200"/>
               </a:spcAft>
-              <a:defRPr sz="1300" b="1">
+              <a:defRPr sz="1400" b="1">
                 <a:solidFill>
                   <a:srgbClr val="0F2B48"/>
                 </a:solidFill>
@@ -7394,9 +7394,9 @@
           <a:p>
             <a:pPr>
               <a:spcAft>
-                <a:spcPts val="600"/>
+                <a:spcPts val="800"/>
               </a:spcAft>
-              <a:defRPr sz="950">
+              <a:defRPr sz="1050">
                 <a:solidFill>
                   <a:srgbClr val="1E293B"/>
                 </a:solidFill>
@@ -7409,9 +7409,9 @@
           <a:p>
             <a:pPr>
               <a:spcAft>
-                <a:spcPts val="600"/>
+                <a:spcPts val="800"/>
               </a:spcAft>
-              <a:defRPr sz="950">
+              <a:defRPr sz="1050">
                 <a:solidFill>
                   <a:srgbClr val="1E293B"/>
                 </a:solidFill>
@@ -7424,9 +7424,9 @@
           <a:p>
             <a:pPr>
               <a:spcAft>
-                <a:spcPts val="600"/>
+                <a:spcPts val="800"/>
               </a:spcAft>
-              <a:defRPr sz="950">
+              <a:defRPr sz="1050">
                 <a:solidFill>
                   <a:srgbClr val="1E293B"/>
                 </a:solidFill>
@@ -7446,12 +7446,12 @@
         </p:nvSpPr>
         <p:spPr>
           <a:xfrm>
-            <a:off x="4389120" y="1463040"/>
-            <a:ext cx="3413455" cy="3657600"/>
+            <a:off x="4389120" y="1444752"/>
+            <a:ext cx="3413455" cy="3749039"/>
           </a:xfrm>
           <a:prstGeom prst="roundRect">
             <a:avLst>
-              <a:gd name="adj" fmla="val 3000"/>
+              <a:gd name="adj" fmla="val 2500"/>
             </a:avLst>
           </a:prstGeom>
           <a:solidFill>
@@ -7494,7 +7494,7 @@
         <p:spPr>
           <a:xfrm>
             <a:off x="4572000" y="1645920"/>
-            <a:ext cx="3047695" cy="3291840"/>
+            <a:ext cx="3047695" cy="3383280"/>
           </a:xfrm>
           <a:prstGeom prst="rect">
             <a:avLst/>
@@ -7511,7 +7511,7 @@
               <a:spcAft>
                 <a:spcPts val="1200"/>
               </a:spcAft>
-              <a:defRPr sz="1300" b="1">
+              <a:defRPr sz="1400" b="1">
                 <a:solidFill>
                   <a:srgbClr val="0284C7"/>
                 </a:solidFill>
@@ -7524,9 +7524,9 @@
           <a:p>
             <a:pPr>
               <a:spcAft>
-                <a:spcPts val="600"/>
+                <a:spcPts val="800"/>
               </a:spcAft>
-              <a:defRPr sz="950">
+              <a:defRPr sz="1050">
                 <a:solidFill>
                   <a:srgbClr val="1E293B"/>
                 </a:solidFill>
@@ -7539,9 +7539,9 @@
           <a:p>
             <a:pPr>
               <a:spcAft>
-                <a:spcPts val="600"/>
+                <a:spcPts val="800"/>
               </a:spcAft>
-              <a:defRPr sz="950">
+              <a:defRPr sz="1050">
                 <a:solidFill>
                   <a:srgbClr val="1E293B"/>
                 </a:solidFill>
@@ -7554,9 +7554,9 @@
           <a:p>
             <a:pPr>
               <a:spcAft>
-                <a:spcPts val="600"/>
+                <a:spcPts val="800"/>
               </a:spcAft>
-              <a:defRPr sz="950">
+              <a:defRPr sz="1050">
                 <a:solidFill>
                   <a:srgbClr val="1E293B"/>
                 </a:solidFill>
@@ -7576,12 +7576,12 @@
         </p:nvSpPr>
         <p:spPr>
           <a:xfrm>
-            <a:off x="8046720" y="1463040"/>
-            <a:ext cx="3413455" cy="3657600"/>
+            <a:off x="8046720" y="1444752"/>
+            <a:ext cx="3413455" cy="3749039"/>
           </a:xfrm>
           <a:prstGeom prst="roundRect">
             <a:avLst>
-              <a:gd name="adj" fmla="val 3000"/>
+              <a:gd name="adj" fmla="val 2500"/>
             </a:avLst>
           </a:prstGeom>
           <a:solidFill>
@@ -7624,7 +7624,7 @@
         <p:spPr>
           <a:xfrm>
             <a:off x="8229600" y="1645920"/>
-            <a:ext cx="3047695" cy="3291840"/>
+            <a:ext cx="3047695" cy="3383280"/>
           </a:xfrm>
           <a:prstGeom prst="rect">
             <a:avLst/>
@@ -7641,7 +7641,7 @@
               <a:spcAft>
                 <a:spcPts val="1200"/>
               </a:spcAft>
-              <a:defRPr sz="1300" b="1">
+              <a:defRPr sz="1400" b="1">
                 <a:solidFill>
                   <a:srgbClr val="D97706"/>
                 </a:solidFill>
@@ -7654,9 +7654,9 @@
           <a:p>
             <a:pPr>
               <a:spcAft>
-                <a:spcPts val="600"/>
+                <a:spcPts val="800"/>
               </a:spcAft>
-              <a:defRPr sz="950">
+              <a:defRPr sz="1050">
                 <a:solidFill>
                   <a:srgbClr val="1E293B"/>
                 </a:solidFill>
@@ -7669,9 +7669,9 @@
           <a:p>
             <a:pPr>
               <a:spcAft>
-                <a:spcPts val="600"/>
+                <a:spcPts val="800"/>
               </a:spcAft>
-              <a:defRPr sz="950">
+              <a:defRPr sz="1050">
                 <a:solidFill>
                   <a:srgbClr val="1E293B"/>
                 </a:solidFill>
@@ -7684,9 +7684,9 @@
           <a:p>
             <a:pPr>
               <a:spcAft>
-                <a:spcPts val="600"/>
+                <a:spcPts val="800"/>
               </a:spcAft>
-              <a:defRPr sz="950">
+              <a:defRPr sz="1050">
                 <a:solidFill>
                   <a:srgbClr val="1E293B"/>
                 </a:solidFill>
@@ -7706,12 +7706,12 @@
         </p:nvSpPr>
         <p:spPr>
           <a:xfrm>
-            <a:off x="731520" y="5303520"/>
+            <a:off x="731520" y="5321808"/>
             <a:ext cx="10728655" cy="868680"/>
           </a:xfrm>
           <a:prstGeom prst="roundRect">
             <a:avLst>
-              <a:gd name="adj" fmla="val 3000"/>
+              <a:gd name="adj" fmla="val 2500"/>
             </a:avLst>
           </a:prstGeom>
           <a:solidFill>
@@ -7753,8 +7753,8 @@
         </p:nvSpPr>
         <p:spPr>
           <a:xfrm>
-            <a:off x="914400" y="5376672"/>
-            <a:ext cx="10362895" cy="731520"/>
+            <a:off x="960120" y="5394960"/>
+            <a:ext cx="10241280" cy="731520"/>
           </a:xfrm>
           <a:prstGeom prst="rect">
             <a:avLst/>
@@ -7771,7 +7771,7 @@
               <a:spcAft>
                 <a:spcPts val="300"/>
               </a:spcAft>
-              <a:defRPr sz="1100" b="1">
+              <a:defRPr sz="1200" b="1">
                 <a:solidFill>
                   <a:srgbClr val="0F2B48"/>
                 </a:solidFill>
@@ -7783,7 +7783,7 @@
           </a:p>
           <a:p>
             <a:pPr>
-              <a:defRPr sz="950">
+              <a:defRPr sz="1050">
                 <a:solidFill>
                   <a:srgbClr val="1E293B"/>
                 </a:solidFill>
@@ -7825,8 +7825,8 @@
         </p:nvSpPr>
         <p:spPr>
           <a:xfrm>
-            <a:off x="731520" y="365760"/>
-            <a:ext cx="9144000" cy="274320"/>
+            <a:off x="731520" y="347472"/>
+            <a:ext cx="9144000" cy="292608"/>
           </a:xfrm>
           <a:prstGeom prst="rect">
             <a:avLst/>
@@ -7840,7 +7840,7 @@
           <a:lstStyle/>
           <a:p>
             <a:pPr>
-              <a:defRPr sz="1000" b="1">
+              <a:defRPr sz="1100" b="1">
                 <a:solidFill>
                   <a:srgbClr val="0284C7"/>
                 </a:solidFill>
@@ -7861,7 +7861,7 @@
         <p:spPr>
           <a:xfrm>
             <a:off x="731520" y="621792"/>
-            <a:ext cx="10515600" cy="548640"/>
+            <a:ext cx="10515600" cy="594360"/>
           </a:xfrm>
           <a:prstGeom prst="rect">
             <a:avLst/>
@@ -7875,7 +7875,7 @@
           <a:lstStyle/>
           <a:p>
             <a:pPr>
-              <a:defRPr sz="2000" b="1">
+              <a:defRPr sz="2200" b="1">
                 <a:solidFill>
                   <a:srgbClr val="0F2B48"/>
                 </a:solidFill>
@@ -7895,8 +7895,8 @@
         </p:nvSpPr>
         <p:spPr>
           <a:xfrm>
-            <a:off x="731520" y="1207008"/>
-            <a:ext cx="10728655" cy="18288"/>
+            <a:off x="731520" y="1243584"/>
+            <a:ext cx="10728655" cy="22860"/>
           </a:xfrm>
           <a:prstGeom prst="rect">
             <a:avLst/>
@@ -7938,7 +7938,7 @@
         </p:nvSpPr>
         <p:spPr>
           <a:xfrm>
-            <a:off x="731520" y="6309360"/>
+            <a:off x="731520" y="6327648"/>
             <a:ext cx="10728655" cy="13716"/>
           </a:xfrm>
           <a:prstGeom prst="rect">
@@ -7981,8 +7981,8 @@
         </p:nvSpPr>
         <p:spPr>
           <a:xfrm>
-            <a:off x="731520" y="6355080"/>
-            <a:ext cx="7315200" cy="320040"/>
+            <a:off x="731520" y="6364224"/>
+            <a:ext cx="7772400" cy="320040"/>
           </a:xfrm>
           <a:prstGeom prst="rect">
             <a:avLst/>
@@ -7996,7 +7996,7 @@
           <a:lstStyle/>
           <a:p>
             <a:pPr>
-              <a:defRPr sz="900">
+              <a:defRPr sz="950">
                 <a:solidFill>
                   <a:srgbClr val="64748B"/>
                 </a:solidFill>
@@ -8016,8 +8016,8 @@
         </p:nvSpPr>
         <p:spPr>
           <a:xfrm>
-            <a:off x="9631375" y="6355080"/>
-            <a:ext cx="1828800" cy="320040"/>
+            <a:off x="9357055" y="6364224"/>
+            <a:ext cx="2103120" cy="320040"/>
           </a:xfrm>
           <a:prstGeom prst="rect">
             <a:avLst/>
@@ -8031,7 +8031,7 @@
           <a:lstStyle/>
           <a:p>
             <a:pPr algn="r">
-              <a:defRPr sz="900" b="1">
+              <a:defRPr sz="950" b="1">
                 <a:solidFill>
                   <a:srgbClr val="0284C7"/>
                 </a:solidFill>
@@ -8051,12 +8051,12 @@
         </p:nvSpPr>
         <p:spPr>
           <a:xfrm>
-            <a:off x="731520" y="1463040"/>
-            <a:ext cx="3413455" cy="3474720"/>
+            <a:off x="731520" y="1444752"/>
+            <a:ext cx="3413455" cy="3520440"/>
           </a:xfrm>
           <a:prstGeom prst="roundRect">
             <a:avLst>
-              <a:gd name="adj" fmla="val 3000"/>
+              <a:gd name="adj" fmla="val 2500"/>
             </a:avLst>
           </a:prstGeom>
           <a:solidFill>
@@ -8099,7 +8099,7 @@
         <p:spPr>
           <a:xfrm>
             <a:off x="914400" y="1645920"/>
-            <a:ext cx="3047695" cy="3108960"/>
+            <a:ext cx="3047695" cy="3154680"/>
           </a:xfrm>
           <a:prstGeom prst="rect">
             <a:avLst/>
@@ -8116,7 +8116,7 @@
               <a:spcAft>
                 <a:spcPts val="1200"/>
               </a:spcAft>
-              <a:defRPr sz="1300" b="1">
+              <a:defRPr sz="1400" b="1">
                 <a:solidFill>
                   <a:srgbClr val="059669"/>
                 </a:solidFill>
@@ -8129,9 +8129,9 @@
           <a:p>
             <a:pPr>
               <a:spcAft>
-                <a:spcPts val="600"/>
+                <a:spcPts val="800"/>
               </a:spcAft>
-              <a:defRPr sz="1000">
+              <a:defRPr sz="1100">
                 <a:solidFill>
                   <a:srgbClr val="1E293B"/>
                 </a:solidFill>
@@ -8144,9 +8144,9 @@
           <a:p>
             <a:pPr>
               <a:spcAft>
-                <a:spcPts val="600"/>
+                <a:spcPts val="800"/>
               </a:spcAft>
-              <a:defRPr sz="1000">
+              <a:defRPr sz="1100">
                 <a:solidFill>
                   <a:srgbClr val="1E293B"/>
                 </a:solidFill>
@@ -8159,9 +8159,9 @@
           <a:p>
             <a:pPr>
               <a:spcAft>
-                <a:spcPts val="600"/>
+                <a:spcPts val="800"/>
               </a:spcAft>
-              <a:defRPr sz="1000">
+              <a:defRPr sz="1100">
                 <a:solidFill>
                   <a:srgbClr val="1E293B"/>
                 </a:solidFill>
@@ -8174,9 +8174,9 @@
           <a:p>
             <a:pPr>
               <a:spcAft>
-                <a:spcPts val="600"/>
+                <a:spcPts val="800"/>
               </a:spcAft>
-              <a:defRPr sz="1000">
+              <a:defRPr sz="1100">
                 <a:solidFill>
                   <a:srgbClr val="1E293B"/>
                 </a:solidFill>
@@ -8196,12 +8196,12 @@
         </p:nvSpPr>
         <p:spPr>
           <a:xfrm>
-            <a:off x="4389120" y="1463040"/>
-            <a:ext cx="3413455" cy="3474720"/>
+            <a:off x="4389120" y="1444752"/>
+            <a:ext cx="3413455" cy="3520440"/>
           </a:xfrm>
           <a:prstGeom prst="roundRect">
             <a:avLst>
-              <a:gd name="adj" fmla="val 3000"/>
+              <a:gd name="adj" fmla="val 2500"/>
             </a:avLst>
           </a:prstGeom>
           <a:solidFill>
@@ -8244,7 +8244,7 @@
         <p:spPr>
           <a:xfrm>
             <a:off x="4572000" y="1645920"/>
-            <a:ext cx="3047695" cy="3108960"/>
+            <a:ext cx="3047695" cy="3154680"/>
           </a:xfrm>
           <a:prstGeom prst="rect">
             <a:avLst/>
@@ -8261,7 +8261,7 @@
               <a:spcAft>
                 <a:spcPts val="1200"/>
               </a:spcAft>
-              <a:defRPr sz="1300" b="1">
+              <a:defRPr sz="1400" b="1">
                 <a:solidFill>
                   <a:srgbClr val="0F2B48"/>
                 </a:solidFill>
@@ -8274,9 +8274,9 @@
           <a:p>
             <a:pPr>
               <a:spcAft>
-                <a:spcPts val="600"/>
+                <a:spcPts val="800"/>
               </a:spcAft>
-              <a:defRPr sz="1000">
+              <a:defRPr sz="1100">
                 <a:solidFill>
                   <a:srgbClr val="1E293B"/>
                 </a:solidFill>
@@ -8289,9 +8289,9 @@
           <a:p>
             <a:pPr>
               <a:spcAft>
-                <a:spcPts val="600"/>
+                <a:spcPts val="800"/>
               </a:spcAft>
-              <a:defRPr sz="1000">
+              <a:defRPr sz="1100">
                 <a:solidFill>
                   <a:srgbClr val="1E293B"/>
                 </a:solidFill>
@@ -8304,9 +8304,9 @@
           <a:p>
             <a:pPr>
               <a:spcAft>
-                <a:spcPts val="600"/>
+                <a:spcPts val="800"/>
               </a:spcAft>
-              <a:defRPr sz="1000">
+              <a:defRPr sz="1100">
                 <a:solidFill>
                   <a:srgbClr val="1E293B"/>
                 </a:solidFill>
@@ -8319,9 +8319,9 @@
           <a:p>
             <a:pPr>
               <a:spcAft>
-                <a:spcPts val="600"/>
+                <a:spcPts val="800"/>
               </a:spcAft>
-              <a:defRPr sz="1000">
+              <a:defRPr sz="1100">
                 <a:solidFill>
                   <a:srgbClr val="1E293B"/>
                 </a:solidFill>
@@ -8341,12 +8341,12 @@
         </p:nvSpPr>
         <p:spPr>
           <a:xfrm>
-            <a:off x="8046720" y="1463040"/>
-            <a:ext cx="3413455" cy="3474720"/>
+            <a:off x="8046720" y="1444752"/>
+            <a:ext cx="3413455" cy="3520440"/>
           </a:xfrm>
           <a:prstGeom prst="roundRect">
             <a:avLst>
-              <a:gd name="adj" fmla="val 3000"/>
+              <a:gd name="adj" fmla="val 2500"/>
             </a:avLst>
           </a:prstGeom>
           <a:solidFill>
@@ -8389,7 +8389,7 @@
         <p:spPr>
           <a:xfrm>
             <a:off x="8229600" y="1645920"/>
-            <a:ext cx="3047695" cy="3108960"/>
+            <a:ext cx="3047695" cy="3154680"/>
           </a:xfrm>
           <a:prstGeom prst="rect">
             <a:avLst/>
@@ -8406,7 +8406,7 @@
               <a:spcAft>
                 <a:spcPts val="1200"/>
               </a:spcAft>
-              <a:defRPr sz="1300" b="1">
+              <a:defRPr sz="1400" b="1">
                 <a:solidFill>
                   <a:srgbClr val="0284C7"/>
                 </a:solidFill>
@@ -8419,9 +8419,9 @@
           <a:p>
             <a:pPr>
               <a:spcAft>
-                <a:spcPts val="600"/>
+                <a:spcPts val="800"/>
               </a:spcAft>
-              <a:defRPr sz="1000">
+              <a:defRPr sz="1100">
                 <a:solidFill>
                   <a:srgbClr val="1E293B"/>
                 </a:solidFill>
@@ -8434,9 +8434,9 @@
           <a:p>
             <a:pPr>
               <a:spcAft>
-                <a:spcPts val="600"/>
+                <a:spcPts val="800"/>
               </a:spcAft>
-              <a:defRPr sz="1000">
+              <a:defRPr sz="1100">
                 <a:solidFill>
                   <a:srgbClr val="1E293B"/>
                 </a:solidFill>
@@ -8449,9 +8449,9 @@
           <a:p>
             <a:pPr>
               <a:spcAft>
-                <a:spcPts val="600"/>
+                <a:spcPts val="800"/>
               </a:spcAft>
-              <a:defRPr sz="1000">
+              <a:defRPr sz="1100">
                 <a:solidFill>
                   <a:srgbClr val="1E293B"/>
                 </a:solidFill>
@@ -8464,9 +8464,9 @@
           <a:p>
             <a:pPr>
               <a:spcAft>
-                <a:spcPts val="600"/>
+                <a:spcPts val="800"/>
               </a:spcAft>
-              <a:defRPr sz="1000">
+              <a:defRPr sz="1100">
                 <a:solidFill>
                   <a:srgbClr val="1E293B"/>
                 </a:solidFill>
@@ -8491,7 +8491,7 @@
           </a:xfrm>
           <a:prstGeom prst="roundRect">
             <a:avLst>
-              <a:gd name="adj" fmla="val 3000"/>
+              <a:gd name="adj" fmla="val 2500"/>
             </a:avLst>
           </a:prstGeom>
           <a:solidFill>
@@ -8533,8 +8533,8 @@
         </p:nvSpPr>
         <p:spPr>
           <a:xfrm>
-            <a:off x="914400" y="5193792"/>
-            <a:ext cx="10362895" cy="896112"/>
+            <a:off x="960120" y="5193792"/>
+            <a:ext cx="10241280" cy="896112"/>
           </a:xfrm>
           <a:prstGeom prst="rect">
             <a:avLst/>
@@ -8551,7 +8551,7 @@
               <a:spcAft>
                 <a:spcPts val="300"/>
               </a:spcAft>
-              <a:defRPr sz="1100" b="1">
+              <a:defRPr sz="1200" b="1">
                 <a:solidFill>
                   <a:srgbClr val="059669"/>
                 </a:solidFill>
@@ -8563,7 +8563,7 @@
           </a:p>
           <a:p>
             <a:pPr>
-              <a:defRPr sz="950">
+              <a:defRPr sz="1050">
                 <a:solidFill>
                   <a:srgbClr val="F1F5F9"/>
                 </a:solidFill>
@@ -8605,8 +8605,8 @@
         </p:nvSpPr>
         <p:spPr>
           <a:xfrm>
-            <a:off x="731520" y="365760"/>
-            <a:ext cx="9144000" cy="274320"/>
+            <a:off x="731520" y="347472"/>
+            <a:ext cx="9144000" cy="292608"/>
           </a:xfrm>
           <a:prstGeom prst="rect">
             <a:avLst/>
@@ -8620,7 +8620,7 @@
           <a:lstStyle/>
           <a:p>
             <a:pPr>
-              <a:defRPr sz="1000" b="1">
+              <a:defRPr sz="1100" b="1">
                 <a:solidFill>
                   <a:srgbClr val="0284C7"/>
                 </a:solidFill>
@@ -8641,7 +8641,7 @@
         <p:spPr>
           <a:xfrm>
             <a:off x="731520" y="621792"/>
-            <a:ext cx="10515600" cy="548640"/>
+            <a:ext cx="10515600" cy="594360"/>
           </a:xfrm>
           <a:prstGeom prst="rect">
             <a:avLst/>
@@ -8655,7 +8655,7 @@
           <a:lstStyle/>
           <a:p>
             <a:pPr>
-              <a:defRPr sz="2000" b="1">
+              <a:defRPr sz="2200" b="1">
                 <a:solidFill>
                   <a:srgbClr val="0F2B48"/>
                 </a:solidFill>
@@ -8675,8 +8675,8 @@
         </p:nvSpPr>
         <p:spPr>
           <a:xfrm>
-            <a:off x="731520" y="1207008"/>
-            <a:ext cx="10728655" cy="18288"/>
+            <a:off x="731520" y="1243584"/>
+            <a:ext cx="10728655" cy="22860"/>
           </a:xfrm>
           <a:prstGeom prst="rect">
             <a:avLst/>
@@ -8718,7 +8718,7 @@
         </p:nvSpPr>
         <p:spPr>
           <a:xfrm>
-            <a:off x="731520" y="6309360"/>
+            <a:off x="731520" y="6327648"/>
             <a:ext cx="10728655" cy="13716"/>
           </a:xfrm>
           <a:prstGeom prst="rect">
@@ -8761,8 +8761,8 @@
         </p:nvSpPr>
         <p:spPr>
           <a:xfrm>
-            <a:off x="731520" y="6355080"/>
-            <a:ext cx="7315200" cy="320040"/>
+            <a:off x="731520" y="6364224"/>
+            <a:ext cx="7772400" cy="320040"/>
           </a:xfrm>
           <a:prstGeom prst="rect">
             <a:avLst/>
@@ -8776,7 +8776,7 @@
           <a:lstStyle/>
           <a:p>
             <a:pPr>
-              <a:defRPr sz="900">
+              <a:defRPr sz="950">
                 <a:solidFill>
                   <a:srgbClr val="64748B"/>
                 </a:solidFill>
@@ -8796,8 +8796,8 @@
         </p:nvSpPr>
         <p:spPr>
           <a:xfrm>
-            <a:off x="9631375" y="6355080"/>
-            <a:ext cx="1828800" cy="320040"/>
+            <a:off x="9357055" y="6364224"/>
+            <a:ext cx="2103120" cy="320040"/>
           </a:xfrm>
           <a:prstGeom prst="rect">
             <a:avLst/>
@@ -8811,7 +8811,7 @@
           <a:lstStyle/>
           <a:p>
             <a:pPr algn="r">
-              <a:defRPr sz="900" b="1">
+              <a:defRPr sz="950" b="1">
                 <a:solidFill>
                   <a:srgbClr val="0284C7"/>
                 </a:solidFill>
@@ -8832,8 +8832,8 @@
           <p:nvPr/>
         </p:nvGraphicFramePr>
         <p:xfrm>
-          <a:off x="731520" y="1463040"/>
-          <a:ext cx="10728655" cy="4572000"/>
+          <a:off x="731520" y="1444752"/>
+          <a:ext cx="10728655" cy="4663440"/>
         </p:xfrm>
         <a:graphic>
           <a:graphicData uri="http://schemas.openxmlformats.org/drawingml/2006/table">
@@ -8846,14 +8846,14 @@
                 <a:gridCol w="3291840"/>
                 <a:gridCol w="6339535"/>
               </a:tblGrid>
-              <a:tr h="457200">
+              <a:tr h="466344">
                 <a:tc>
                   <a:txBody>
                     <a:bodyPr/>
                     <a:lstStyle/>
                     <a:p>
                       <a:pPr>
-                        <a:defRPr b="1" sz="1000">
+                        <a:defRPr b="1" sz="1100">
                           <a:solidFill>
                             <a:srgbClr val="F1F5F9"/>
                           </a:solidFill>
@@ -8876,7 +8876,7 @@
                     <a:lstStyle/>
                     <a:p>
                       <a:pPr>
-                        <a:defRPr b="1" sz="1000">
+                        <a:defRPr b="1" sz="1100">
                           <a:solidFill>
                             <a:srgbClr val="F1F5F9"/>
                           </a:solidFill>
@@ -8899,7 +8899,7 @@
                     <a:lstStyle/>
                     <a:p>
                       <a:pPr>
-                        <a:defRPr b="1" sz="1000">
+                        <a:defRPr b="1" sz="1100">
                           <a:solidFill>
                             <a:srgbClr val="F1F5F9"/>
                           </a:solidFill>
@@ -8917,14 +8917,14 @@
                   </a:tcPr>
                 </a:tc>
               </a:tr>
-              <a:tr h="457200">
+              <a:tr h="466344">
                 <a:tc>
                   <a:txBody>
                     <a:bodyPr/>
                     <a:lstStyle/>
                     <a:p>
                       <a:pPr>
-                        <a:defRPr sz="950" b="1">
+                        <a:defRPr sz="1050" b="1">
                           <a:solidFill>
                             <a:srgbClr val="1E293B"/>
                           </a:solidFill>
@@ -8947,7 +8947,7 @@
                     <a:lstStyle/>
                     <a:p>
                       <a:pPr>
-                        <a:defRPr sz="950">
+                        <a:defRPr sz="1050">
                           <a:solidFill>
                             <a:srgbClr val="1E293B"/>
                           </a:solidFill>
@@ -8970,7 +8970,7 @@
                     <a:lstStyle/>
                     <a:p>
                       <a:pPr>
-                        <a:defRPr sz="950">
+                        <a:defRPr sz="1050">
                           <a:solidFill>
                             <a:srgbClr val="1E293B"/>
                           </a:solidFill>
@@ -8988,14 +8988,14 @@
                   </a:tcPr>
                 </a:tc>
               </a:tr>
-              <a:tr h="457200">
+              <a:tr h="466344">
                 <a:tc>
                   <a:txBody>
                     <a:bodyPr/>
                     <a:lstStyle/>
                     <a:p>
                       <a:pPr>
-                        <a:defRPr sz="950" b="1">
+                        <a:defRPr sz="1050" b="1">
                           <a:solidFill>
                             <a:srgbClr val="1E293B"/>
                           </a:solidFill>
@@ -9018,7 +9018,7 @@
                     <a:lstStyle/>
                     <a:p>
                       <a:pPr>
-                        <a:defRPr sz="950">
+                        <a:defRPr sz="1050">
                           <a:solidFill>
                             <a:srgbClr val="1E293B"/>
                           </a:solidFill>
@@ -9041,7 +9041,7 @@
                     <a:lstStyle/>
                     <a:p>
                       <a:pPr>
-                        <a:defRPr sz="950">
+                        <a:defRPr sz="1050">
                           <a:solidFill>
                             <a:srgbClr val="1E293B"/>
                           </a:solidFill>
@@ -9059,14 +9059,14 @@
                   </a:tcPr>
                 </a:tc>
               </a:tr>
-              <a:tr h="457200">
+              <a:tr h="466344">
                 <a:tc>
                   <a:txBody>
                     <a:bodyPr/>
                     <a:lstStyle/>
                     <a:p>
                       <a:pPr>
-                        <a:defRPr sz="950" b="1">
+                        <a:defRPr sz="1050" b="1">
                           <a:solidFill>
                             <a:srgbClr val="1E293B"/>
                           </a:solidFill>
@@ -9089,7 +9089,7 @@
                     <a:lstStyle/>
                     <a:p>
                       <a:pPr>
-                        <a:defRPr sz="950">
+                        <a:defRPr sz="1050">
                           <a:solidFill>
                             <a:srgbClr val="1E293B"/>
                           </a:solidFill>
@@ -9112,7 +9112,7 @@
                     <a:lstStyle/>
                     <a:p>
                       <a:pPr>
-                        <a:defRPr sz="950">
+                        <a:defRPr sz="1050">
                           <a:solidFill>
                             <a:srgbClr val="1E293B"/>
                           </a:solidFill>
@@ -9130,14 +9130,14 @@
                   </a:tcPr>
                 </a:tc>
               </a:tr>
-              <a:tr h="457200">
+              <a:tr h="466344">
                 <a:tc>
                   <a:txBody>
                     <a:bodyPr/>
                     <a:lstStyle/>
                     <a:p>
                       <a:pPr>
-                        <a:defRPr sz="950" b="1">
+                        <a:defRPr sz="1050" b="1">
                           <a:solidFill>
                             <a:srgbClr val="1E293B"/>
                           </a:solidFill>
@@ -9160,14 +9160,14 @@
                     <a:lstStyle/>
                     <a:p>
                       <a:pPr>
-                        <a:defRPr sz="950">
+                        <a:defRPr sz="1050">
                           <a:solidFill>
                             <a:srgbClr val="1E293B"/>
                           </a:solidFill>
                         </a:defRPr>
                       </a:pPr>
                       <a:r>
-                        <a:t>Instructor Feedback &amp; Resolutions</a:t>
+                        <a:t>Feedback &amp; Issue Resolutions</a:t>
                       </a:r>
                     </a:p>
                   </a:txBody>
@@ -9183,14 +9183,14 @@
                     <a:lstStyle/>
                     <a:p>
                       <a:pPr>
-                        <a:defRPr sz="950">
+                        <a:defRPr sz="1050">
                           <a:solidFill>
                             <a:srgbClr val="1E293B"/>
                           </a:solidFill>
                         </a:defRPr>
                       </a:pPr>
                       <a:r>
-                        <a:t>Industrial 2-finger claw, anti-miss scanner, orthogonal zero-sink grasp</a:t>
+                        <a:t>Faculty claw feedback, anti-miss scanner, orthogonal zero-sink grasp</a:t>
                       </a:r>
                     </a:p>
                   </a:txBody>
@@ -9201,14 +9201,14 @@
                   </a:tcPr>
                 </a:tc>
               </a:tr>
-              <a:tr h="457200">
+              <a:tr h="466344">
                 <a:tc>
                   <a:txBody>
                     <a:bodyPr/>
                     <a:lstStyle/>
                     <a:p>
                       <a:pPr>
-                        <a:defRPr sz="950" b="1">
+                        <a:defRPr sz="1050" b="1">
                           <a:solidFill>
                             <a:srgbClr val="1E293B"/>
                           </a:solidFill>
@@ -9231,7 +9231,7 @@
                     <a:lstStyle/>
                     <a:p>
                       <a:pPr>
-                        <a:defRPr sz="950">
+                        <a:defRPr sz="1050">
                           <a:solidFill>
                             <a:srgbClr val="1E293B"/>
                           </a:solidFill>
@@ -9254,7 +9254,7 @@
                     <a:lstStyle/>
                     <a:p>
                       <a:pPr>
-                        <a:defRPr sz="950">
+                        <a:defRPr sz="1050">
                           <a:solidFill>
                             <a:srgbClr val="1E293B"/>
                           </a:solidFill>
@@ -9272,14 +9272,14 @@
                   </a:tcPr>
                 </a:tc>
               </a:tr>
-              <a:tr h="457200">
+              <a:tr h="466344">
                 <a:tc>
                   <a:txBody>
                     <a:bodyPr/>
                     <a:lstStyle/>
                     <a:p>
                       <a:pPr>
-                        <a:defRPr sz="950" b="1">
+                        <a:defRPr sz="1050" b="1">
                           <a:solidFill>
                             <a:srgbClr val="1E293B"/>
                           </a:solidFill>
@@ -9302,7 +9302,7 @@
                     <a:lstStyle/>
                     <a:p>
                       <a:pPr>
-                        <a:defRPr sz="950">
+                        <a:defRPr sz="1050">
                           <a:solidFill>
                             <a:srgbClr val="1E293B"/>
                           </a:solidFill>
@@ -9325,7 +9325,7 @@
                     <a:lstStyle/>
                     <a:p>
                       <a:pPr>
-                        <a:defRPr sz="950">
+                        <a:defRPr sz="1050">
                           <a:solidFill>
                             <a:srgbClr val="1E293B"/>
                           </a:solidFill>
@@ -9343,14 +9343,14 @@
                   </a:tcPr>
                 </a:tc>
               </a:tr>
-              <a:tr h="457200">
+              <a:tr h="466344">
                 <a:tc>
                   <a:txBody>
                     <a:bodyPr/>
                     <a:lstStyle/>
                     <a:p>
                       <a:pPr>
-                        <a:defRPr sz="950" b="1">
+                        <a:defRPr sz="1050" b="1">
                           <a:solidFill>
                             <a:srgbClr val="1E293B"/>
                           </a:solidFill>
@@ -9373,7 +9373,7 @@
                     <a:lstStyle/>
                     <a:p>
                       <a:pPr>
-                        <a:defRPr sz="950">
+                        <a:defRPr sz="1050">
                           <a:solidFill>
                             <a:srgbClr val="1E293B"/>
                           </a:solidFill>
@@ -9396,7 +9396,7 @@
                     <a:lstStyle/>
                     <a:p>
                       <a:pPr>
-                        <a:defRPr sz="950">
+                        <a:defRPr sz="1050">
                           <a:solidFill>
                             <a:srgbClr val="1E293B"/>
                           </a:solidFill>
@@ -9414,14 +9414,14 @@
                   </a:tcPr>
                 </a:tc>
               </a:tr>
-              <a:tr h="457200">
+              <a:tr h="466344">
                 <a:tc>
                   <a:txBody>
                     <a:bodyPr/>
                     <a:lstStyle/>
                     <a:p>
                       <a:pPr>
-                        <a:defRPr sz="950" b="1">
+                        <a:defRPr sz="1050" b="1">
                           <a:solidFill>
                             <a:srgbClr val="1E293B"/>
                           </a:solidFill>
@@ -9444,7 +9444,7 @@
                     <a:lstStyle/>
                     <a:p>
                       <a:pPr>
-                        <a:defRPr sz="950">
+                        <a:defRPr sz="1050">
                           <a:solidFill>
                             <a:srgbClr val="1E293B"/>
                           </a:solidFill>
@@ -9467,7 +9467,7 @@
                     <a:lstStyle/>
                     <a:p>
                       <a:pPr>
-                        <a:defRPr sz="950">
+                        <a:defRPr sz="1050">
                           <a:solidFill>
                             <a:srgbClr val="1E293B"/>
                           </a:solidFill>
@@ -9485,14 +9485,14 @@
                   </a:tcPr>
                 </a:tc>
               </a:tr>
-              <a:tr h="457200">
+              <a:tr h="466344">
                 <a:tc>
                   <a:txBody>
                     <a:bodyPr/>
                     <a:lstStyle/>
                     <a:p>
                       <a:pPr>
-                        <a:defRPr sz="950" b="1">
+                        <a:defRPr sz="1050" b="1">
                           <a:solidFill>
                             <a:srgbClr val="1E293B"/>
                           </a:solidFill>
@@ -9515,7 +9515,7 @@
                     <a:lstStyle/>
                     <a:p>
                       <a:pPr>
-                        <a:defRPr sz="950">
+                        <a:defRPr sz="1050">
                           <a:solidFill>
                             <a:srgbClr val="1E293B"/>
                           </a:solidFill>
@@ -9538,7 +9538,7 @@
                     <a:lstStyle/>
                     <a:p>
                       <a:pPr>
-                        <a:defRPr sz="950">
+                        <a:defRPr sz="1050">
                           <a:solidFill>
                             <a:srgbClr val="1E293B"/>
                           </a:solidFill>
@@ -9586,8 +9586,8 @@
         </p:nvSpPr>
         <p:spPr>
           <a:xfrm>
-            <a:off x="731520" y="365760"/>
-            <a:ext cx="9144000" cy="274320"/>
+            <a:off x="731520" y="347472"/>
+            <a:ext cx="9144000" cy="292608"/>
           </a:xfrm>
           <a:prstGeom prst="rect">
             <a:avLst/>
@@ -9601,7 +9601,7 @@
           <a:lstStyle/>
           <a:p>
             <a:pPr>
-              <a:defRPr sz="1000" b="1">
+              <a:defRPr sz="1100" b="1">
                 <a:solidFill>
                   <a:srgbClr val="0284C7"/>
                 </a:solidFill>
@@ -9622,7 +9622,7 @@
         <p:spPr>
           <a:xfrm>
             <a:off x="731520" y="621792"/>
-            <a:ext cx="10515600" cy="548640"/>
+            <a:ext cx="10515600" cy="594360"/>
           </a:xfrm>
           <a:prstGeom prst="rect">
             <a:avLst/>
@@ -9636,7 +9636,7 @@
           <a:lstStyle/>
           <a:p>
             <a:pPr>
-              <a:defRPr sz="2000" b="1">
+              <a:defRPr sz="2200" b="1">
                 <a:solidFill>
                   <a:srgbClr val="0F2B48"/>
                 </a:solidFill>
@@ -9656,8 +9656,8 @@
         </p:nvSpPr>
         <p:spPr>
           <a:xfrm>
-            <a:off x="731520" y="1207008"/>
-            <a:ext cx="10728655" cy="18288"/>
+            <a:off x="731520" y="1243584"/>
+            <a:ext cx="10728655" cy="22860"/>
           </a:xfrm>
           <a:prstGeom prst="rect">
             <a:avLst/>
@@ -9699,7 +9699,7 @@
         </p:nvSpPr>
         <p:spPr>
           <a:xfrm>
-            <a:off x="731520" y="6309360"/>
+            <a:off x="731520" y="6327648"/>
             <a:ext cx="10728655" cy="13716"/>
           </a:xfrm>
           <a:prstGeom prst="rect">
@@ -9742,8 +9742,8 @@
         </p:nvSpPr>
         <p:spPr>
           <a:xfrm>
-            <a:off x="731520" y="6355080"/>
-            <a:ext cx="7315200" cy="320040"/>
+            <a:off x="731520" y="6364224"/>
+            <a:ext cx="7772400" cy="320040"/>
           </a:xfrm>
           <a:prstGeom prst="rect">
             <a:avLst/>
@@ -9757,7 +9757,7 @@
           <a:lstStyle/>
           <a:p>
             <a:pPr>
-              <a:defRPr sz="900">
+              <a:defRPr sz="950">
                 <a:solidFill>
                   <a:srgbClr val="64748B"/>
                 </a:solidFill>
@@ -9777,8 +9777,8 @@
         </p:nvSpPr>
         <p:spPr>
           <a:xfrm>
-            <a:off x="9631375" y="6355080"/>
-            <a:ext cx="1828800" cy="320040"/>
+            <a:off x="9357055" y="6364224"/>
+            <a:ext cx="2103120" cy="320040"/>
           </a:xfrm>
           <a:prstGeom prst="rect">
             <a:avLst/>
@@ -9792,7 +9792,7 @@
           <a:lstStyle/>
           <a:p>
             <a:pPr algn="r">
-              <a:defRPr sz="900" b="1">
+              <a:defRPr sz="950" b="1">
                 <a:solidFill>
                   <a:srgbClr val="0284C7"/>
                 </a:solidFill>
@@ -9812,12 +9812,12 @@
         </p:nvSpPr>
         <p:spPr>
           <a:xfrm>
-            <a:off x="731520" y="1463040"/>
-            <a:ext cx="5212080" cy="4572000"/>
+            <a:off x="731520" y="1444752"/>
+            <a:ext cx="5212080" cy="4663440"/>
           </a:xfrm>
           <a:prstGeom prst="roundRect">
             <a:avLst>
-              <a:gd name="adj" fmla="val 3000"/>
+              <a:gd name="adj" fmla="val 2500"/>
             </a:avLst>
           </a:prstGeom>
           <a:solidFill>
@@ -9859,8 +9859,8 @@
         </p:nvSpPr>
         <p:spPr>
           <a:xfrm>
-            <a:off x="914400" y="1645920"/>
-            <a:ext cx="4846320" cy="4206240"/>
+            <a:off x="960120" y="1645920"/>
+            <a:ext cx="4754880" cy="4297680"/>
           </a:xfrm>
           <a:prstGeom prst="rect">
             <a:avLst/>
@@ -9875,26 +9875,26 @@
           <a:p>
             <a:pPr>
               <a:spcAft>
+                <a:spcPts val="1200"/>
+              </a:spcAft>
+              <a:defRPr sz="1400" b="1">
+                <a:solidFill>
+                  <a:srgbClr val="0F2B48"/>
+                </a:solidFill>
+              </a:defRPr>
+            </a:pPr>
+            <a:r>
+              <a:t>Baseline Achieved in Week 03</a:t>
+            </a:r>
+          </a:p>
+          <a:p>
+            <a:pPr>
+              <a:spcAft>
                 <a:spcPts val="1000"/>
               </a:spcAft>
-              <a:defRPr sz="1300" b="1">
-                <a:solidFill>
-                  <a:srgbClr val="0F2B48"/>
-                </a:solidFill>
-              </a:defRPr>
-            </a:pPr>
-            <a:r>
-              <a:t>Baseline Achieved in Week 03</a:t>
-            </a:r>
-          </a:p>
-          <a:p>
-            <a:pPr>
-              <a:spcAft>
-                <a:spcPts val="600"/>
-              </a:spcAft>
-            </a:pPr>
-            <a:r>
-              <a:rPr b="1" sz="1000">
+            </a:pPr>
+            <a:r>
+              <a:rPr b="1" sz="1100">
                 <a:solidFill>
                   <a:srgbClr val="059669"/>
                 </a:solidFill>
@@ -9902,22 +9902,22 @@
               <a:t>✔ ROS-Unity bridge: </a:t>
             </a:r>
             <a:r>
-              <a:rPr sz="950">
+              <a:rPr sz="1100">
                 <a:solidFill>
                   <a:srgbClr val="1E293B"/>
                 </a:solidFill>
               </a:rPr>
-              <a:t>TCP communication available on port 10000 via ros_tcp_endpoint.</a:t>
+              <a:t>TCP communication established on port 10000 via ros_tcp_endpoint.</a:t>
             </a:r>
           </a:p>
           <a:p>
             <a:pPr>
               <a:spcAft>
-                <a:spcPts val="600"/>
+                <a:spcPts val="1000"/>
               </a:spcAft>
             </a:pPr>
             <a:r>
-              <a:rPr b="1" sz="1000">
+              <a:rPr b="1" sz="1100">
                 <a:solidFill>
                   <a:srgbClr val="059669"/>
                 </a:solidFill>
@@ -9925,7 +9925,7 @@
               <a:t>✔ Coordinate conversion: </a:t>
             </a:r>
             <a:r>
-              <a:rPr sz="950">
+              <a:rPr sz="1100">
                 <a:solidFill>
                   <a:srgbClr val="1E293B"/>
                 </a:solidFill>
@@ -9936,19 +9936,19 @@
           <a:p>
             <a:pPr>
               <a:spcAft>
-                <a:spcPts val="600"/>
+                <a:spcPts val="1000"/>
               </a:spcAft>
             </a:pPr>
             <a:r>
-              <a:rPr b="1" sz="1000">
+              <a:rPr b="1" sz="1100">
                 <a:solidFill>
                   <a:srgbClr val="059669"/>
                 </a:solidFill>
               </a:rPr>
-              <a:t>✔ Object topics: </a:t>
-            </a:r>
-            <a:r>
-              <a:rPr sz="950">
+              <a:t>✔ Object perception: </a:t>
+            </a:r>
+            <a:r>
+              <a:rPr sz="1100">
                 <a:solidFill>
                   <a:srgbClr val="1E293B"/>
                 </a:solidFill>
@@ -9959,11 +9959,11 @@
           <a:p>
             <a:pPr>
               <a:spcAft>
-                <a:spcPts val="600"/>
+                <a:spcPts val="1000"/>
               </a:spcAft>
             </a:pPr>
             <a:r>
-              <a:rPr b="1" sz="1000">
+              <a:rPr b="1" sz="1100">
                 <a:solidFill>
                   <a:srgbClr val="059669"/>
                 </a:solidFill>
@@ -9971,7 +9971,7 @@
               <a:t>✔ MoveIt planning: </a:t>
             </a:r>
             <a:r>
-              <a:rPr sz="950">
+              <a:rPr sz="1100">
                 <a:solidFill>
                   <a:srgbClr val="1E293B"/>
                 </a:solidFill>
@@ -9989,12 +9989,12 @@
         </p:nvSpPr>
         <p:spPr>
           <a:xfrm>
-            <a:off x="6217920" y="1463040"/>
-            <a:ext cx="5212080" cy="4572000"/>
+            <a:off x="6217920" y="1444752"/>
+            <a:ext cx="5212080" cy="4663440"/>
           </a:xfrm>
           <a:prstGeom prst="roundRect">
             <a:avLst>
-              <a:gd name="adj" fmla="val 3000"/>
+              <a:gd name="adj" fmla="val 2500"/>
             </a:avLst>
           </a:prstGeom>
           <a:solidFill>
@@ -10036,8 +10036,8 @@
         </p:nvSpPr>
         <p:spPr>
           <a:xfrm>
-            <a:off x="6400800" y="1645920"/>
-            <a:ext cx="4846320" cy="4206240"/>
+            <a:off x="6446520" y="1645920"/>
+            <a:ext cx="4754880" cy="4297680"/>
           </a:xfrm>
           <a:prstGeom prst="rect">
             <a:avLst/>
@@ -10052,9 +10052,9 @@
           <a:p>
             <a:pPr>
               <a:spcAft>
-                <a:spcPts val="1000"/>
+                <a:spcPts val="1200"/>
               </a:spcAft>
-              <a:defRPr sz="1300" b="1">
+              <a:defRPr sz="1400" b="1">
                 <a:solidFill>
                   <a:srgbClr val="0284C7"/>
                 </a:solidFill>
@@ -10067,11 +10067,11 @@
           <a:p>
             <a:pPr>
               <a:spcAft>
-                <a:spcPts val="600"/>
+                <a:spcPts val="800"/>
               </a:spcAft>
             </a:pPr>
             <a:r>
-              <a:rPr b="1" sz="1000">
+              <a:rPr b="1" sz="1100">
                 <a:solidFill>
                   <a:srgbClr val="0F2B48"/>
                 </a:solidFill>
@@ -10079,7 +10079,7 @@
               <a:t>🎯 Trajectory execution: </a:t>
             </a:r>
             <a:r>
-              <a:rPr sz="950">
+              <a:rPr sz="1100">
                 <a:solidFill>
                   <a:srgbClr val="1E293B"/>
                 </a:solidFill>
@@ -10090,11 +10090,11 @@
           <a:p>
             <a:pPr>
               <a:spcAft>
-                <a:spcPts val="600"/>
+                <a:spcPts val="800"/>
               </a:spcAft>
             </a:pPr>
             <a:r>
-              <a:rPr b="1" sz="1000">
+              <a:rPr b="1" sz="1100">
                 <a:solidFill>
                   <a:srgbClr val="0F2B48"/>
                 </a:solidFill>
@@ -10102,7 +10102,7 @@
               <a:t>🎯 Grasping mechanism: </a:t>
             </a:r>
             <a:r>
-              <a:rPr sz="950">
+              <a:rPr sz="1100">
                 <a:solidFill>
                   <a:srgbClr val="1E293B"/>
                 </a:solidFill>
@@ -10113,11 +10113,11 @@
           <a:p>
             <a:pPr>
               <a:spcAft>
-                <a:spcPts val="600"/>
+                <a:spcPts val="800"/>
               </a:spcAft>
             </a:pPr>
             <a:r>
-              <a:rPr b="1" sz="1000">
+              <a:rPr b="1" sz="1100">
                 <a:solidFill>
                   <a:srgbClr val="0F2B48"/>
                 </a:solidFill>
@@ -10125,7 +10125,7 @@
               <a:t>🎯 Task controller: </a:t>
             </a:r>
             <a:r>
-              <a:rPr sz="950">
+              <a:rPr sz="1100">
                 <a:solidFill>
                   <a:srgbClr val="1E293B"/>
                 </a:solidFill>
@@ -10136,11 +10136,11 @@
           <a:p>
             <a:pPr>
               <a:spcAft>
-                <a:spcPts val="600"/>
+                <a:spcPts val="800"/>
               </a:spcAft>
             </a:pPr>
             <a:r>
-              <a:rPr b="1" sz="1000">
+              <a:rPr b="1" sz="1100">
                 <a:solidFill>
                   <a:srgbClr val="0F2B48"/>
                 </a:solidFill>
@@ -10148,7 +10148,7 @@
               <a:t>🎯 Multi-bin sorting: </a:t>
             </a:r>
             <a:r>
-              <a:rPr sz="950">
+              <a:rPr sz="1100">
                 <a:solidFill>
                   <a:srgbClr val="1E293B"/>
                 </a:solidFill>
@@ -10159,11 +10159,11 @@
           <a:p>
             <a:pPr>
               <a:spcAft>
-                <a:spcPts val="600"/>
+                <a:spcPts val="800"/>
               </a:spcAft>
             </a:pPr>
             <a:r>
-              <a:rPr b="1" sz="1000">
+              <a:rPr b="1" sz="1100">
                 <a:solidFill>
                   <a:srgbClr val="0F2B48"/>
                 </a:solidFill>
@@ -10171,12 +10171,12 @@
               <a:t>🎯 Milestone 1 Context: </a:t>
             </a:r>
             <a:r>
-              <a:rPr sz="950">
+              <a:rPr sz="1100">
                 <a:solidFill>
                   <a:srgbClr val="1E293B"/>
                 </a:solidFill>
               </a:rPr>
-              <a:t>Fulfilling 100% of these commitments in Week 04 is the prerequisite for Milestone 1 evaluation.</a:t>
+              <a:t>Fulfilling 100% of these commitments in Week 04 is the prerequisite for Milestone 1.</a:t>
             </a:r>
           </a:p>
         </p:txBody>
@@ -10207,8 +10207,8 @@
         </p:nvSpPr>
         <p:spPr>
           <a:xfrm>
-            <a:off x="731520" y="365760"/>
-            <a:ext cx="9144000" cy="274320"/>
+            <a:off x="731520" y="347472"/>
+            <a:ext cx="9144000" cy="292608"/>
           </a:xfrm>
           <a:prstGeom prst="rect">
             <a:avLst/>
@@ -10222,7 +10222,7 @@
           <a:lstStyle/>
           <a:p>
             <a:pPr>
-              <a:defRPr sz="1000" b="1">
+              <a:defRPr sz="1100" b="1">
                 <a:solidFill>
                   <a:srgbClr val="0284C7"/>
                 </a:solidFill>
@@ -10243,7 +10243,7 @@
         <p:spPr>
           <a:xfrm>
             <a:off x="731520" y="621792"/>
-            <a:ext cx="10515600" cy="548640"/>
+            <a:ext cx="10515600" cy="594360"/>
           </a:xfrm>
           <a:prstGeom prst="rect">
             <a:avLst/>
@@ -10257,7 +10257,7 @@
           <a:lstStyle/>
           <a:p>
             <a:pPr>
-              <a:defRPr sz="2000" b="1">
+              <a:defRPr sz="2200" b="1">
                 <a:solidFill>
                   <a:srgbClr val="0F2B48"/>
                 </a:solidFill>
@@ -10277,8 +10277,8 @@
         </p:nvSpPr>
         <p:spPr>
           <a:xfrm>
-            <a:off x="731520" y="1207008"/>
-            <a:ext cx="10728655" cy="18288"/>
+            <a:off x="731520" y="1243584"/>
+            <a:ext cx="10728655" cy="22860"/>
           </a:xfrm>
           <a:prstGeom prst="rect">
             <a:avLst/>
@@ -10320,7 +10320,7 @@
         </p:nvSpPr>
         <p:spPr>
           <a:xfrm>
-            <a:off x="731520" y="6309360"/>
+            <a:off x="731520" y="6327648"/>
             <a:ext cx="10728655" cy="13716"/>
           </a:xfrm>
           <a:prstGeom prst="rect">
@@ -10363,8 +10363,8 @@
         </p:nvSpPr>
         <p:spPr>
           <a:xfrm>
-            <a:off x="731520" y="6355080"/>
-            <a:ext cx="7315200" cy="320040"/>
+            <a:off x="731520" y="6364224"/>
+            <a:ext cx="7772400" cy="320040"/>
           </a:xfrm>
           <a:prstGeom prst="rect">
             <a:avLst/>
@@ -10378,7 +10378,7 @@
           <a:lstStyle/>
           <a:p>
             <a:pPr>
-              <a:defRPr sz="900">
+              <a:defRPr sz="950">
                 <a:solidFill>
                   <a:srgbClr val="64748B"/>
                 </a:solidFill>
@@ -10398,8 +10398,8 @@
         </p:nvSpPr>
         <p:spPr>
           <a:xfrm>
-            <a:off x="9631375" y="6355080"/>
-            <a:ext cx="1828800" cy="320040"/>
+            <a:off x="9357055" y="6364224"/>
+            <a:ext cx="2103120" cy="320040"/>
           </a:xfrm>
           <a:prstGeom prst="rect">
             <a:avLst/>
@@ -10413,7 +10413,7 @@
           <a:lstStyle/>
           <a:p>
             <a:pPr algn="r">
-              <a:defRPr sz="900" b="1">
+              <a:defRPr sz="950" b="1">
                 <a:solidFill>
                   <a:srgbClr val="0284C7"/>
                 </a:solidFill>
@@ -10433,12 +10433,12 @@
         </p:nvSpPr>
         <p:spPr>
           <a:xfrm>
-            <a:off x="731520" y="1463040"/>
-            <a:ext cx="5212080" cy="4572000"/>
+            <a:off x="731520" y="1444752"/>
+            <a:ext cx="5212080" cy="4663440"/>
           </a:xfrm>
           <a:prstGeom prst="roundRect">
             <a:avLst>
-              <a:gd name="adj" fmla="val 3000"/>
+              <a:gd name="adj" fmla="val 2500"/>
             </a:avLst>
           </a:prstGeom>
           <a:solidFill>
@@ -10480,8 +10480,8 @@
         </p:nvSpPr>
         <p:spPr>
           <a:xfrm>
-            <a:off x="914400" y="1645920"/>
-            <a:ext cx="4846320" cy="4206240"/>
+            <a:off x="960120" y="1645920"/>
+            <a:ext cx="4754880" cy="4297680"/>
           </a:xfrm>
           <a:prstGeom prst="rect">
             <a:avLst/>
@@ -10496,9 +10496,9 @@
           <a:p>
             <a:pPr>
               <a:spcAft>
-                <a:spcPts val="1000"/>
+                <a:spcPts val="1200"/>
               </a:spcAft>
-              <a:defRPr sz="1300" b="1">
+              <a:defRPr sz="1400" b="1">
                 <a:solidFill>
                   <a:srgbClr val="059669"/>
                 </a:solidFill>
@@ -10511,11 +10511,11 @@
           <a:p>
             <a:pPr>
               <a:spcAft>
-                <a:spcPts val="600"/>
+                <a:spcPts val="800"/>
               </a:spcAft>
             </a:pPr>
             <a:r>
-              <a:rPr b="1" sz="1000">
+              <a:rPr b="1" sz="1100">
                 <a:solidFill>
                   <a:srgbClr val="0F2B48"/>
                 </a:solidFill>
@@ -10523,7 +10523,7 @@
               <a:t>✔ Trajectory Execution (R2/R3): </a:t>
             </a:r>
             <a:r>
-              <a:rPr sz="950">
+              <a:rPr sz="1100">
                 <a:solidFill>
                   <a:srgbClr val="1E293B"/>
                 </a:solidFill>
@@ -10534,11 +10534,11 @@
           <a:p>
             <a:pPr>
               <a:spcAft>
-                <a:spcPts val="600"/>
+                <a:spcPts val="800"/>
               </a:spcAft>
             </a:pPr>
             <a:r>
-              <a:rPr b="1" sz="1000">
+              <a:rPr b="1" sz="1100">
                 <a:solidFill>
                   <a:srgbClr val="0F2B48"/>
                 </a:solidFill>
@@ -10546,7 +10546,7 @@
               <a:t>✔ Grasping Mechanism (R4): </a:t>
             </a:r>
             <a:r>
-              <a:rPr sz="950">
+              <a:rPr sz="1100">
                 <a:solidFill>
                   <a:srgbClr val="1E293B"/>
                 </a:solidFill>
@@ -10557,19 +10557,19 @@
           <a:p>
             <a:pPr>
               <a:spcAft>
-                <a:spcPts val="600"/>
+                <a:spcPts val="800"/>
               </a:spcAft>
             </a:pPr>
             <a:r>
-              <a:rPr b="1" sz="1000">
+              <a:rPr b="1" sz="1100">
                 <a:solidFill>
                   <a:srgbClr val="0F2B48"/>
                 </a:solidFill>
               </a:rPr>
-              <a:t>✔ Closed-Loop State Machine (R4): </a:t>
-            </a:r>
-            <a:r>
-              <a:rPr sz="950">
+              <a:t>✔ Closed-Loop Sequencer (R4): </a:t>
+            </a:r>
+            <a:r>
+              <a:rPr sz="1100">
                 <a:solidFill>
                   <a:srgbClr val="1E293B"/>
                 </a:solidFill>
@@ -10580,11 +10580,11 @@
           <a:p>
             <a:pPr>
               <a:spcAft>
-                <a:spcPts val="600"/>
+                <a:spcPts val="800"/>
               </a:spcAft>
             </a:pPr>
             <a:r>
-              <a:rPr b="1" sz="1000">
+              <a:rPr b="1" sz="1100">
                 <a:solidFill>
                   <a:srgbClr val="0F2B48"/>
                 </a:solidFill>
@@ -10592,7 +10592,7 @@
               <a:t>✔ 3-Bin Sorting System (R4): </a:t>
             </a:r>
             <a:r>
-              <a:rPr sz="950">
+              <a:rPr sz="1100">
                 <a:solidFill>
                   <a:srgbClr val="1E293B"/>
                 </a:solidFill>
@@ -10610,12 +10610,12 @@
         </p:nvSpPr>
         <p:spPr>
           <a:xfrm>
-            <a:off x="6217920" y="1463040"/>
-            <a:ext cx="5212080" cy="4572000"/>
+            <a:off x="6217920" y="1444752"/>
+            <a:ext cx="5212080" cy="4663440"/>
           </a:xfrm>
           <a:prstGeom prst="roundRect">
             <a:avLst>
-              <a:gd name="adj" fmla="val 3000"/>
+              <a:gd name="adj" fmla="val 2500"/>
             </a:avLst>
           </a:prstGeom>
           <a:solidFill>
@@ -10657,8 +10657,8 @@
         </p:nvSpPr>
         <p:spPr>
           <a:xfrm>
-            <a:off x="6400800" y="1645920"/>
-            <a:ext cx="4846320" cy="4206240"/>
+            <a:off x="6446520" y="1645920"/>
+            <a:ext cx="4754880" cy="4297680"/>
           </a:xfrm>
           <a:prstGeom prst="rect">
             <a:avLst/>
@@ -10673,9 +10673,9 @@
           <a:p>
             <a:pPr>
               <a:spcAft>
-                <a:spcPts val="1000"/>
+                <a:spcPts val="1200"/>
               </a:spcAft>
-              <a:defRPr sz="1300" b="1">
+              <a:defRPr sz="1400" b="1">
                 <a:solidFill>
                   <a:srgbClr val="0284C7"/>
                 </a:solidFill>
@@ -10688,11 +10688,11 @@
           <a:p>
             <a:pPr>
               <a:spcAft>
-                <a:spcPts val="600"/>
+                <a:spcPts val="800"/>
               </a:spcAft>
             </a:pPr>
             <a:r>
-              <a:rPr b="1" sz="1000">
+              <a:rPr b="1" sz="1100">
                 <a:solidFill>
                   <a:srgbClr val="0F2B48"/>
                 </a:solidFill>
@@ -10700,7 +10700,7 @@
               <a:t>⚙ Kinematic Optimization: </a:t>
             </a:r>
             <a:r>
-              <a:rPr sz="950">
+              <a:rPr sz="1100">
                 <a:solidFill>
                   <a:srgbClr val="1E293B"/>
                 </a:solidFill>
@@ -10711,11 +10711,11 @@
           <a:p>
             <a:pPr>
               <a:spcAft>
-                <a:spcPts val="600"/>
+                <a:spcPts val="800"/>
               </a:spcAft>
             </a:pPr>
             <a:r>
-              <a:rPr b="1" sz="1000">
+              <a:rPr b="1" sz="1100">
                 <a:solidFill>
                   <a:srgbClr val="0F2B48"/>
                 </a:solidFill>
@@ -10723,7 +10723,7 @@
               <a:t>⚙ Realistic PhysX Deceleration: </a:t>
             </a:r>
             <a:r>
-              <a:rPr sz="950">
+              <a:rPr sz="1100">
                 <a:solidFill>
                   <a:srgbClr val="1E293B"/>
                 </a:solidFill>
@@ -10734,11 +10734,11 @@
           <a:p>
             <a:pPr>
               <a:spcAft>
-                <a:spcPts val="600"/>
+                <a:spcPts val="800"/>
               </a:spcAft>
             </a:pPr>
             <a:r>
-              <a:rPr b="1" sz="1000">
+              <a:rPr b="1" sz="1100">
                 <a:solidFill>
                   <a:srgbClr val="0F2B48"/>
                 </a:solidFill>
@@ -10746,7 +10746,7 @@
               <a:t>⚙ Continuous Multi-Item Flow: </a:t>
             </a:r>
             <a:r>
-              <a:rPr sz="950">
+              <a:rPr sz="1100">
                 <a:solidFill>
                   <a:srgbClr val="1E293B"/>
                 </a:solidFill>
@@ -10757,11 +10757,11 @@
           <a:p>
             <a:pPr>
               <a:spcAft>
-                <a:spcPts val="600"/>
+                <a:spcPts val="800"/>
               </a:spcAft>
             </a:pPr>
             <a:r>
-              <a:rPr b="1" sz="1000">
+              <a:rPr b="1" sz="1100">
                 <a:solidFill>
                   <a:srgbClr val="0F2B48"/>
                 </a:solidFill>
@@ -10769,7 +10769,7 @@
               <a:t>⚙ Empirical QA Logging: </a:t>
             </a:r>
             <a:r>
-              <a:rPr sz="950">
+              <a:rPr sz="1100">
                 <a:solidFill>
                   <a:srgbClr val="1E293B"/>
                 </a:solidFill>
@@ -10805,8 +10805,8 @@
         </p:nvSpPr>
         <p:spPr>
           <a:xfrm>
-            <a:off x="731520" y="365760"/>
-            <a:ext cx="9144000" cy="274320"/>
+            <a:off x="731520" y="347472"/>
+            <a:ext cx="9144000" cy="292608"/>
           </a:xfrm>
           <a:prstGeom prst="rect">
             <a:avLst/>
@@ -10820,7 +10820,7 @@
           <a:lstStyle/>
           <a:p>
             <a:pPr>
-              <a:defRPr sz="1000" b="1">
+              <a:defRPr sz="1100" b="1">
                 <a:solidFill>
                   <a:srgbClr val="0284C7"/>
                 </a:solidFill>
@@ -10841,7 +10841,7 @@
         <p:spPr>
           <a:xfrm>
             <a:off x="731520" y="621792"/>
-            <a:ext cx="10515600" cy="548640"/>
+            <a:ext cx="10515600" cy="594360"/>
           </a:xfrm>
           <a:prstGeom prst="rect">
             <a:avLst/>
@@ -10855,7 +10855,7 @@
           <a:lstStyle/>
           <a:p>
             <a:pPr>
-              <a:defRPr sz="2000" b="1">
+              <a:defRPr sz="2200" b="1">
                 <a:solidFill>
                   <a:srgbClr val="0F2B48"/>
                 </a:solidFill>
@@ -10875,8 +10875,8 @@
         </p:nvSpPr>
         <p:spPr>
           <a:xfrm>
-            <a:off x="731520" y="1207008"/>
-            <a:ext cx="10728655" cy="18288"/>
+            <a:off x="731520" y="1243584"/>
+            <a:ext cx="10728655" cy="22860"/>
           </a:xfrm>
           <a:prstGeom prst="rect">
             <a:avLst/>
@@ -10918,7 +10918,7 @@
         </p:nvSpPr>
         <p:spPr>
           <a:xfrm>
-            <a:off x="731520" y="6309360"/>
+            <a:off x="731520" y="6327648"/>
             <a:ext cx="10728655" cy="13716"/>
           </a:xfrm>
           <a:prstGeom prst="rect">
@@ -10961,8 +10961,8 @@
         </p:nvSpPr>
         <p:spPr>
           <a:xfrm>
-            <a:off x="731520" y="6355080"/>
-            <a:ext cx="7315200" cy="320040"/>
+            <a:off x="731520" y="6364224"/>
+            <a:ext cx="7772400" cy="320040"/>
           </a:xfrm>
           <a:prstGeom prst="rect">
             <a:avLst/>
@@ -10976,7 +10976,7 @@
           <a:lstStyle/>
           <a:p>
             <a:pPr>
-              <a:defRPr sz="900">
+              <a:defRPr sz="950">
                 <a:solidFill>
                   <a:srgbClr val="64748B"/>
                 </a:solidFill>
@@ -10996,8 +10996,8 @@
         </p:nvSpPr>
         <p:spPr>
           <a:xfrm>
-            <a:off x="9631375" y="6355080"/>
-            <a:ext cx="1828800" cy="320040"/>
+            <a:off x="9357055" y="6364224"/>
+            <a:ext cx="2103120" cy="320040"/>
           </a:xfrm>
           <a:prstGeom prst="rect">
             <a:avLst/>
@@ -11011,7 +11011,7 @@
           <a:lstStyle/>
           <a:p>
             <a:pPr algn="r">
-              <a:defRPr sz="900" b="1">
+              <a:defRPr sz="950" b="1">
                 <a:solidFill>
                   <a:srgbClr val="0284C7"/>
                 </a:solidFill>
@@ -11032,7 +11032,7 @@
           <p:nvPr/>
         </p:nvGraphicFramePr>
         <p:xfrm>
-          <a:off x="731520" y="1463040"/>
+          <a:off x="731520" y="1444752"/>
           <a:ext cx="10728655" cy="3474720"/>
         </p:xfrm>
         <a:graphic>
@@ -11054,7 +11054,7 @@
                     <a:lstStyle/>
                     <a:p>
                       <a:pPr>
-                        <a:defRPr b="1" sz="1000">
+                        <a:defRPr b="1" sz="1100">
                           <a:solidFill>
                             <a:srgbClr val="F1F5F9"/>
                           </a:solidFill>
@@ -11077,7 +11077,7 @@
                     <a:lstStyle/>
                     <a:p>
                       <a:pPr>
-                        <a:defRPr b="1" sz="1000">
+                        <a:defRPr b="1" sz="1100">
                           <a:solidFill>
                             <a:srgbClr val="F1F5F9"/>
                           </a:solidFill>
@@ -11100,7 +11100,7 @@
                     <a:lstStyle/>
                     <a:p>
                       <a:pPr>
-                        <a:defRPr b="1" sz="1000">
+                        <a:defRPr b="1" sz="1100">
                           <a:solidFill>
                             <a:srgbClr val="F1F5F9"/>
                           </a:solidFill>
@@ -11123,14 +11123,14 @@
                     <a:lstStyle/>
                     <a:p>
                       <a:pPr>
-                        <a:defRPr b="1" sz="1000">
+                        <a:defRPr b="1" sz="1100">
                           <a:solidFill>
                             <a:srgbClr val="F1F5F9"/>
                           </a:solidFill>
                         </a:defRPr>
                       </a:pPr>
                       <a:r>
-                        <a:t>Direction</a:t>
+                        <a:t>Rate &amp; Direction</a:t>
                       </a:r>
                     </a:p>
                   </a:txBody>
@@ -11148,7 +11148,7 @@
                     <a:lstStyle/>
                     <a:p>
                       <a:pPr>
-                        <a:defRPr sz="950" b="1">
+                        <a:defRPr sz="1050" b="1">
                           <a:solidFill>
                             <a:srgbClr val="1E293B"/>
                           </a:solidFill>
@@ -11171,7 +11171,7 @@
                     <a:lstStyle/>
                     <a:p>
                       <a:pPr>
-                        <a:defRPr sz="950">
+                        <a:defRPr sz="1050">
                           <a:solidFill>
                             <a:srgbClr val="1E293B"/>
                           </a:solidFill>
@@ -11194,7 +11194,7 @@
                     <a:lstStyle/>
                     <a:p>
                       <a:pPr>
-                        <a:defRPr sz="950">
+                        <a:defRPr sz="1050">
                           <a:solidFill>
                             <a:srgbClr val="1E293B"/>
                           </a:solidFill>
@@ -11217,14 +11217,14 @@
                     <a:lstStyle/>
                     <a:p>
                       <a:pPr>
-                        <a:defRPr sz="950">
+                        <a:defRPr sz="1050">
                           <a:solidFill>
                             <a:srgbClr val="1E293B"/>
                           </a:solidFill>
                         </a:defRPr>
                       </a:pPr>
                       <a:r>
-                        <a:t>Unity -&gt; ROS (10 Hz)</a:t>
+                        <a:t>10 Hz (Unity -&gt; ROS)</a:t>
                       </a:r>
                     </a:p>
                   </a:txBody>
@@ -11242,7 +11242,7 @@
                     <a:lstStyle/>
                     <a:p>
                       <a:pPr>
-                        <a:defRPr sz="950" b="1">
+                        <a:defRPr sz="1050" b="1">
                           <a:solidFill>
                             <a:srgbClr val="1E293B"/>
                           </a:solidFill>
@@ -11265,7 +11265,7 @@
                     <a:lstStyle/>
                     <a:p>
                       <a:pPr>
-                        <a:defRPr sz="950">
+                        <a:defRPr sz="1050">
                           <a:solidFill>
                             <a:srgbClr val="1E293B"/>
                           </a:solidFill>
@@ -11288,7 +11288,7 @@
                     <a:lstStyle/>
                     <a:p>
                       <a:pPr>
-                        <a:defRPr sz="950">
+                        <a:defRPr sz="1050">
                           <a:solidFill>
                             <a:srgbClr val="1E293B"/>
                           </a:solidFill>
@@ -11311,14 +11311,14 @@
                     <a:lstStyle/>
                     <a:p>
                       <a:pPr>
-                        <a:defRPr sz="950">
+                        <a:defRPr sz="1050">
                           <a:solidFill>
                             <a:srgbClr val="1E293B"/>
                           </a:solidFill>
                         </a:defRPr>
                       </a:pPr>
                       <a:r>
-                        <a:t>Bidirectional (Real-time)</a:t>
+                        <a:t>Real-time (Bidirectional)</a:t>
                       </a:r>
                     </a:p>
                   </a:txBody>
@@ -11336,7 +11336,7 @@
                     <a:lstStyle/>
                     <a:p>
                       <a:pPr>
-                        <a:defRPr sz="950" b="1">
+                        <a:defRPr sz="1050" b="1">
                           <a:solidFill>
                             <a:srgbClr val="1E293B"/>
                           </a:solidFill>
@@ -11359,7 +11359,7 @@
                     <a:lstStyle/>
                     <a:p>
                       <a:pPr>
-                        <a:defRPr sz="950">
+                        <a:defRPr sz="1050">
                           <a:solidFill>
                             <a:srgbClr val="1E293B"/>
                           </a:solidFill>
@@ -11382,7 +11382,7 @@
                     <a:lstStyle/>
                     <a:p>
                       <a:pPr>
-                        <a:defRPr sz="950">
+                        <a:defRPr sz="1050">
                           <a:solidFill>
                             <a:srgbClr val="1E293B"/>
                           </a:solidFill>
@@ -11405,14 +11405,14 @@
                     <a:lstStyle/>
                     <a:p>
                       <a:pPr>
-                        <a:defRPr sz="950">
+                        <a:defRPr sz="1050">
                           <a:solidFill>
                             <a:srgbClr val="1E293B"/>
                           </a:solidFill>
                         </a:defRPr>
                       </a:pPr>
                       <a:r>
-                        <a:t>Internal ROS Node</a:t>
+                        <a:t>Event-driven (ROS Node)</a:t>
                       </a:r>
                     </a:p>
                   </a:txBody>
@@ -11430,7 +11430,7 @@
                     <a:lstStyle/>
                     <a:p>
                       <a:pPr>
-                        <a:defRPr sz="950" b="1">
+                        <a:defRPr sz="1050" b="1">
                           <a:solidFill>
                             <a:srgbClr val="1E293B"/>
                           </a:solidFill>
@@ -11453,7 +11453,7 @@
                     <a:lstStyle/>
                     <a:p>
                       <a:pPr>
-                        <a:defRPr sz="950">
+                        <a:defRPr sz="1050">
                           <a:solidFill>
                             <a:srgbClr val="1E293B"/>
                           </a:solidFill>
@@ -11476,7 +11476,7 @@
                     <a:lstStyle/>
                     <a:p>
                       <a:pPr>
-                        <a:defRPr sz="950">
+                        <a:defRPr sz="1050">
                           <a:solidFill>
                             <a:srgbClr val="1E293B"/>
                           </a:solidFill>
@@ -11499,7 +11499,7 @@
                     <a:lstStyle/>
                     <a:p>
                       <a:pPr>
-                        <a:defRPr sz="950">
+                        <a:defRPr sz="1050">
                           <a:solidFill>
                             <a:srgbClr val="1E293B"/>
                           </a:solidFill>
@@ -11524,7 +11524,7 @@
                     <a:lstStyle/>
                     <a:p>
                       <a:pPr>
-                        <a:defRPr sz="950" b="1">
+                        <a:defRPr sz="1050" b="1">
                           <a:solidFill>
                             <a:srgbClr val="1E293B"/>
                           </a:solidFill>
@@ -11547,7 +11547,7 @@
                     <a:lstStyle/>
                     <a:p>
                       <a:pPr>
-                        <a:defRPr sz="950">
+                        <a:defRPr sz="1050">
                           <a:solidFill>
                             <a:srgbClr val="1E293B"/>
                           </a:solidFill>
@@ -11570,7 +11570,7 @@
                     <a:lstStyle/>
                     <a:p>
                       <a:pPr>
-                        <a:defRPr sz="950">
+                        <a:defRPr sz="1050">
                           <a:solidFill>
                             <a:srgbClr val="1E293B"/>
                           </a:solidFill>
@@ -11593,14 +11593,14 @@
                     <a:lstStyle/>
                     <a:p>
                       <a:pPr>
-                        <a:defRPr sz="950">
+                        <a:defRPr sz="1050">
                           <a:solidFill>
                             <a:srgbClr val="1E293B"/>
                           </a:solidFill>
                         </a:defRPr>
                       </a:pPr>
                       <a:r>
-                        <a:t>ROS -&gt; Unity (50 Hz)</a:t>
+                        <a:t>50 Hz (ROS -&gt; Unity)</a:t>
                       </a:r>
                     </a:p>
                   </a:txBody>
@@ -11618,7 +11618,7 @@
                     <a:lstStyle/>
                     <a:p>
                       <a:pPr>
-                        <a:defRPr sz="950" b="1">
+                        <a:defRPr sz="1050" b="1">
                           <a:solidFill>
                             <a:srgbClr val="1E293B"/>
                           </a:solidFill>
@@ -11641,7 +11641,7 @@
                     <a:lstStyle/>
                     <a:p>
                       <a:pPr>
-                        <a:defRPr sz="950">
+                        <a:defRPr sz="1050">
                           <a:solidFill>
                             <a:srgbClr val="1E293B"/>
                           </a:solidFill>
@@ -11664,7 +11664,7 @@
                     <a:lstStyle/>
                     <a:p>
                       <a:pPr>
-                        <a:defRPr sz="950">
+                        <a:defRPr sz="1050">
                           <a:solidFill>
                             <a:srgbClr val="1E293B"/>
                           </a:solidFill>
@@ -11687,14 +11687,14 @@
                     <a:lstStyle/>
                     <a:p>
                       <a:pPr>
-                        <a:defRPr sz="950">
+                        <a:defRPr sz="1050">
                           <a:solidFill>
                             <a:srgbClr val="1E293B"/>
                           </a:solidFill>
                         </a:defRPr>
                       </a:pPr>
                       <a:r>
-                        <a:t>ROS &lt;-&gt; Unity (Event-driven)</a:t>
+                        <a:t>Event-driven (ROS &lt;-&gt; Unity)</a:t>
                       </a:r>
                     </a:p>
                   </a:txBody>
@@ -11722,7 +11722,7 @@
           </a:xfrm>
           <a:prstGeom prst="roundRect">
             <a:avLst>
-              <a:gd name="adj" fmla="val 3000"/>
+              <a:gd name="adj" fmla="val 2500"/>
             </a:avLst>
           </a:prstGeom>
           <a:solidFill>
@@ -11764,8 +11764,8 @@
         </p:nvSpPr>
         <p:spPr>
           <a:xfrm>
-            <a:off x="914400" y="5193792"/>
-            <a:ext cx="10362895" cy="896112"/>
+            <a:off x="960120" y="5193792"/>
+            <a:ext cx="10241280" cy="896112"/>
           </a:xfrm>
           <a:prstGeom prst="rect">
             <a:avLst/>
@@ -11782,7 +11782,7 @@
               <a:spcAft>
                 <a:spcPts val="400"/>
               </a:spcAft>
-              <a:defRPr sz="1100" b="1">
+              <a:defRPr sz="1200" b="1">
                 <a:solidFill>
                   <a:srgbClr val="0F2B48"/>
                 </a:solidFill>
@@ -11794,7 +11794,7 @@
           </a:p>
           <a:p>
             <a:pPr>
-              <a:defRPr sz="950">
+              <a:defRPr sz="1050">
                 <a:solidFill>
                   <a:srgbClr val="1E293B"/>
                 </a:solidFill>
@@ -11840,8 +11840,8 @@
         </p:nvSpPr>
         <p:spPr>
           <a:xfrm>
-            <a:off x="731520" y="365760"/>
-            <a:ext cx="9144000" cy="274320"/>
+            <a:off x="731520" y="347472"/>
+            <a:ext cx="9144000" cy="292608"/>
           </a:xfrm>
           <a:prstGeom prst="rect">
             <a:avLst/>
@@ -11855,14 +11855,14 @@
           <a:lstStyle/>
           <a:p>
             <a:pPr>
-              <a:defRPr sz="1000" b="1">
+              <a:defRPr sz="1100" b="1">
                 <a:solidFill>
                   <a:srgbClr val="0284C7"/>
                 </a:solidFill>
               </a:defRPr>
             </a:pPr>
             <a:r>
-              <a:t>INSTRUCTOR FEEDBACK &amp; RESOLUTIONS</a:t>
+              <a:t>FEEDBACK &amp; ISSUE RESOLUTIONS</a:t>
             </a:r>
           </a:p>
         </p:txBody>
@@ -11876,7 +11876,7 @@
         <p:spPr>
           <a:xfrm>
             <a:off x="731520" y="621792"/>
-            <a:ext cx="10515600" cy="548640"/>
+            <a:ext cx="10515600" cy="594360"/>
           </a:xfrm>
           <a:prstGeom prst="rect">
             <a:avLst/>
@@ -11890,14 +11890,14 @@
           <a:lstStyle/>
           <a:p>
             <a:pPr>
-              <a:defRPr sz="2000" b="1">
+              <a:defRPr sz="2200" b="1">
                 <a:solidFill>
                   <a:srgbClr val="0F2B48"/>
                 </a:solidFill>
               </a:defRPr>
             </a:pPr>
             <a:r>
-              <a:t>Addressing Faculty Feedback with Rapid Technical Solutions</a:t>
+              <a:t>Instructor Feedback and Solving Runtime Engineering Challenges</a:t>
             </a:r>
           </a:p>
         </p:txBody>
@@ -11910,8 +11910,8 @@
         </p:nvSpPr>
         <p:spPr>
           <a:xfrm>
-            <a:off x="731520" y="1207008"/>
-            <a:ext cx="10728655" cy="18288"/>
+            <a:off x="731520" y="1243584"/>
+            <a:ext cx="10728655" cy="22860"/>
           </a:xfrm>
           <a:prstGeom prst="rect">
             <a:avLst/>
@@ -11953,7 +11953,7 @@
         </p:nvSpPr>
         <p:spPr>
           <a:xfrm>
-            <a:off x="731520" y="6309360"/>
+            <a:off x="731520" y="6327648"/>
             <a:ext cx="10728655" cy="13716"/>
           </a:xfrm>
           <a:prstGeom prst="rect">
@@ -11996,8 +11996,8 @@
         </p:nvSpPr>
         <p:spPr>
           <a:xfrm>
-            <a:off x="731520" y="6355080"/>
-            <a:ext cx="7315200" cy="320040"/>
+            <a:off x="731520" y="6364224"/>
+            <a:ext cx="7772400" cy="320040"/>
           </a:xfrm>
           <a:prstGeom prst="rect">
             <a:avLst/>
@@ -12011,7 +12011,7 @@
           <a:lstStyle/>
           <a:p>
             <a:pPr>
-              <a:defRPr sz="900">
+              <a:defRPr sz="950">
                 <a:solidFill>
                   <a:srgbClr val="64748B"/>
                 </a:solidFill>
@@ -12031,8 +12031,8 @@
         </p:nvSpPr>
         <p:spPr>
           <a:xfrm>
-            <a:off x="9631375" y="6355080"/>
-            <a:ext cx="1828800" cy="320040"/>
+            <a:off x="9357055" y="6364224"/>
+            <a:ext cx="2103120" cy="320040"/>
           </a:xfrm>
           <a:prstGeom prst="rect">
             <a:avLst/>
@@ -12046,7 +12046,7 @@
           <a:lstStyle/>
           <a:p>
             <a:pPr algn="r">
-              <a:defRPr sz="900" b="1">
+              <a:defRPr sz="950" b="1">
                 <a:solidFill>
                   <a:srgbClr val="0284C7"/>
                 </a:solidFill>
@@ -12066,12 +12066,12 @@
         </p:nvSpPr>
         <p:spPr>
           <a:xfrm>
-            <a:off x="731520" y="1463040"/>
-            <a:ext cx="3413455" cy="4572000"/>
+            <a:off x="731520" y="1444752"/>
+            <a:ext cx="3413455" cy="4663440"/>
           </a:xfrm>
           <a:prstGeom prst="roundRect">
             <a:avLst>
-              <a:gd name="adj" fmla="val 3000"/>
+              <a:gd name="adj" fmla="val 2500"/>
             </a:avLst>
           </a:prstGeom>
           <a:solidFill>
@@ -12113,8 +12113,8 @@
         </p:nvSpPr>
         <p:spPr>
           <a:xfrm>
-            <a:off x="914400" y="1645920"/>
-            <a:ext cx="3047695" cy="4206240"/>
+            <a:off x="914400" y="1600200"/>
+            <a:ext cx="3047695" cy="4343400"/>
           </a:xfrm>
           <a:prstGeom prst="rect">
             <a:avLst/>
@@ -12129,85 +12129,100 @@
           <a:p>
             <a:pPr>
               <a:spcAft>
+                <a:spcPts val="200"/>
+              </a:spcAft>
+              <a:defRPr sz="1400" b="1">
+                <a:solidFill>
+                  <a:srgbClr val="0F2B48"/>
+                </a:solidFill>
+              </a:defRPr>
+            </a:pPr>
+            <a:r>
+              <a:t>Instructor Feedback</a:t>
+            </a:r>
+          </a:p>
+          <a:p>
+            <a:pPr>
+              <a:spcAft>
                 <a:spcPts val="1000"/>
               </a:spcAft>
-              <a:defRPr sz="1300" b="1">
+              <a:defRPr sz="1000" b="1">
+                <a:solidFill>
+                  <a:srgbClr val="64748B"/>
+                </a:solidFill>
+              </a:defRPr>
+            </a:pPr>
+            <a:r>
+              <a:t>Requirement: Visible 2-Finger Claw</a:t>
+            </a:r>
+          </a:p>
+          <a:p>
+            <a:pPr>
+              <a:spcAft>
+                <a:spcPts val="800"/>
+              </a:spcAft>
+            </a:pPr>
+            <a:r>
+              <a:rPr b="1" sz="1050">
                 <a:solidFill>
                   <a:srgbClr val="0F2B48"/>
                 </a:solidFill>
-              </a:defRPr>
-            </a:pPr>
-            <a:r>
-              <a:t>Feedback 1: 2-Finger Claw</a:t>
+              </a:rPr>
+              <a:t>• Faculty Feedback: </a:t>
+            </a:r>
+            <a:r>
+              <a:rPr sz="1000">
+                <a:solidFill>
+                  <a:srgbClr val="1E293B"/>
+                </a:solidFill>
+              </a:rPr>
+              <a:t>Instructor requested a visible mechanical gripper claw on the robot rather than an abstract suction/contact point.</a:t>
             </a:r>
           </a:p>
           <a:p>
             <a:pPr>
               <a:spcAft>
-                <a:spcPts val="600"/>
+                <a:spcPts val="800"/>
               </a:spcAft>
             </a:pPr>
             <a:r>
-              <a:rPr b="1" sz="950">
+              <a:rPr b="1" sz="1050">
                 <a:solidFill>
                   <a:srgbClr val="0F2B48"/>
                 </a:solidFill>
               </a:rPr>
-              <a:t>• Requested: </a:t>
-            </a:r>
-            <a:r>
-              <a:rPr sz="900">
+              <a:t>• Procedural Claw (VisualClaw): </a:t>
+            </a:r>
+            <a:r>
+              <a:rPr sz="1000">
                 <a:solidFill>
                   <a:srgbClr val="1E293B"/>
                 </a:solidFill>
               </a:rPr>
-              <a:t>Instructor recommended adding a visible mechanical gripper claw instead of an abstract suction point.</a:t>
+              <a:t>Designed flange adapter (1.2cm), navy housing chassis (2.0cm), and dual-color status LED (Cyan/Emerald).</a:t>
             </a:r>
           </a:p>
           <a:p>
             <a:pPr>
               <a:spcAft>
-                <a:spcPts val="600"/>
+                <a:spcPts val="800"/>
               </a:spcAft>
             </a:pPr>
             <a:r>
-              <a:rPr b="1" sz="950">
+              <a:rPr b="1" sz="1050">
                 <a:solidFill>
                   <a:srgbClr val="0F2B48"/>
                 </a:solidFill>
               </a:rPr>
-              <a:t>• Solution: </a:t>
-            </a:r>
-            <a:r>
-              <a:rPr sz="900">
+              <a:t>• Industrial Fingers: </a:t>
+            </a:r>
+            <a:r>
+              <a:rPr sz="1000">
                 <a:solidFill>
                   <a:srgbClr val="1E293B"/>
                 </a:solidFill>
               </a:rPr>
-              <a:t>Built procedural industrial 2-finger claw (VisualClaw): Flange adapter (1.2cm), navy housing chassis (2.0cm), and status LED.</a:t>
-            </a:r>
-          </a:p>
-          <a:p>
-            <a:pPr>
-              <a:spcAft>
-                <a:spcPts val="600"/>
-              </a:spcAft>
-            </a:pPr>
-            <a:r>
-              <a:rPr b="1" sz="950">
-                <a:solidFill>
-                  <a:srgbClr val="0F2B48"/>
-                </a:solidFill>
-              </a:rPr>
-              <a:t>• Fingers: </a:t>
-            </a:r>
-            <a:r>
-              <a:rPr sz="900">
-                <a:solidFill>
-                  <a:srgbClr val="1E293B"/>
-                </a:solidFill>
-              </a:rPr>
-              <a:t>Aircraft aluminum arms (4.0cm) with high-friction black rubber pads, driven by kinematic carriage animation.</a:t>
+              <a:t>Aircraft aluminum arms (4.0cm) with high-friction black rubber pads; animated carriage (9.2cm to 6.1cm span).</a:t>
             </a:r>
           </a:p>
         </p:txBody>
@@ -12220,12 +12235,12 @@
         </p:nvSpPr>
         <p:spPr>
           <a:xfrm>
-            <a:off x="4389120" y="1463040"/>
-            <a:ext cx="3413455" cy="4572000"/>
+            <a:off x="4389120" y="1444752"/>
+            <a:ext cx="3413455" cy="4663440"/>
           </a:xfrm>
           <a:prstGeom prst="roundRect">
             <a:avLst>
-              <a:gd name="adj" fmla="val 3000"/>
+              <a:gd name="adj" fmla="val 2500"/>
             </a:avLst>
           </a:prstGeom>
           <a:solidFill>
@@ -12267,8 +12282,8 @@
         </p:nvSpPr>
         <p:spPr>
           <a:xfrm>
-            <a:off x="4572000" y="1645920"/>
-            <a:ext cx="3047695" cy="4206240"/>
+            <a:off x="4572000" y="1600200"/>
+            <a:ext cx="3047695" cy="4343400"/>
           </a:xfrm>
           <a:prstGeom prst="rect">
             <a:avLst/>
@@ -12283,85 +12298,100 @@
           <a:p>
             <a:pPr>
               <a:spcAft>
+                <a:spcPts val="200"/>
+              </a:spcAft>
+              <a:defRPr sz="1400" b="1">
+                <a:solidFill>
+                  <a:srgbClr val="D97706"/>
+                </a:solidFill>
+              </a:defRPr>
+            </a:pPr>
+            <a:r>
+              <a:t>Runtime Issue 1</a:t>
+            </a:r>
+          </a:p>
+          <a:p>
+            <a:pPr>
+              <a:spcAft>
                 <a:spcPts val="1000"/>
               </a:spcAft>
-              <a:defRPr sz="1300" b="1">
-                <a:solidFill>
-                  <a:srgbClr val="D97706"/>
-                </a:solidFill>
-              </a:defRPr>
-            </a:pPr>
-            <a:r>
-              <a:t>Feedback 2: Missed Cubes</a:t>
+              <a:defRPr sz="1000" b="1">
+                <a:solidFill>
+                  <a:srgbClr val="64748B"/>
+                </a:solidFill>
+              </a:defRPr>
+            </a:pPr>
+            <a:r>
+              <a:t>Challenge: Missed Cubes in Continuous Flow</a:t>
             </a:r>
           </a:p>
           <a:p>
             <a:pPr>
               <a:spcAft>
-                <a:spcPts val="600"/>
+                <a:spcPts val="800"/>
               </a:spcAft>
             </a:pPr>
             <a:r>
-              <a:rPr b="1" sz="950">
+              <a:rPr b="1" sz="1050">
                 <a:solidFill>
                   <a:srgbClr val="0F2B48"/>
                 </a:solidFill>
               </a:rPr>
-              <a:t>• Issue: </a:t>
-            </a:r>
-            <a:r>
-              <a:rPr sz="900">
+              <a:t>• Observed Bug: </a:t>
+            </a:r>
+            <a:r>
+              <a:rPr sz="1000">
                 <a:solidFill>
                   <a:srgbClr val="1E293B"/>
                 </a:solidFill>
               </a:rPr>
-              <a:t>During continuous multi-item flow, cubes were occasionally missed due to missed OnTriggerEnter events.</a:t>
+              <a:t>Over extended runs, cubes occasionally slipped past pick station due to missed trigger collisions.</a:t>
             </a:r>
           </a:p>
           <a:p>
             <a:pPr>
               <a:spcAft>
-                <a:spcPts val="600"/>
+                <a:spcPts val="800"/>
               </a:spcAft>
             </a:pPr>
             <a:r>
-              <a:rPr b="1" sz="950">
+              <a:rPr b="1" sz="1050">
                 <a:solidFill>
                   <a:srgbClr val="0F2B48"/>
                 </a:solidFill>
               </a:rPr>
-              <a:t>• Solution: </a:t>
-            </a:r>
-            <a:r>
-              <a:rPr sz="900">
+              <a:t>• Root Cause: </a:t>
+            </a:r>
+            <a:r>
+              <a:rPr sz="1000">
                 <a:solidFill>
                   <a:srgbClr val="1E293B"/>
                 </a:solidFill>
               </a:rPr>
-              <a:t>Replaced passive trigger collisions with continuous active scanning (FindLeadingCubeOnConveyor()).</a:t>
+              <a:t>OnTriggerEnter is fragile under continuous multi-item flow and physics frame discretization.</a:t>
             </a:r>
           </a:p>
           <a:p>
             <a:pPr>
               <a:spcAft>
-                <a:spcPts val="600"/>
+                <a:spcPts val="800"/>
               </a:spcAft>
             </a:pPr>
             <a:r>
-              <a:rPr b="1" sz="950">
+              <a:rPr b="1" sz="1050">
                 <a:solidFill>
                   <a:srgbClr val="0F2B48"/>
                 </a:solidFill>
               </a:rPr>
-              <a:t>• Safety Latch: </a:t>
-            </a:r>
-            <a:r>
-              <a:rPr sz="900">
+              <a:t>• Technical Solution: </a:t>
+            </a:r>
+            <a:r>
+              <a:rPr sz="1000">
                 <a:solidFill>
                   <a:srgbClr val="1E293B"/>
                 </a:solidFill>
               </a:rPr>
-              <a:t>Conveyor remains halted if a cube is waiting at pick station (X &gt;= -0.015m), achieving 100% capture reliability.</a:t>
+              <a:t>Replaced trigger collisions with continuous active scanning (FindLeadingCubeOnConveyor()) + safety stop latch at X &gt;= -0.015m (100% reliable).</a:t>
             </a:r>
           </a:p>
         </p:txBody>
@@ -12374,12 +12404,12 @@
         </p:nvSpPr>
         <p:spPr>
           <a:xfrm>
-            <a:off x="8046720" y="1463040"/>
-            <a:ext cx="3413455" cy="4572000"/>
+            <a:off x="8046720" y="1444752"/>
+            <a:ext cx="3413455" cy="4663440"/>
           </a:xfrm>
           <a:prstGeom prst="roundRect">
             <a:avLst>
-              <a:gd name="adj" fmla="val 3000"/>
+              <a:gd name="adj" fmla="val 2500"/>
             </a:avLst>
           </a:prstGeom>
           <a:solidFill>
@@ -12421,8 +12451,8 @@
         </p:nvSpPr>
         <p:spPr>
           <a:xfrm>
-            <a:off x="8229600" y="1645920"/>
-            <a:ext cx="3047695" cy="4206240"/>
+            <a:off x="8229600" y="1600200"/>
+            <a:ext cx="3047695" cy="4343400"/>
           </a:xfrm>
           <a:prstGeom prst="rect">
             <a:avLst/>
@@ -12437,85 +12467,100 @@
           <a:p>
             <a:pPr>
               <a:spcAft>
+                <a:spcPts val="200"/>
+              </a:spcAft>
+              <a:defRPr sz="1400" b="1">
+                <a:solidFill>
+                  <a:srgbClr val="059669"/>
+                </a:solidFill>
+              </a:defRPr>
+            </a:pPr>
+            <a:r>
+              <a:t>Runtime Issue 2</a:t>
+            </a:r>
+          </a:p>
+          <a:p>
+            <a:pPr>
+              <a:spcAft>
                 <a:spcPts val="1000"/>
               </a:spcAft>
-              <a:defRPr sz="1300" b="1">
-                <a:solidFill>
-                  <a:srgbClr val="059669"/>
-                </a:solidFill>
-              </a:defRPr>
-            </a:pPr>
-            <a:r>
-              <a:t>Feedback 3: Anti-Sink &amp; Twist</a:t>
+              <a:defRPr sz="1000" b="1">
+                <a:solidFill>
+                  <a:srgbClr val="64748B"/>
+                </a:solidFill>
+              </a:defRPr>
+            </a:pPr>
+            <a:r>
+              <a:t>Challenge: Conveyor Penetration &amp; Off-Axis Twist</a:t>
             </a:r>
           </a:p>
           <a:p>
             <a:pPr>
               <a:spcAft>
-                <a:spcPts val="600"/>
+                <a:spcPts val="800"/>
               </a:spcAft>
             </a:pPr>
             <a:r>
-              <a:rPr b="1" sz="950">
+              <a:rPr b="1" sz="1050">
                 <a:solidFill>
                   <a:srgbClr val="0F2B48"/>
                 </a:solidFill>
               </a:rPr>
-              <a:t>• Issue: </a:t>
-            </a:r>
-            <a:r>
-              <a:rPr sz="900">
+              <a:t>• Observed Bug: </a:t>
+            </a:r>
+            <a:r>
+              <a:rPr sz="1000">
                 <a:solidFill>
                   <a:srgbClr val="1E293B"/>
                 </a:solidFill>
               </a:rPr>
-              <a:t>Claw slightly penetrated conveyor belt during descent; upon grasping, cube twisted off-axis (13.6° skew).</a:t>
+              <a:t>Claw slightly penetrated belt during descent; upon grasping, cube twisted off-axis by 13.6°.</a:t>
             </a:r>
           </a:p>
           <a:p>
             <a:pPr>
               <a:spcAft>
-                <a:spcPts val="600"/>
+                <a:spcPts val="800"/>
               </a:spcAft>
             </a:pPr>
             <a:r>
-              <a:rPr b="1" sz="950">
+              <a:rPr b="1" sz="1050">
                 <a:solidFill>
                   <a:srgbClr val="0F2B48"/>
                 </a:solidFill>
               </a:rPr>
-              <a:t>• Orthogonalization: </a:t>
-            </a:r>
-            <a:r>
-              <a:rPr sz="900">
+              <a:t>• Root Cause: </a:t>
+            </a:r>
+            <a:r>
+              <a:rPr sz="1000">
                 <a:solidFill>
                   <a:srgbClr val="1E293B"/>
                 </a:solidFill>
               </a:rPr>
-              <a:t>Standardized down_orientation = Quaternion(0.7071, 0.7071, 0, 0), locking tool0 strictly square to belt.</a:t>
+              <a:t>Tool orientation was skewed (0.7854 quaternion), and forced position/rotation snapped cube off-axis.</a:t>
             </a:r>
           </a:p>
           <a:p>
             <a:pPr>
               <a:spcAft>
-                <a:spcPts val="600"/>
+                <a:spcPts val="800"/>
               </a:spcAft>
             </a:pPr>
             <a:r>
-              <a:rPr b="1" sz="950">
+              <a:rPr b="1" sz="1050">
                 <a:solidFill>
                   <a:srgbClr val="0F2B48"/>
                 </a:solidFill>
               </a:rPr>
-              <a:t>• Anti-Sink Clearance: </a:t>
-            </a:r>
-            <a:r>
-              <a:rPr sz="900">
+              <a:t>• Technical Solution: </a:t>
+            </a:r>
+            <a:r>
+              <a:rPr sz="1000">
                 <a:solidFill>
                   <a:srgbClr val="1E293B"/>
                 </a:solidFill>
               </a:rPr>
-              <a:t>Set grasp_offset_z = 0.065m (fingertips clear belt by 2.3cm). Pure parenting preserves natural cube pose.</a:t>
+              <a:t>Standardized down_orientation = Quaternion(0.7071, 0.7071, 0, 0), elevated fingertips (+2.3cm clearance), and pure parenting.</a:t>
             </a:r>
           </a:p>
         </p:txBody>
@@ -12546,8 +12591,8 @@
         </p:nvSpPr>
         <p:spPr>
           <a:xfrm>
-            <a:off x="731520" y="365760"/>
-            <a:ext cx="9144000" cy="274320"/>
+            <a:off x="731520" y="347472"/>
+            <a:ext cx="9144000" cy="292608"/>
           </a:xfrm>
           <a:prstGeom prst="rect">
             <a:avLst/>
@@ -12561,7 +12606,7 @@
           <a:lstStyle/>
           <a:p>
             <a:pPr>
-              <a:defRPr sz="1000" b="1">
+              <a:defRPr sz="1100" b="1">
                 <a:solidFill>
                   <a:srgbClr val="0284C7"/>
                 </a:solidFill>
@@ -12582,7 +12627,7 @@
         <p:spPr>
           <a:xfrm>
             <a:off x="731520" y="621792"/>
-            <a:ext cx="10515600" cy="548640"/>
+            <a:ext cx="10515600" cy="594360"/>
           </a:xfrm>
           <a:prstGeom prst="rect">
             <a:avLst/>
@@ -12596,7 +12641,7 @@
           <a:lstStyle/>
           <a:p>
             <a:pPr>
-              <a:defRPr sz="2000" b="1">
+              <a:defRPr sz="2200" b="1">
                 <a:solidFill>
                   <a:srgbClr val="0F2B48"/>
                 </a:solidFill>
@@ -12616,8 +12661,8 @@
         </p:nvSpPr>
         <p:spPr>
           <a:xfrm>
-            <a:off x="731520" y="1207008"/>
-            <a:ext cx="10728655" cy="18288"/>
+            <a:off x="731520" y="1243584"/>
+            <a:ext cx="10728655" cy="22860"/>
           </a:xfrm>
           <a:prstGeom prst="rect">
             <a:avLst/>
@@ -12659,7 +12704,7 @@
         </p:nvSpPr>
         <p:spPr>
           <a:xfrm>
-            <a:off x="731520" y="6309360"/>
+            <a:off x="731520" y="6327648"/>
             <a:ext cx="10728655" cy="13716"/>
           </a:xfrm>
           <a:prstGeom prst="rect">
@@ -12702,8 +12747,8 @@
         </p:nvSpPr>
         <p:spPr>
           <a:xfrm>
-            <a:off x="731520" y="6355080"/>
-            <a:ext cx="7315200" cy="320040"/>
+            <a:off x="731520" y="6364224"/>
+            <a:ext cx="7772400" cy="320040"/>
           </a:xfrm>
           <a:prstGeom prst="rect">
             <a:avLst/>
@@ -12717,7 +12762,7 @@
           <a:lstStyle/>
           <a:p>
             <a:pPr>
-              <a:defRPr sz="900">
+              <a:defRPr sz="950">
                 <a:solidFill>
                   <a:srgbClr val="64748B"/>
                 </a:solidFill>
@@ -12737,8 +12782,8 @@
         </p:nvSpPr>
         <p:spPr>
           <a:xfrm>
-            <a:off x="9631375" y="6355080"/>
-            <a:ext cx="1828800" cy="320040"/>
+            <a:off x="9357055" y="6364224"/>
+            <a:ext cx="2103120" cy="320040"/>
           </a:xfrm>
           <a:prstGeom prst="rect">
             <a:avLst/>
@@ -12752,7 +12797,7 @@
           <a:lstStyle/>
           <a:p>
             <a:pPr algn="r">
-              <a:defRPr sz="900" b="1">
+              <a:defRPr sz="950" b="1">
                 <a:solidFill>
                   <a:srgbClr val="0284C7"/>
                 </a:solidFill>
@@ -12773,7 +12818,7 @@
           <p:nvPr/>
         </p:nvGraphicFramePr>
         <p:xfrm>
-          <a:off x="731520" y="1463040"/>
+          <a:off x="731520" y="1444752"/>
           <a:ext cx="10728655" cy="3474720"/>
         </p:xfrm>
         <a:graphic>
@@ -12794,7 +12839,7 @@
                     <a:lstStyle/>
                     <a:p>
                       <a:pPr>
-                        <a:defRPr b="1" sz="1000">
+                        <a:defRPr b="1" sz="1100">
                           <a:solidFill>
                             <a:srgbClr val="F1F5F9"/>
                           </a:solidFill>
@@ -12817,7 +12862,7 @@
                     <a:lstStyle/>
                     <a:p>
                       <a:pPr>
-                        <a:defRPr b="1" sz="1000">
+                        <a:defRPr b="1" sz="1100">
                           <a:solidFill>
                             <a:srgbClr val="F1F5F9"/>
                           </a:solidFill>
@@ -12840,14 +12885,14 @@
                     <a:lstStyle/>
                     <a:p>
                       <a:pPr>
-                        <a:defRPr b="1" sz="1000">
+                        <a:defRPr b="1" sz="1100">
                           <a:solidFill>
                             <a:srgbClr val="F1F5F9"/>
                           </a:solidFill>
                         </a:defRPr>
                       </a:pPr>
                       <a:r>
-                        <a:t>Engineering Reason</a:t>
+                        <a:t>Engineering Rationale</a:t>
                       </a:r>
                     </a:p>
                   </a:txBody>
@@ -12865,7 +12910,7 @@
                     <a:lstStyle/>
                     <a:p>
                       <a:pPr>
-                        <a:defRPr sz="950" b="1">
+                        <a:defRPr sz="1050" b="1">
                           <a:solidFill>
                             <a:srgbClr val="1E293B"/>
                           </a:solidFill>
@@ -12888,14 +12933,14 @@
                     <a:lstStyle/>
                     <a:p>
                       <a:pPr>
-                        <a:defRPr sz="950">
+                        <a:defRPr sz="1050">
                           <a:solidFill>
                             <a:srgbClr val="1E293B"/>
                           </a:solidFill>
                         </a:defRPr>
                       </a:pPr>
                       <a:r>
-                        <a:t>3.6 m, centered (X = -0.60 m)</a:t>
+                        <a:t>3.6 m, centered directly in front (X = -0.60 m)</a:t>
                       </a:r>
                     </a:p>
                   </a:txBody>
@@ -12911,7 +12956,7 @@
                     <a:lstStyle/>
                     <a:p>
                       <a:pPr>
-                        <a:defRPr sz="950">
+                        <a:defRPr sz="1050">
                           <a:solidFill>
                             <a:srgbClr val="1E293B"/>
                           </a:solidFill>
@@ -12936,7 +12981,7 @@
                     <a:lstStyle/>
                     <a:p>
                       <a:pPr>
-                        <a:defRPr sz="950" b="1">
+                        <a:defRPr sz="1050" b="1">
                           <a:solidFill>
                             <a:srgbClr val="1E293B"/>
                           </a:solidFill>
@@ -12959,7 +13004,7 @@
                     <a:lstStyle/>
                     <a:p>
                       <a:pPr>
-                        <a:defRPr sz="950">
+                        <a:defRPr sz="1050">
                           <a:solidFill>
                             <a:srgbClr val="1E293B"/>
                           </a:solidFill>
@@ -12982,14 +13027,14 @@
                     <a:lstStyle/>
                     <a:p>
                       <a:pPr>
-                        <a:defRPr sz="950">
+                        <a:defRPr sz="1050">
                           <a:solidFill>
                             <a:srgbClr val="1E293B"/>
                           </a:solidFill>
                         </a:defRPr>
                       </a:pPr>
                       <a:r>
-                        <a:t>Short, symmetric approach minimizing arm travel distance &amp; inertia</a:t>
+                        <a:t>Symmetric approach minimizing arm travel distance &amp; inertial moments</a:t>
                       </a:r>
                     </a:p>
                   </a:txBody>
@@ -13007,7 +13052,7 @@
                     <a:lstStyle/>
                     <a:p>
                       <a:pPr>
-                        <a:defRPr sz="950" b="1">
+                        <a:defRPr sz="1050" b="1">
                           <a:solidFill>
                             <a:srgbClr val="1E293B"/>
                           </a:solidFill>
@@ -13030,7 +13075,7 @@
                     <a:lstStyle/>
                     <a:p>
                       <a:pPr>
-                        <a:defRPr sz="950">
+                        <a:defRPr sz="1050">
                           <a:solidFill>
                             <a:srgbClr val="1E293B"/>
                           </a:solidFill>
@@ -13053,7 +13098,7 @@
                     <a:lstStyle/>
                     <a:p>
                       <a:pPr>
-                        <a:defRPr sz="950">
+                        <a:defRPr sz="1050">
                           <a:solidFill>
                             <a:srgbClr val="1E293B"/>
                           </a:solidFill>
@@ -13078,7 +13123,7 @@
                     <a:lstStyle/>
                     <a:p>
                       <a:pPr>
-                        <a:defRPr sz="950" b="1">
+                        <a:defRPr sz="1050" b="1">
                           <a:solidFill>
                             <a:srgbClr val="1E293B"/>
                           </a:solidFill>
@@ -13101,7 +13146,7 @@
                     <a:lstStyle/>
                     <a:p>
                       <a:pPr>
-                        <a:defRPr sz="950">
+                        <a:defRPr sz="1050">
                           <a:solidFill>
                             <a:srgbClr val="1E293B"/>
                           </a:solidFill>
@@ -13124,14 +13169,14 @@
                     <a:lstStyle/>
                     <a:p>
                       <a:pPr>
-                        <a:defRPr sz="950">
+                        <a:defRPr sz="1050">
                           <a:solidFill>
                             <a:srgbClr val="1E293B"/>
                           </a:solidFill>
                         </a:defRPr>
                       </a:pPr>
                       <a:r>
-                        <a:t>Separates third sorting target via pure base pan rotation</a:t>
+                        <a:t>Separates third sorting target via pure base shoulder pan rotation</a:t>
                       </a:r>
                     </a:p>
                   </a:txBody>
@@ -13149,7 +13194,7 @@
                     <a:lstStyle/>
                     <a:p>
                       <a:pPr>
-                        <a:defRPr sz="950" b="1">
+                        <a:defRPr sz="1050" b="1">
                           <a:solidFill>
                             <a:srgbClr val="1E293B"/>
                           </a:solidFill>
@@ -13172,7 +13217,7 @@
                     <a:lstStyle/>
                     <a:p>
                       <a:pPr>
-                        <a:defRPr sz="950">
+                        <a:defRPr sz="1050">
                           <a:solidFill>
                             <a:srgbClr val="1E293B"/>
                           </a:solidFill>
@@ -13195,14 +13240,14 @@
                     <a:lstStyle/>
                     <a:p>
                       <a:pPr>
-                        <a:defRPr sz="950">
+                        <a:defRPr sz="1050">
                           <a:solidFill>
                             <a:srgbClr val="1E293B"/>
                           </a:solidFill>
                         </a:defRPr>
                       </a:pPr>
                       <a:r>
-                        <a:t>Rigid foundation for rails, bins and robot base fixtures</a:t>
+                        <a:t>Rigid mechanical foundation for rails, bins, and robot fixtures</a:t>
                       </a:r>
                     </a:p>
                   </a:txBody>
@@ -13230,7 +13275,7 @@
           </a:xfrm>
           <a:prstGeom prst="roundRect">
             <a:avLst>
-              <a:gd name="adj" fmla="val 3000"/>
+              <a:gd name="adj" fmla="val 2500"/>
             </a:avLst>
           </a:prstGeom>
           <a:solidFill>
@@ -13272,8 +13317,8 @@
         </p:nvSpPr>
         <p:spPr>
           <a:xfrm>
-            <a:off x="914400" y="5193792"/>
-            <a:ext cx="10362895" cy="896112"/>
+            <a:off x="960120" y="5193792"/>
+            <a:ext cx="10241280" cy="896112"/>
           </a:xfrm>
           <a:prstGeom prst="rect">
             <a:avLst/>
@@ -13290,7 +13335,7 @@
               <a:spcAft>
                 <a:spcPts val="400"/>
               </a:spcAft>
-              <a:defRPr sz="1100" b="1">
+              <a:defRPr sz="1200" b="1">
                 <a:solidFill>
                   <a:srgbClr val="0F2B48"/>
                 </a:solidFill>
@@ -13302,7 +13347,7 @@
           </a:p>
           <a:p>
             <a:pPr>
-              <a:defRPr sz="950">
+              <a:defRPr sz="1050">
                 <a:solidFill>
                   <a:srgbClr val="1E293B"/>
                 </a:solidFill>
@@ -13344,8 +13389,8 @@
         </p:nvSpPr>
         <p:spPr>
           <a:xfrm>
-            <a:off x="731520" y="365760"/>
-            <a:ext cx="9144000" cy="274320"/>
+            <a:off x="731520" y="347472"/>
+            <a:ext cx="9144000" cy="292608"/>
           </a:xfrm>
           <a:prstGeom prst="rect">
             <a:avLst/>
@@ -13359,7 +13404,7 @@
           <a:lstStyle/>
           <a:p>
             <a:pPr>
-              <a:defRPr sz="1000" b="1">
+              <a:defRPr sz="1100" b="1">
                 <a:solidFill>
                   <a:srgbClr val="0284C7"/>
                 </a:solidFill>
@@ -13380,7 +13425,7 @@
         <p:spPr>
           <a:xfrm>
             <a:off x="731520" y="621792"/>
-            <a:ext cx="10515600" cy="548640"/>
+            <a:ext cx="10515600" cy="594360"/>
           </a:xfrm>
           <a:prstGeom prst="rect">
             <a:avLst/>
@@ -13394,7 +13439,7 @@
           <a:lstStyle/>
           <a:p>
             <a:pPr>
-              <a:defRPr sz="2000" b="1">
+              <a:defRPr sz="2200" b="1">
                 <a:solidFill>
                   <a:srgbClr val="0F2B48"/>
                 </a:solidFill>
@@ -13414,8 +13459,8 @@
         </p:nvSpPr>
         <p:spPr>
           <a:xfrm>
-            <a:off x="731520" y="1207008"/>
-            <a:ext cx="10728655" cy="18288"/>
+            <a:off x="731520" y="1243584"/>
+            <a:ext cx="10728655" cy="22860"/>
           </a:xfrm>
           <a:prstGeom prst="rect">
             <a:avLst/>
@@ -13457,7 +13502,7 @@
         </p:nvSpPr>
         <p:spPr>
           <a:xfrm>
-            <a:off x="731520" y="6309360"/>
+            <a:off x="731520" y="6327648"/>
             <a:ext cx="10728655" cy="13716"/>
           </a:xfrm>
           <a:prstGeom prst="rect">
@@ -13500,8 +13545,8 @@
         </p:nvSpPr>
         <p:spPr>
           <a:xfrm>
-            <a:off x="731520" y="6355080"/>
-            <a:ext cx="7315200" cy="320040"/>
+            <a:off x="731520" y="6364224"/>
+            <a:ext cx="7772400" cy="320040"/>
           </a:xfrm>
           <a:prstGeom prst="rect">
             <a:avLst/>
@@ -13515,7 +13560,7 @@
           <a:lstStyle/>
           <a:p>
             <a:pPr>
-              <a:defRPr sz="900">
+              <a:defRPr sz="950">
                 <a:solidFill>
                   <a:srgbClr val="64748B"/>
                 </a:solidFill>
@@ -13535,8 +13580,8 @@
         </p:nvSpPr>
         <p:spPr>
           <a:xfrm>
-            <a:off x="9631375" y="6355080"/>
-            <a:ext cx="1828800" cy="320040"/>
+            <a:off x="9357055" y="6364224"/>
+            <a:ext cx="2103120" cy="320040"/>
           </a:xfrm>
           <a:prstGeom prst="rect">
             <a:avLst/>
@@ -13550,7 +13595,7 @@
           <a:lstStyle/>
           <a:p>
             <a:pPr algn="r">
-              <a:defRPr sz="900" b="1">
+              <a:defRPr sz="950" b="1">
                 <a:solidFill>
                   <a:srgbClr val="0284C7"/>
                 </a:solidFill>
@@ -13570,12 +13615,12 @@
         </p:nvSpPr>
         <p:spPr>
           <a:xfrm>
-            <a:off x="731520" y="1463040"/>
-            <a:ext cx="5212080" cy="4572000"/>
+            <a:off x="731520" y="1444752"/>
+            <a:ext cx="5212080" cy="4663440"/>
           </a:xfrm>
           <a:prstGeom prst="roundRect">
             <a:avLst>
-              <a:gd name="adj" fmla="val 3000"/>
+              <a:gd name="adj" fmla="val 2500"/>
             </a:avLst>
           </a:prstGeom>
           <a:solidFill>
@@ -13617,8 +13662,8 @@
         </p:nvSpPr>
         <p:spPr>
           <a:xfrm>
-            <a:off x="914400" y="1645920"/>
-            <a:ext cx="4846320" cy="4206240"/>
+            <a:off x="960120" y="1645920"/>
+            <a:ext cx="4754880" cy="4297680"/>
           </a:xfrm>
           <a:prstGeom prst="rect">
             <a:avLst/>
@@ -13633,9 +13678,9 @@
           <a:p>
             <a:pPr>
               <a:spcAft>
-                <a:spcPts val="1000"/>
+                <a:spcPts val="1200"/>
               </a:spcAft>
-              <a:defRPr sz="1300" b="1">
+              <a:defRPr sz="1400" b="1">
                 <a:solidFill>
                   <a:srgbClr val="0F2B48"/>
                 </a:solidFill>
@@ -13648,11 +13693,11 @@
           <a:p>
             <a:pPr>
               <a:spcAft>
-                <a:spcPts val="600"/>
+                <a:spcPts val="800"/>
               </a:spcAft>
             </a:pPr>
             <a:r>
-              <a:rPr b="1" sz="1000">
+              <a:rPr b="1" sz="1100">
                 <a:solidFill>
                   <a:srgbClr val="0F2B48"/>
                 </a:solidFill>
@@ -13660,7 +13705,7 @@
               <a:t>✔ Downward tool orientation: </a:t>
             </a:r>
             <a:r>
-              <a:rPr sz="950">
+              <a:rPr sz="1100">
                 <a:solidFill>
                   <a:srgbClr val="1E293B"/>
                 </a:solidFill>
@@ -13671,11 +13716,11 @@
           <a:p>
             <a:pPr>
               <a:spcAft>
-                <a:spcPts val="600"/>
+                <a:spcPts val="800"/>
               </a:spcAft>
             </a:pPr>
             <a:r>
-              <a:rPr b="1" sz="1000">
+              <a:rPr b="1" sz="1100">
                 <a:solidFill>
                   <a:srgbClr val="0F2B48"/>
                 </a:solidFill>
@@ -13683,7 +13728,7 @@
               <a:t>✔ Pre-grasp waypoint: </a:t>
             </a:r>
             <a:r>
-              <a:rPr sz="950">
+              <a:rPr sz="1100">
                 <a:solidFill>
                   <a:srgbClr val="1E293B"/>
                 </a:solidFill>
@@ -13694,11 +13739,11 @@
           <a:p>
             <a:pPr>
               <a:spcAft>
-                <a:spcPts val="600"/>
+                <a:spcPts val="800"/>
               </a:spcAft>
             </a:pPr>
             <a:r>
-              <a:rPr b="1" sz="1000">
+              <a:rPr b="1" sz="1100">
                 <a:solidFill>
                   <a:srgbClr val="0F2B48"/>
                 </a:solidFill>
@@ -13706,7 +13751,7 @@
               <a:t>✔ Vertical descent: </a:t>
             </a:r>
             <a:r>
-              <a:rPr sz="950">
+              <a:rPr sz="1100">
                 <a:solidFill>
                   <a:srgbClr val="1E293B"/>
                 </a:solidFill>
@@ -13717,11 +13762,11 @@
           <a:p>
             <a:pPr>
               <a:spcAft>
-                <a:spcPts val="600"/>
+                <a:spcPts val="800"/>
               </a:spcAft>
             </a:pPr>
             <a:r>
-              <a:rPr b="1" sz="1000">
+              <a:rPr b="1" sz="1100">
                 <a:solidFill>
                   <a:srgbClr val="0F2B48"/>
                 </a:solidFill>
@@ -13729,7 +13774,7 @@
               <a:t>✔ Lift before transfer: </a:t>
             </a:r>
             <a:r>
-              <a:rPr sz="950">
+              <a:rPr sz="1100">
                 <a:solidFill>
                   <a:srgbClr val="1E293B"/>
                 </a:solidFill>
@@ -13740,11 +13785,11 @@
           <a:p>
             <a:pPr>
               <a:spcAft>
-                <a:spcPts val="600"/>
+                <a:spcPts val="800"/>
               </a:spcAft>
             </a:pPr>
             <a:r>
-              <a:rPr b="1" sz="1000">
+              <a:rPr b="1" sz="1100">
                 <a:solidFill>
                   <a:srgbClr val="0F2B48"/>
                 </a:solidFill>
@@ -13752,7 +13797,7 @@
               <a:t>✔ Dominant shoulder pan: </a:t>
             </a:r>
             <a:r>
-              <a:rPr sz="950">
+              <a:rPr sz="1100">
                 <a:solidFill>
                   <a:srgbClr val="1E293B"/>
                 </a:solidFill>
@@ -13770,12 +13815,12 @@
         </p:nvSpPr>
         <p:spPr>
           <a:xfrm>
-            <a:off x="6217920" y="1463040"/>
-            <a:ext cx="5212080" cy="4572000"/>
+            <a:off x="6217920" y="1444752"/>
+            <a:ext cx="5212080" cy="4663440"/>
           </a:xfrm>
           <a:prstGeom prst="roundRect">
             <a:avLst>
-              <a:gd name="adj" fmla="val 3000"/>
+              <a:gd name="adj" fmla="val 2500"/>
             </a:avLst>
           </a:prstGeom>
           <a:solidFill>
@@ -13817,8 +13862,8 @@
         </p:nvSpPr>
         <p:spPr>
           <a:xfrm>
-            <a:off x="6400800" y="1645920"/>
-            <a:ext cx="4846320" cy="4206240"/>
+            <a:off x="6446520" y="1645920"/>
+            <a:ext cx="4754880" cy="4297680"/>
           </a:xfrm>
           <a:prstGeom prst="rect">
             <a:avLst/>
@@ -13833,9 +13878,9 @@
           <a:p>
             <a:pPr>
               <a:spcAft>
-                <a:spcPts val="1000"/>
+                <a:spcPts val="1200"/>
               </a:spcAft>
-              <a:defRPr sz="1300" b="1">
+              <a:defRPr sz="1400" b="1">
                 <a:solidFill>
                   <a:srgbClr val="0284C7"/>
                 </a:solidFill>
@@ -13848,19 +13893,19 @@
           <a:p>
             <a:pPr>
               <a:spcAft>
-                <a:spcPts val="600"/>
+                <a:spcPts val="800"/>
               </a:spcAft>
             </a:pPr>
             <a:r>
-              <a:rPr b="1" sz="1000">
+              <a:rPr b="1" sz="1100">
                 <a:solidFill>
                   <a:srgbClr val="0F2B48"/>
                 </a:solidFill>
               </a:rPr>
-              <a:t>⚙ Standby: </a:t>
-            </a:r>
-            <a:r>
-              <a:rPr sz="950">
+              <a:t>⚙ Standby pose: </a:t>
+            </a:r>
+            <a:r>
+              <a:rPr sz="1100">
                 <a:solidFill>
                   <a:srgbClr val="1E293B"/>
                 </a:solidFill>
@@ -13871,11 +13916,11 @@
           <a:p>
             <a:pPr>
               <a:spcAft>
-                <a:spcPts val="600"/>
+                <a:spcPts val="800"/>
               </a:spcAft>
             </a:pPr>
             <a:r>
-              <a:rPr b="1" sz="1000">
+              <a:rPr b="1" sz="1100">
                 <a:solidFill>
                   <a:srgbClr val="0F2B48"/>
                 </a:solidFill>
@@ -13883,7 +13928,7 @@
               <a:t>⚙ Red bin (left): </a:t>
             </a:r>
             <a:r>
-              <a:rPr sz="950">
+              <a:rPr sz="1100">
                 <a:solidFill>
                   <a:srgbClr val="1E293B"/>
                 </a:solidFill>
@@ -13894,11 +13939,11 @@
           <a:p>
             <a:pPr>
               <a:spcAft>
-                <a:spcPts val="600"/>
+                <a:spcPts val="800"/>
               </a:spcAft>
             </a:pPr>
             <a:r>
-              <a:rPr b="1" sz="1000">
+              <a:rPr b="1" sz="1100">
                 <a:solidFill>
                   <a:srgbClr val="0F2B48"/>
                 </a:solidFill>
@@ -13906,7 +13951,7 @@
               <a:t>⚙ Yellow bin (right): </a:t>
             </a:r>
             <a:r>
-              <a:rPr sz="950">
+              <a:rPr sz="1100">
                 <a:solidFill>
                   <a:srgbClr val="1E293B"/>
                 </a:solidFill>
@@ -13917,11 +13962,11 @@
           <a:p>
             <a:pPr>
               <a:spcAft>
-                <a:spcPts val="600"/>
+                <a:spcPts val="800"/>
               </a:spcAft>
             </a:pPr>
             <a:r>
-              <a:rPr b="1" sz="1000">
+              <a:rPr b="1" sz="1100">
                 <a:solidFill>
                   <a:srgbClr val="0F2B48"/>
                 </a:solidFill>
@@ -13929,7 +13974,7 @@
               <a:t>⚙ Blue bin (rear): </a:t>
             </a:r>
             <a:r>
-              <a:rPr sz="950">
+              <a:rPr sz="1100">
                 <a:solidFill>
                   <a:srgbClr val="1E293B"/>
                 </a:solidFill>
@@ -13940,24 +13985,24 @@
           <a:p>
             <a:pPr>
               <a:spcAft>
-                <a:spcPts val="600"/>
+                <a:spcPts val="800"/>
               </a:spcAft>
             </a:pPr>
             <a:r>
-              <a:rPr b="1" sz="1000">
+              <a:rPr b="1" sz="1100">
                 <a:solidFill>
                   <a:srgbClr val="0F2B48"/>
                 </a:solidFill>
               </a:rPr>
-              <a:t>⚙ Observation: </a:t>
-            </a:r>
-            <a:r>
-              <a:rPr sz="950">
+              <a:t>⚙ Kinematic Invariance: </a:t>
+            </a:r>
+            <a:r>
+              <a:rPr sz="1100">
                 <a:solidFill>
                   <a:srgbClr val="1E293B"/>
                 </a:solidFill>
               </a:rPr>
-              <a:t>Shoulder lift, elbow, and wrist joints stay within 0.15 rad of each other across all three bin targets; only shoulder pan swings widely.</a:t>
+              <a:t>Shoulder lift, elbow, and wrist joints stay within 0.15 rad across all bins; only shoulder pan swings widely.</a:t>
             </a:r>
           </a:p>
         </p:txBody>
@@ -13988,8 +14033,8 @@
         </p:nvSpPr>
         <p:spPr>
           <a:xfrm>
-            <a:off x="731520" y="365760"/>
-            <a:ext cx="9144000" cy="274320"/>
+            <a:off x="731520" y="347472"/>
+            <a:ext cx="9144000" cy="292608"/>
           </a:xfrm>
           <a:prstGeom prst="rect">
             <a:avLst/>
@@ -14003,7 +14048,7 @@
           <a:lstStyle/>
           <a:p>
             <a:pPr>
-              <a:defRPr sz="1000" b="1">
+              <a:defRPr sz="1100" b="1">
                 <a:solidFill>
                   <a:srgbClr val="0284C7"/>
                 </a:solidFill>
@@ -14024,7 +14069,7 @@
         <p:spPr>
           <a:xfrm>
             <a:off x="731520" y="621792"/>
-            <a:ext cx="10515600" cy="548640"/>
+            <a:ext cx="10515600" cy="594360"/>
           </a:xfrm>
           <a:prstGeom prst="rect">
             <a:avLst/>
@@ -14038,7 +14083,7 @@
           <a:lstStyle/>
           <a:p>
             <a:pPr>
-              <a:defRPr sz="2000" b="1">
+              <a:defRPr sz="2200" b="1">
                 <a:solidFill>
                   <a:srgbClr val="0F2B48"/>
                 </a:solidFill>
@@ -14058,8 +14103,8 @@
         </p:nvSpPr>
         <p:spPr>
           <a:xfrm>
-            <a:off x="731520" y="1207008"/>
-            <a:ext cx="10728655" cy="18288"/>
+            <a:off x="731520" y="1243584"/>
+            <a:ext cx="10728655" cy="22860"/>
           </a:xfrm>
           <a:prstGeom prst="rect">
             <a:avLst/>
@@ -14101,7 +14146,7 @@
         </p:nvSpPr>
         <p:spPr>
           <a:xfrm>
-            <a:off x="731520" y="6309360"/>
+            <a:off x="731520" y="6327648"/>
             <a:ext cx="10728655" cy="13716"/>
           </a:xfrm>
           <a:prstGeom prst="rect">
@@ -14144,8 +14189,8 @@
         </p:nvSpPr>
         <p:spPr>
           <a:xfrm>
-            <a:off x="731520" y="6355080"/>
-            <a:ext cx="7315200" cy="320040"/>
+            <a:off x="731520" y="6364224"/>
+            <a:ext cx="7772400" cy="320040"/>
           </a:xfrm>
           <a:prstGeom prst="rect">
             <a:avLst/>
@@ -14159,7 +14204,7 @@
           <a:lstStyle/>
           <a:p>
             <a:pPr>
-              <a:defRPr sz="900">
+              <a:defRPr sz="950">
                 <a:solidFill>
                   <a:srgbClr val="64748B"/>
                 </a:solidFill>
@@ -14179,8 +14224,8 @@
         </p:nvSpPr>
         <p:spPr>
           <a:xfrm>
-            <a:off x="9631375" y="6355080"/>
-            <a:ext cx="1828800" cy="320040"/>
+            <a:off x="9357055" y="6364224"/>
+            <a:ext cx="2103120" cy="320040"/>
           </a:xfrm>
           <a:prstGeom prst="rect">
             <a:avLst/>
@@ -14194,7 +14239,7 @@
           <a:lstStyle/>
           <a:p>
             <a:pPr algn="r">
-              <a:defRPr sz="900" b="1">
+              <a:defRPr sz="950" b="1">
                 <a:solidFill>
                   <a:srgbClr val="0284C7"/>
                 </a:solidFill>
@@ -14214,12 +14259,12 @@
         </p:nvSpPr>
         <p:spPr>
           <a:xfrm>
-            <a:off x="731520" y="1463040"/>
-            <a:ext cx="5212080" cy="4572000"/>
+            <a:off x="731520" y="1444752"/>
+            <a:ext cx="5212080" cy="4663440"/>
           </a:xfrm>
           <a:prstGeom prst="roundRect">
             <a:avLst>
-              <a:gd name="adj" fmla="val 3000"/>
+              <a:gd name="adj" fmla="val 2500"/>
             </a:avLst>
           </a:prstGeom>
           <a:solidFill>
@@ -14261,8 +14306,8 @@
         </p:nvSpPr>
         <p:spPr>
           <a:xfrm>
-            <a:off x="914400" y="1645920"/>
-            <a:ext cx="4846320" cy="4206240"/>
+            <a:off x="960120" y="1645920"/>
+            <a:ext cx="4754880" cy="4297680"/>
           </a:xfrm>
           <a:prstGeom prst="rect">
             <a:avLst/>
@@ -14277,26 +14322,26 @@
           <a:p>
             <a:pPr>
               <a:spcAft>
-                <a:spcPts val="1000"/>
+                <a:spcPts val="1200"/>
               </a:spcAft>
-              <a:defRPr sz="1300" b="1">
+              <a:defRPr sz="1400" b="1">
                 <a:solidFill>
                   <a:srgbClr val="059669"/>
                 </a:solidFill>
               </a:defRPr>
             </a:pPr>
             <a:r>
-              <a:t>Runtime Behaviour &amp; Natural Friction Deceleration</a:t>
+              <a:t>Runtime Behaviour &amp; Friction Deceleration</a:t>
             </a:r>
           </a:p>
           <a:p>
             <a:pPr>
               <a:spcAft>
-                <a:spcPts val="600"/>
+                <a:spcPts val="800"/>
               </a:spcAft>
             </a:pPr>
             <a:r>
-              <a:rPr b="1" sz="1000">
+              <a:rPr b="1" sz="1100">
                 <a:solidFill>
                   <a:srgbClr val="0F2B48"/>
                 </a:solidFill>
@@ -14304,7 +14349,7 @@
               <a:t>✔ Transport: </a:t>
             </a:r>
             <a:r>
-              <a:rPr sz="950">
+              <a:rPr sz="1100">
                 <a:solidFill>
                   <a:srgbClr val="1E293B"/>
                 </a:solidFill>
@@ -14315,11 +14360,11 @@
           <a:p>
             <a:pPr>
               <a:spcAft>
-                <a:spcPts val="600"/>
+                <a:spcPts val="800"/>
               </a:spcAft>
             </a:pPr>
             <a:r>
-              <a:rPr b="1" sz="1000">
+              <a:rPr b="1" sz="1100">
                 <a:solidFill>
                   <a:srgbClr val="0F2B48"/>
                 </a:solidFill>
@@ -14327,22 +14372,22 @@
               <a:t>✔ Detection: </a:t>
             </a:r>
             <a:r>
-              <a:rPr sz="950">
+              <a:rPr sz="1100">
                 <a:solidFill>
                   <a:srgbClr val="1E293B"/>
                 </a:solidFill>
               </a:rPr>
-              <a:t>Pick-zone optical sensor actively identifies every SortableObject cube.</a:t>
+              <a:t>Pick-zone sensor actively identifies leading SortableObject cube.</a:t>
             </a:r>
           </a:p>
           <a:p>
             <a:pPr>
               <a:spcAft>
-                <a:spcPts val="600"/>
+                <a:spcPts val="800"/>
               </a:spcAft>
             </a:pPr>
             <a:r>
-              <a:rPr b="1" sz="1000">
+              <a:rPr b="1" sz="1100">
                 <a:solidFill>
                   <a:srgbClr val="0F2B48"/>
                 </a:solidFill>
@@ -14350,22 +14395,22 @@
               <a:t>✔ Stop: </a:t>
             </a:r>
             <a:r>
-              <a:rPr sz="950">
+              <a:rPr sz="1100">
                 <a:solidFill>
                   <a:srgbClr val="1E293B"/>
                 </a:solidFill>
               </a:rPr>
-              <a:t>At X &gt;= -0.015 m, conveyor cuts power (StopConveyor()). Friction halts cube smoothly at X ≈ 0.000 m (± 3 mm).</a:t>
+              <a:t>At X &gt;= -0.015 m, conveyor cuts power. Friction halts cube smoothly at X ≈ 0.000 m (± 3 mm).</a:t>
             </a:r>
           </a:p>
           <a:p>
             <a:pPr>
               <a:spcAft>
-                <a:spcPts val="600"/>
+                <a:spcPts val="800"/>
               </a:spcAft>
             </a:pPr>
             <a:r>
-              <a:rPr b="1" sz="1000">
+              <a:rPr b="1" sz="1100">
                 <a:solidFill>
                   <a:srgbClr val="0F2B48"/>
                 </a:solidFill>
@@ -14373,22 +14418,22 @@
               <a:t>✔ Zero Teleportation: </a:t>
             </a:r>
             <a:r>
-              <a:rPr sz="950">
+              <a:rPr sz="1100">
                 <a:solidFill>
                   <a:srgbClr val="1E293B"/>
                 </a:solidFill>
               </a:rPr>
-              <a:t>Eliminates artificial coordinate snapping or kinematic freezing.</a:t>
+              <a:t>Strictly eliminates artificial coordinate snapping or kinematic freezing.</a:t>
             </a:r>
           </a:p>
           <a:p>
             <a:pPr>
               <a:spcAft>
-                <a:spcPts val="600"/>
+                <a:spcPts val="800"/>
               </a:spcAft>
             </a:pPr>
             <a:r>
-              <a:rPr b="1" sz="1000">
+              <a:rPr b="1" sz="1100">
                 <a:solidFill>
                   <a:srgbClr val="0F2B48"/>
                 </a:solidFill>
@@ -14396,7 +14441,7 @@
               <a:t>✔ Resume: </a:t>
             </a:r>
             <a:r>
-              <a:rPr sz="950">
+              <a:rPr sz="1100">
                 <a:solidFill>
                   <a:srgbClr val="1E293B"/>
                 </a:solidFill>
@@ -14414,12 +14459,12 @@
         </p:nvSpPr>
         <p:spPr>
           <a:xfrm>
-            <a:off x="6217920" y="1463040"/>
-            <a:ext cx="5212080" cy="4572000"/>
+            <a:off x="6217920" y="1444752"/>
+            <a:ext cx="5212080" cy="4663440"/>
           </a:xfrm>
           <a:prstGeom prst="roundRect">
             <a:avLst>
-              <a:gd name="adj" fmla="val 3000"/>
+              <a:gd name="adj" fmla="val 2500"/>
             </a:avLst>
           </a:prstGeom>
           <a:solidFill>
@@ -14461,8 +14506,8 @@
         </p:nvSpPr>
         <p:spPr>
           <a:xfrm>
-            <a:off x="6400800" y="1645920"/>
-            <a:ext cx="4846320" cy="4206240"/>
+            <a:off x="6446520" y="1645920"/>
+            <a:ext cx="4754880" cy="4297680"/>
           </a:xfrm>
           <a:prstGeom prst="rect">
             <a:avLst/>
@@ -14477,9 +14522,9 @@
           <a:p>
             <a:pPr>
               <a:spcAft>
-                <a:spcPts val="1000"/>
+                <a:spcPts val="1200"/>
               </a:spcAft>
-              <a:defRPr sz="1300" b="1">
+              <a:defRPr sz="1400" b="1">
                 <a:solidFill>
                   <a:srgbClr val="0284C7"/>
                 </a:solidFill>
@@ -14492,11 +14537,11 @@
           <a:p>
             <a:pPr>
               <a:spcAft>
-                <a:spcPts val="600"/>
+                <a:spcPts val="800"/>
               </a:spcAft>
             </a:pPr>
             <a:r>
-              <a:rPr b="1" sz="1000">
+              <a:rPr b="1" sz="1100">
                 <a:solidFill>
                   <a:srgbClr val="0F2B48"/>
                 </a:solidFill>
@@ -14504,7 +14549,7 @@
               <a:t>⚙ Continuous Multi-Item Flow: </a:t>
             </a:r>
             <a:r>
-              <a:rPr sz="950">
+              <a:rPr sz="1100">
                 <a:solidFill>
                   <a:srgbClr val="1E293B"/>
                 </a:solidFill>
@@ -14515,11 +14560,11 @@
           <a:p>
             <a:pPr>
               <a:spcAft>
-                <a:spcPts val="600"/>
+                <a:spcPts val="800"/>
               </a:spcAft>
             </a:pPr>
             <a:r>
-              <a:rPr b="1" sz="1000">
+              <a:rPr b="1" sz="1100">
                 <a:solidFill>
                   <a:srgbClr val="0F2B48"/>
                 </a:solidFill>
@@ -14527,7 +14572,7 @@
               <a:t>⚙ Anti-Stacking Spacing: </a:t>
             </a:r>
             <a:r>
-              <a:rPr sz="950">
+              <a:rPr sz="1100">
                 <a:solidFill>
                   <a:srgbClr val="1E293B"/>
                 </a:solidFill>
@@ -14538,11 +14583,11 @@
           <a:p>
             <a:pPr>
               <a:spcAft>
-                <a:spcPts val="600"/>
+                <a:spcPts val="800"/>
               </a:spcAft>
             </a:pPr>
             <a:r>
-              <a:rPr b="1" sz="1000">
+              <a:rPr b="1" sz="1100">
                 <a:solidFill>
                   <a:srgbClr val="0F2B48"/>
                 </a:solidFill>
@@ -14550,7 +14595,7 @@
               <a:t>⚙ Visual consistency: </a:t>
             </a:r>
             <a:r>
-              <a:rPr sz="950">
+              <a:rPr sz="1100">
                 <a:solidFill>
                   <a:srgbClr val="1E293B"/>
                 </a:solidFill>
@@ -14561,11 +14606,11 @@
           <a:p>
             <a:pPr>
               <a:spcAft>
-                <a:spcPts val="600"/>
+                <a:spcPts val="800"/>
               </a:spcAft>
             </a:pPr>
             <a:r>
-              <a:rPr b="1" sz="1000">
+              <a:rPr b="1" sz="1100">
                 <a:solidFill>
                   <a:srgbClr val="0F2B48"/>
                 </a:solidFill>
@@ -14573,7 +14618,7 @@
               <a:t>⚙ Mechanical Rig Structure: </a:t>
             </a:r>
             <a:r>
-              <a:rPr sz="950">
+              <a:rPr sz="1100">
                 <a:solidFill>
                   <a:srgbClr val="1E293B"/>
                 </a:solidFill>
@@ -14584,11 +14629,11 @@
           <a:p>
             <a:pPr>
               <a:spcAft>
-                <a:spcPts val="600"/>
+                <a:spcPts val="800"/>
               </a:spcAft>
             </a:pPr>
             <a:r>
-              <a:rPr b="1" sz="1000">
+              <a:rPr b="1" sz="1100">
                 <a:solidFill>
                   <a:srgbClr val="0F2B48"/>
                 </a:solidFill>
@@ -14596,7 +14641,7 @@
               <a:t>⚙ Optical Sensor LED: </a:t>
             </a:r>
             <a:r>
-              <a:rPr sz="950">
+              <a:rPr sz="1100">
                 <a:solidFill>
                   <a:srgbClr val="1E293B"/>
                 </a:solidFill>

--- a/docs/week05/UC8_Week05_Milestone1_Presentation.pptx
+++ b/docs/week05/UC8_Week05_Milestone1_Presentation.pptx
@@ -8570,7 +8570,7 @@
               </a:defRPr>
             </a:pPr>
             <a:r>
-              <a:t>• All commitments made from Week 03 have been 100% fulfilled and reinforced with faculty feedback solutions.</a:t>
+              <a:t>• All commitments made for Milestone 1 have been 100% fulfilled and reinforced with faculty feedback solutions.</a:t>
             </a:r>
             <a:br/>
             <a:r>
@@ -9048,7 +9048,7 @@
                         </a:defRPr>
                       </a:pPr>
                       <a:r>
-                        <a:t>100% completion of Week 03 commitments (R1-R4)</a:t>
+                        <a:t>100% completion of Milestone 1 commitments (R1-R4)</a:t>
                       </a:r>
                     </a:p>
                   </a:txBody>
@@ -9643,7 +9643,7 @@
               </a:defRPr>
             </a:pPr>
             <a:r>
-              <a:t>Week 03 Baseline and Commitments Set Out for Milestone 1</a:t>
+              <a:t>Week 04 Baseline and Commitments Set Out for Milestone 1</a:t>
             </a:r>
           </a:p>
         </p:txBody>
@@ -9884,7 +9884,7 @@
               </a:defRPr>
             </a:pPr>
             <a:r>
-              <a:t>Baseline Achieved in Week 03</a:t>
+              <a:t>Baseline Achieved in Week 04</a:t>
             </a:r>
           </a:p>
           <a:p>

--- a/docs/week05/UC8_Week05_Milestone1_Presentation.pptx
+++ b/docs/week05/UC8_Week05_Milestone1_Presentation.pptx
@@ -8443,7 +8443,7 @@
               </a:defRPr>
             </a:pPr>
             <a:r>
-              <a:t>✔ Complete trials.csv QA Evidence</a:t>
+              <a:t>✔ Interactive Trajectory Trail [T]</a:t>
             </a:r>
           </a:p>
           <a:p>
@@ -8458,7 +8458,7 @@
               </a:defRPr>
             </a:pPr>
             <a:r>
-              <a:t>✔ Clean run_workcell.sh Launcher</a:t>
+              <a:t>✔ Complete trials.csv QA Evidence</a:t>
             </a:r>
           </a:p>
           <a:p>
@@ -9261,7 +9261,7 @@
                         </a:defRPr>
                       </a:pPr>
                       <a:r>
-                        <a:t>Option 1 bilateral symmetry, 90° wrist lock, pure base SCARA sweep</a:t>
+                        <a:t>Option 1 bilateral symmetry, 90° wrist lock, and Interactive Trajectory [T]</a:t>
                       </a:r>
                     </a:p>
                   </a:txBody>
@@ -10688,11 +10688,11 @@
           <a:p>
             <a:pPr>
               <a:spcAft>
-                <a:spcPts val="800"/>
+                <a:spcPts val="600"/>
               </a:spcAft>
             </a:pPr>
             <a:r>
-              <a:rPr b="1" sz="1100">
+              <a:rPr b="1" sz="1000">
                 <a:solidFill>
                   <a:srgbClr val="0F2B48"/>
                 </a:solidFill>
@@ -10700,7 +10700,7 @@
               <a:t>⚙ Kinematic Optimization: </a:t>
             </a:r>
             <a:r>
-              <a:rPr sz="1100">
+              <a:rPr sz="1000">
                 <a:solidFill>
                   <a:srgbClr val="1E293B"/>
                 </a:solidFill>
@@ -10711,11 +10711,34 @@
           <a:p>
             <a:pPr>
               <a:spcAft>
-                <a:spcPts val="800"/>
+                <a:spcPts val="600"/>
               </a:spcAft>
             </a:pPr>
             <a:r>
-              <a:rPr b="1" sz="1100">
+              <a:rPr b="1" sz="1000">
+                <a:solidFill>
+                  <a:srgbClr val="0F2B48"/>
+                </a:solidFill>
+              </a:rPr>
+              <a:t>⚙ Interactive Trajectory Trail [T]: </a:t>
+            </a:r>
+            <a:r>
+              <a:rPr sz="1000">
+                <a:solidFill>
+                  <a:srgbClr val="1E293B"/>
+                </a:solidFill>
+              </a:rPr>
+              <a:t>Implemented real-time neon ribbon visualizer at tool0 with 3.5s auto-fade and color-coded destination paths.</a:t>
+            </a:r>
+          </a:p>
+          <a:p>
+            <a:pPr>
+              <a:spcAft>
+                <a:spcPts val="600"/>
+              </a:spcAft>
+            </a:pPr>
+            <a:r>
+              <a:rPr b="1" sz="1000">
                 <a:solidFill>
                   <a:srgbClr val="0F2B48"/>
                 </a:solidFill>
@@ -10723,7 +10746,7 @@
               <a:t>⚙ Realistic PhysX Deceleration: </a:t>
             </a:r>
             <a:r>
-              <a:rPr sz="1100">
+              <a:rPr sz="1000">
                 <a:solidFill>
                   <a:srgbClr val="1E293B"/>
                 </a:solidFill>
@@ -10734,11 +10757,11 @@
           <a:p>
             <a:pPr>
               <a:spcAft>
-                <a:spcPts val="800"/>
+                <a:spcPts val="600"/>
               </a:spcAft>
             </a:pPr>
             <a:r>
-              <a:rPr b="1" sz="1100">
+              <a:rPr b="1" sz="1000">
                 <a:solidFill>
                   <a:srgbClr val="0F2B48"/>
                 </a:solidFill>
@@ -10746,7 +10769,7 @@
               <a:t>⚙ Continuous Multi-Item Flow: </a:t>
             </a:r>
             <a:r>
-              <a:rPr sz="1100">
+              <a:rPr sz="1000">
                 <a:solidFill>
                   <a:srgbClr val="1E293B"/>
                 </a:solidFill>
@@ -10757,11 +10780,11 @@
           <a:p>
             <a:pPr>
               <a:spcAft>
-                <a:spcPts val="800"/>
+                <a:spcPts val="600"/>
               </a:spcAft>
             </a:pPr>
             <a:r>
-              <a:rPr b="1" sz="1100">
+              <a:rPr b="1" sz="1000">
                 <a:solidFill>
                   <a:srgbClr val="0F2B48"/>
                 </a:solidFill>
@@ -10769,7 +10792,7 @@
               <a:t>⚙ Empirical QA Logging: </a:t>
             </a:r>
             <a:r>
-              <a:rPr sz="1100">
+              <a:rPr sz="1000">
                 <a:solidFill>
                   <a:srgbClr val="1E293B"/>
                 </a:solidFill>
@@ -13411,7 +13434,7 @@
               </a:defRPr>
             </a:pPr>
             <a:r>
-              <a:t>KINEMATICS</a:t>
+              <a:t>KINEMATICS &amp; TRAJECTORY</a:t>
             </a:r>
           </a:p>
         </p:txBody>
@@ -13446,7 +13469,7 @@
               </a:defRPr>
             </a:pPr>
             <a:r>
-              <a:t>Downward Wrist Orientation and Transfer Motion</a:t>
+              <a:t>Downward Wrist Lock, Transfer Motion &amp; Trajectory Trail</a:t>
             </a:r>
           </a:p>
         </p:txBody>
@@ -13616,7 +13639,7 @@
         <p:spPr>
           <a:xfrm>
             <a:off x="731520" y="1444752"/>
-            <a:ext cx="5212080" cy="4663440"/>
+            <a:ext cx="5212080" cy="3474720"/>
           </a:xfrm>
           <a:prstGeom prst="roundRect">
             <a:avLst>
@@ -13662,8 +13685,8 @@
         </p:nvSpPr>
         <p:spPr>
           <a:xfrm>
-            <a:off x="960120" y="1645920"/>
-            <a:ext cx="4754880" cy="4297680"/>
+            <a:off x="960120" y="1600200"/>
+            <a:ext cx="4754880" cy="3154680"/>
           </a:xfrm>
           <a:prstGeom prst="rect">
             <a:avLst/>
@@ -13678,7 +13701,7 @@
           <a:p>
             <a:pPr>
               <a:spcAft>
-                <a:spcPts val="1200"/>
+                <a:spcPts val="800"/>
               </a:spcAft>
               <a:defRPr sz="1400" b="1">
                 <a:solidFill>
@@ -13693,11 +13716,11 @@
           <a:p>
             <a:pPr>
               <a:spcAft>
-                <a:spcPts val="800"/>
+                <a:spcPts val="400"/>
               </a:spcAft>
             </a:pPr>
             <a:r>
-              <a:rPr b="1" sz="1100">
+              <a:rPr b="1" sz="1000">
                 <a:solidFill>
                   <a:srgbClr val="0F2B48"/>
                 </a:solidFill>
@@ -13705,7 +13728,7 @@
               <a:t>✔ Downward tool orientation: </a:t>
             </a:r>
             <a:r>
-              <a:rPr sz="1100">
+              <a:rPr sz="1000">
                 <a:solidFill>
                   <a:srgbClr val="1E293B"/>
                 </a:solidFill>
@@ -13716,11 +13739,11 @@
           <a:p>
             <a:pPr>
               <a:spcAft>
-                <a:spcPts val="800"/>
+                <a:spcPts val="400"/>
               </a:spcAft>
             </a:pPr>
             <a:r>
-              <a:rPr b="1" sz="1100">
+              <a:rPr b="1" sz="1000">
                 <a:solidFill>
                   <a:srgbClr val="0F2B48"/>
                 </a:solidFill>
@@ -13728,7 +13751,7 @@
               <a:t>✔ Pre-grasp waypoint: </a:t>
             </a:r>
             <a:r>
-              <a:rPr sz="1100">
+              <a:rPr sz="1000">
                 <a:solidFill>
                   <a:srgbClr val="1E293B"/>
                 </a:solidFill>
@@ -13739,11 +13762,11 @@
           <a:p>
             <a:pPr>
               <a:spcAft>
-                <a:spcPts val="800"/>
+                <a:spcPts val="400"/>
               </a:spcAft>
             </a:pPr>
             <a:r>
-              <a:rPr b="1" sz="1100">
+              <a:rPr b="1" sz="1000">
                 <a:solidFill>
                   <a:srgbClr val="0F2B48"/>
                 </a:solidFill>
@@ -13751,7 +13774,7 @@
               <a:t>✔ Vertical descent: </a:t>
             </a:r>
             <a:r>
-              <a:rPr sz="1100">
+              <a:rPr sz="1000">
                 <a:solidFill>
                   <a:srgbClr val="1E293B"/>
                 </a:solidFill>
@@ -13762,11 +13785,11 @@
           <a:p>
             <a:pPr>
               <a:spcAft>
-                <a:spcPts val="800"/>
+                <a:spcPts val="400"/>
               </a:spcAft>
             </a:pPr>
             <a:r>
-              <a:rPr b="1" sz="1100">
+              <a:rPr b="1" sz="1000">
                 <a:solidFill>
                   <a:srgbClr val="0F2B48"/>
                 </a:solidFill>
@@ -13774,7 +13797,7 @@
               <a:t>✔ Lift before transfer: </a:t>
             </a:r>
             <a:r>
-              <a:rPr sz="1100">
+              <a:rPr sz="1000">
                 <a:solidFill>
                   <a:srgbClr val="1E293B"/>
                 </a:solidFill>
@@ -13785,11 +13808,11 @@
           <a:p>
             <a:pPr>
               <a:spcAft>
-                <a:spcPts val="800"/>
+                <a:spcPts val="400"/>
               </a:spcAft>
             </a:pPr>
             <a:r>
-              <a:rPr b="1" sz="1100">
+              <a:rPr b="1" sz="1000">
                 <a:solidFill>
                   <a:srgbClr val="0F2B48"/>
                 </a:solidFill>
@@ -13797,7 +13820,7 @@
               <a:t>✔ Dominant shoulder pan: </a:t>
             </a:r>
             <a:r>
-              <a:rPr sz="1100">
+              <a:rPr sz="1000">
                 <a:solidFill>
                   <a:srgbClr val="1E293B"/>
                 </a:solidFill>
@@ -13816,7 +13839,7 @@
         <p:spPr>
           <a:xfrm>
             <a:off x="6217920" y="1444752"/>
-            <a:ext cx="5212080" cy="4663440"/>
+            <a:ext cx="5212080" cy="3474720"/>
           </a:xfrm>
           <a:prstGeom prst="roundRect">
             <a:avLst>
@@ -13862,8 +13885,8 @@
         </p:nvSpPr>
         <p:spPr>
           <a:xfrm>
-            <a:off x="6446520" y="1645920"/>
-            <a:ext cx="4754880" cy="4297680"/>
+            <a:off x="6446520" y="1600200"/>
+            <a:ext cx="4754880" cy="3154680"/>
           </a:xfrm>
           <a:prstGeom prst="rect">
             <a:avLst/>
@@ -13878,7 +13901,7 @@
           <a:p>
             <a:pPr>
               <a:spcAft>
-                <a:spcPts val="1200"/>
+                <a:spcPts val="800"/>
               </a:spcAft>
               <a:defRPr sz="1400" b="1">
                 <a:solidFill>
@@ -13893,11 +13916,11 @@
           <a:p>
             <a:pPr>
               <a:spcAft>
-                <a:spcPts val="800"/>
+                <a:spcPts val="400"/>
               </a:spcAft>
             </a:pPr>
             <a:r>
-              <a:rPr b="1" sz="1100">
+              <a:rPr b="1" sz="1000">
                 <a:solidFill>
                   <a:srgbClr val="0F2B48"/>
                 </a:solidFill>
@@ -13905,7 +13928,7 @@
               <a:t>⚙ Standby pose: </a:t>
             </a:r>
             <a:r>
-              <a:rPr sz="1100">
+              <a:rPr sz="1000">
                 <a:solidFill>
                   <a:srgbClr val="1E293B"/>
                 </a:solidFill>
@@ -13916,11 +13939,11 @@
           <a:p>
             <a:pPr>
               <a:spcAft>
-                <a:spcPts val="800"/>
+                <a:spcPts val="400"/>
               </a:spcAft>
             </a:pPr>
             <a:r>
-              <a:rPr b="1" sz="1100">
+              <a:rPr b="1" sz="1000">
                 <a:solidFill>
                   <a:srgbClr val="0F2B48"/>
                 </a:solidFill>
@@ -13928,7 +13951,7 @@
               <a:t>⚙ Red bin (left): </a:t>
             </a:r>
             <a:r>
-              <a:rPr sz="1100">
+              <a:rPr sz="1000">
                 <a:solidFill>
                   <a:srgbClr val="1E293B"/>
                 </a:solidFill>
@@ -13939,11 +13962,11 @@
           <a:p>
             <a:pPr>
               <a:spcAft>
-                <a:spcPts val="800"/>
+                <a:spcPts val="400"/>
               </a:spcAft>
             </a:pPr>
             <a:r>
-              <a:rPr b="1" sz="1100">
+              <a:rPr b="1" sz="1000">
                 <a:solidFill>
                   <a:srgbClr val="0F2B48"/>
                 </a:solidFill>
@@ -13951,7 +13974,7 @@
               <a:t>⚙ Yellow bin (right): </a:t>
             </a:r>
             <a:r>
-              <a:rPr sz="1100">
+              <a:rPr sz="1000">
                 <a:solidFill>
                   <a:srgbClr val="1E293B"/>
                 </a:solidFill>
@@ -13962,11 +13985,11 @@
           <a:p>
             <a:pPr>
               <a:spcAft>
-                <a:spcPts val="800"/>
+                <a:spcPts val="400"/>
               </a:spcAft>
             </a:pPr>
             <a:r>
-              <a:rPr b="1" sz="1100">
+              <a:rPr b="1" sz="1000">
                 <a:solidFill>
                   <a:srgbClr val="0F2B48"/>
                 </a:solidFill>
@@ -13974,7 +13997,7 @@
               <a:t>⚙ Blue bin (rear): </a:t>
             </a:r>
             <a:r>
-              <a:rPr sz="1100">
+              <a:rPr sz="1000">
                 <a:solidFill>
                   <a:srgbClr val="1E293B"/>
                 </a:solidFill>
@@ -13985,11 +14008,11 @@
           <a:p>
             <a:pPr>
               <a:spcAft>
-                <a:spcPts val="800"/>
+                <a:spcPts val="400"/>
               </a:spcAft>
             </a:pPr>
             <a:r>
-              <a:rPr b="1" sz="1100">
+              <a:rPr b="1" sz="1000">
                 <a:solidFill>
                   <a:srgbClr val="0F2B48"/>
                 </a:solidFill>
@@ -13997,12 +14020,117 @@
               <a:t>⚙ Kinematic Invariance: </a:t>
             </a:r>
             <a:r>
-              <a:rPr sz="1100">
+              <a:rPr sz="1000">
                 <a:solidFill>
                   <a:srgbClr val="1E293B"/>
                 </a:solidFill>
               </a:rPr>
               <a:t>Shoulder lift, elbow, and wrist joints stay within 0.15 rad across all bins; only shoulder pan swings widely.</a:t>
+            </a:r>
+          </a:p>
+        </p:txBody>
+      </p:sp>
+      <p:sp>
+        <p:nvSpPr>
+          <p:cNvPr id="12" name="Rounded Rectangle 11"/>
+          <p:cNvSpPr/>
+          <p:nvPr/>
+        </p:nvSpPr>
+        <p:spPr>
+          <a:xfrm>
+            <a:off x="731520" y="5120640"/>
+            <a:ext cx="10728655" cy="1051560"/>
+          </a:xfrm>
+          <a:prstGeom prst="roundRect">
+            <a:avLst>
+              <a:gd name="adj" fmla="val 2500"/>
+            </a:avLst>
+          </a:prstGeom>
+          <a:solidFill>
+            <a:srgbClr val="FFFFFF"/>
+          </a:solidFill>
+          <a:ln w="12700">
+            <a:solidFill>
+              <a:srgbClr val="E2E8F0"/>
+            </a:solidFill>
+          </a:ln>
+        </p:spPr>
+        <p:style>
+          <a:lnRef idx="1">
+            <a:schemeClr val="accent1"/>
+          </a:lnRef>
+          <a:fillRef idx="3">
+            <a:schemeClr val="accent1"/>
+          </a:fillRef>
+          <a:effectRef idx="2">
+            <a:schemeClr val="accent1"/>
+          </a:effectRef>
+          <a:fontRef idx="minor">
+            <a:schemeClr val="lt1"/>
+          </a:fontRef>
+        </p:style>
+        <p:txBody>
+          <a:bodyPr rtlCol="0" anchor="ctr"/>
+          <a:lstStyle/>
+          <a:p>
+            <a:pPr algn="ctr"/>
+          </a:p>
+        </p:txBody>
+      </p:sp>
+      <p:sp>
+        <p:nvSpPr>
+          <p:cNvPr id="13" name="TextBox 12"/>
+          <p:cNvSpPr txBox="1"/>
+          <p:nvPr/>
+        </p:nvSpPr>
+        <p:spPr>
+          <a:xfrm>
+            <a:off x="960120" y="5193792"/>
+            <a:ext cx="10241280" cy="896112"/>
+          </a:xfrm>
+          <a:prstGeom prst="rect">
+            <a:avLst/>
+          </a:prstGeom>
+          <a:noFill/>
+        </p:spPr>
+        <p:txBody>
+          <a:bodyPr wrap="square">
+            <a:spAutoFit/>
+          </a:bodyPr>
+          <a:lstStyle/>
+          <a:p>
+            <a:pPr>
+              <a:spcAft>
+                <a:spcPts val="300"/>
+              </a:spcAft>
+              <a:defRPr sz="1200" b="1">
+                <a:solidFill>
+                  <a:srgbClr val="0F2B48"/>
+                </a:solidFill>
+              </a:defRPr>
+            </a:pPr>
+            <a:r>
+              <a:t>INTERACTIVE TRAJECTORY VISUALIZATION &amp; ANTI-CLUTTER TRAIL (HOTKEY [T])</a:t>
+            </a:r>
+          </a:p>
+          <a:p>
+            <a:pPr>
+              <a:defRPr sz="1000">
+                <a:solidFill>
+                  <a:srgbClr val="1E293B"/>
+                </a:solidFill>
+              </a:defRPr>
+            </a:pPr>
+            <a:r>
+              <a:t>• Interactive Toggle [T]: Press [T] during runtime to toggle smooth 3D neon ribbon trail mapped to tool0 end-effector.</a:t>
+            </a:r>
+            <a:br/>
+            <a:r>
+              <a:t>• Anti-Clutter Auto-Fade (3.5s): Automatically fades out tail points after 3.5s, preventing visual clutter across long runs.</a:t>
+            </a:r>
+            <a:br/>
+            <a:r>
+              <a:t>• Color-Coded Target Paths: Dynamically tints trail based on destination bin: Red (#FF2A6D), Yellow (#FFD166), Blue (#05D9E8).</a:t>
             </a:r>
           </a:p>
         </p:txBody>
